--- a/FlowCastAI-Predicting-Traffic-with-Machine-Learning.pptx
+++ b/FlowCastAI-Predicting-Traffic-with-Machine-Learning.pptx
@@ -4,57 +4,139 @@
   <p:sldMasterIdLst>
     <p:sldMasterId id="2147483648" r:id="rId1"/>
   </p:sldMasterIdLst>
+  <p:notesMasterIdLst>
+    <p:notesMasterId r:id="rId14"/>
+  </p:notesMasterIdLst>
   <p:sldIdLst>
     <p:sldId id="256" r:id="rId2"/>
     <p:sldId id="257" r:id="rId3"/>
     <p:sldId id="258" r:id="rId4"/>
     <p:sldId id="259" r:id="rId5"/>
-    <p:sldId id="260" r:id="rId6"/>
-    <p:sldId id="261" r:id="rId7"/>
-    <p:sldId id="262" r:id="rId8"/>
-    <p:sldId id="263" r:id="rId9"/>
-    <p:sldId id="264" r:id="rId10"/>
-    <p:sldId id="265" r:id="rId11"/>
+    <p:sldId id="266" r:id="rId6"/>
+    <p:sldId id="267" r:id="rId7"/>
+    <p:sldId id="260" r:id="rId8"/>
+    <p:sldId id="261" r:id="rId9"/>
+    <p:sldId id="262" r:id="rId10"/>
+    <p:sldId id="263" r:id="rId11"/>
+    <p:sldId id="264" r:id="rId12"/>
+    <p:sldId id="265" r:id="rId13"/>
   </p:sldIdLst>
-  <p:notesMasterIdLst>
-    <p:notesMasterId r:id="rId12"/>
-  </p:notesMasterIdLst>
   <p:sldSz cx="14630400" cy="8229600"/>
   <p:notesSz cx="8229600" cy="14630400"/>
   <p:embeddedFontLst>
     <p:embeddedFont>
-      <p:font typeface="Barlow"/>
-      <p:regular r:id="rId17"/>
+      <p:font typeface="Consolas" panose="020B0609020204030204" pitchFamily="49" charset="0"/>
+      <p:regular r:id="rId15"/>
+      <p:bold r:id="rId16"/>
+      <p:italic r:id="rId17"/>
+      <p:boldItalic r:id="rId18"/>
     </p:embeddedFont>
     <p:embeddedFont>
-      <p:font typeface="Barlow"/>
-      <p:regular r:id="rId18"/>
-    </p:embeddedFont>
-    <p:embeddedFont>
-      <p:font typeface="Barlow"/>
+      <p:font typeface="Montserrat" pitchFamily="2" charset="0"/>
       <p:regular r:id="rId19"/>
-    </p:embeddedFont>
-    <p:embeddedFont>
-      <p:font typeface="Barlow"/>
-      <p:regular r:id="rId20"/>
-    </p:embeddedFont>
-    <p:embeddedFont>
-      <p:font typeface="Montserrat"/>
-      <p:regular r:id="rId21"/>
-    </p:embeddedFont>
-    <p:embeddedFont>
-      <p:font typeface="Montserrat"/>
-      <p:regular r:id="rId22"/>
-    </p:embeddedFont>
-    <p:embeddedFont>
-      <p:font typeface="Montserrat"/>
-      <p:regular r:id="rId23"/>
-    </p:embeddedFont>
-    <p:embeddedFont>
-      <p:font typeface="Montserrat"/>
-      <p:regular r:id="rId24"/>
+      <p:bold r:id="rId20"/>
     </p:embeddedFont>
   </p:embeddedFontLst>
+  <p:defaultTextStyle>
+    <a:defPPr>
+      <a:defRPr lang="en-US"/>
+    </a:defPPr>
+    <a:lvl1pPr marL="0" algn="l" defTabSz="914400" rtl="0" eaLnBrk="1" latinLnBrk="0" hangingPunct="1">
+      <a:defRPr sz="1800" kern="1200">
+        <a:solidFill>
+          <a:schemeClr val="tx1"/>
+        </a:solidFill>
+        <a:latin typeface="+mn-lt"/>
+        <a:ea typeface="+mn-ea"/>
+        <a:cs typeface="+mn-cs"/>
+      </a:defRPr>
+    </a:lvl1pPr>
+    <a:lvl2pPr marL="457200" algn="l" defTabSz="914400" rtl="0" eaLnBrk="1" latinLnBrk="0" hangingPunct="1">
+      <a:defRPr sz="1800" kern="1200">
+        <a:solidFill>
+          <a:schemeClr val="tx1"/>
+        </a:solidFill>
+        <a:latin typeface="+mn-lt"/>
+        <a:ea typeface="+mn-ea"/>
+        <a:cs typeface="+mn-cs"/>
+      </a:defRPr>
+    </a:lvl2pPr>
+    <a:lvl3pPr marL="914400" algn="l" defTabSz="914400" rtl="0" eaLnBrk="1" latinLnBrk="0" hangingPunct="1">
+      <a:defRPr sz="1800" kern="1200">
+        <a:solidFill>
+          <a:schemeClr val="tx1"/>
+        </a:solidFill>
+        <a:latin typeface="+mn-lt"/>
+        <a:ea typeface="+mn-ea"/>
+        <a:cs typeface="+mn-cs"/>
+      </a:defRPr>
+    </a:lvl3pPr>
+    <a:lvl4pPr marL="1371600" algn="l" defTabSz="914400" rtl="0" eaLnBrk="1" latinLnBrk="0" hangingPunct="1">
+      <a:defRPr sz="1800" kern="1200">
+        <a:solidFill>
+          <a:schemeClr val="tx1"/>
+        </a:solidFill>
+        <a:latin typeface="+mn-lt"/>
+        <a:ea typeface="+mn-ea"/>
+        <a:cs typeface="+mn-cs"/>
+      </a:defRPr>
+    </a:lvl4pPr>
+    <a:lvl5pPr marL="1828800" algn="l" defTabSz="914400" rtl="0" eaLnBrk="1" latinLnBrk="0" hangingPunct="1">
+      <a:defRPr sz="1800" kern="1200">
+        <a:solidFill>
+          <a:schemeClr val="tx1"/>
+        </a:solidFill>
+        <a:latin typeface="+mn-lt"/>
+        <a:ea typeface="+mn-ea"/>
+        <a:cs typeface="+mn-cs"/>
+      </a:defRPr>
+    </a:lvl5pPr>
+    <a:lvl6pPr marL="2286000" algn="l" defTabSz="914400" rtl="0" eaLnBrk="1" latinLnBrk="0" hangingPunct="1">
+      <a:defRPr sz="1800" kern="1200">
+        <a:solidFill>
+          <a:schemeClr val="tx1"/>
+        </a:solidFill>
+        <a:latin typeface="+mn-lt"/>
+        <a:ea typeface="+mn-ea"/>
+        <a:cs typeface="+mn-cs"/>
+      </a:defRPr>
+    </a:lvl6pPr>
+    <a:lvl7pPr marL="2743200" algn="l" defTabSz="914400" rtl="0" eaLnBrk="1" latinLnBrk="0" hangingPunct="1">
+      <a:defRPr sz="1800" kern="1200">
+        <a:solidFill>
+          <a:schemeClr val="tx1"/>
+        </a:solidFill>
+        <a:latin typeface="+mn-lt"/>
+        <a:ea typeface="+mn-ea"/>
+        <a:cs typeface="+mn-cs"/>
+      </a:defRPr>
+    </a:lvl7pPr>
+    <a:lvl8pPr marL="3200400" algn="l" defTabSz="914400" rtl="0" eaLnBrk="1" latinLnBrk="0" hangingPunct="1">
+      <a:defRPr sz="1800" kern="1200">
+        <a:solidFill>
+          <a:schemeClr val="tx1"/>
+        </a:solidFill>
+        <a:latin typeface="+mn-lt"/>
+        <a:ea typeface="+mn-ea"/>
+        <a:cs typeface="+mn-cs"/>
+      </a:defRPr>
+    </a:lvl8pPr>
+    <a:lvl9pPr marL="3657600" algn="l" defTabSz="914400" rtl="0" eaLnBrk="1" latinLnBrk="0" hangingPunct="1">
+      <a:defRPr sz="1800" kern="1200">
+        <a:solidFill>
+          <a:schemeClr val="tx1"/>
+        </a:solidFill>
+        <a:latin typeface="+mn-lt"/>
+        <a:ea typeface="+mn-ea"/>
+        <a:cs typeface="+mn-cs"/>
+      </a:defRPr>
+    </a:lvl9pPr>
+  </p:defaultTextStyle>
+  <p:extLst>
+    <p:ext uri="{EFAFB233-063F-42B5-8137-9DF3F51BA10A}">
+      <p15:sldGuideLst xmlns:p15="http://schemas.microsoft.com/office/powerpoint/2012/main"/>
+    </p:ext>
+  </p:extLst>
 </p:presentation>
 </file>
 
@@ -80,234 +162,10 @@
           <a:chExt cx="0" cy="0"/>
         </a:xfrm>
       </p:grpSpPr>
-      <p:sp>
-        <p:nvSpPr>
-          <p:cNvPr id="2" name="Header Placeholder 1"/>
-          <p:cNvSpPr>
-            <a:spLocks noGrp="1"/>
-          </p:cNvSpPr>
-          <p:nvPr>
-            <p:ph type="hdr" sz="quarter"/>
-          </p:nvPr>
-        </p:nvSpPr>
-        <p:spPr>
-          <a:xfrm>
-            <a:off x="0" y="0"/>
-            <a:ext cx="2971800" cy="458788"/>
-          </a:xfrm>
-          <a:prstGeom prst="rect">
-            <a:avLst/>
-          </a:prstGeom>
-        </p:spPr>
-        <p:txBody>
-          <a:bodyPr vert="horz" lIns="91440" tIns="45720" rIns="91440" bIns="45720" rtlCol="0"/>
-          <a:lstStyle>
-            <a:lvl1pPr algn="l">
-              <a:defRPr sz="1200"/>
-            </a:lvl1pPr>
-          </a:lstStyle>
-          <a:p>
-            <a:endParaRPr lang="en-US"/>
-          </a:p>
-        </p:txBody>
-      </p:sp>
-      <p:sp>
-        <p:nvSpPr>
-          <p:cNvPr id="3" name="Date Placeholder 2"/>
-          <p:cNvSpPr>
-            <a:spLocks noGrp="1"/>
-          </p:cNvSpPr>
-          <p:nvPr>
-            <p:ph type="dt" idx="1"/>
-          </p:nvPr>
-        </p:nvSpPr>
-        <p:spPr>
-          <a:xfrm>
-            <a:off x="3884613" y="0"/>
-            <a:ext cx="2971800" cy="458788"/>
-          </a:xfrm>
-          <a:prstGeom prst="rect">
-            <a:avLst/>
-          </a:prstGeom>
-        </p:spPr>
-        <p:txBody>
-          <a:bodyPr vert="horz" lIns="91440" tIns="45720" rIns="91440" bIns="45720" rtlCol="0"/>
-          <a:lstStyle>
-            <a:lvl1pPr algn="r">
-              <a:defRPr sz="1200"/>
-            </a:lvl1pPr>
-          </a:lstStyle>
-          <a:p>
-            <a:fld id="{5282F153-3F37-0F45-9E97-73ACFA13230C}" type="datetimeFigureOut">
-              <a:rPr lang="en-US"/>
-              <a:t>7/23/19</a:t>
-            </a:fld>
-            <a:endParaRPr lang="en-US"/>
-          </a:p>
-        </p:txBody>
-      </p:sp>
-      <p:sp>
-        <p:nvSpPr>
-          <p:cNvPr id="4" name="Slide Image Placeholder 3"/>
-          <p:cNvSpPr>
-            <a:spLocks noGrp="1" noRot="1" noChangeAspect="1"/>
-          </p:cNvSpPr>
-          <p:nvPr>
-            <p:ph type="sldImg" idx="2"/>
-          </p:nvPr>
-        </p:nvSpPr>
-        <p:spPr>
-          <a:xfrm>
-            <a:off x="685800" y="1143000"/>
-            <a:ext cx="5486400" cy="3086100"/>
-          </a:xfrm>
-          <a:prstGeom prst="rect">
-            <a:avLst/>
-          </a:prstGeom>
-          <a:noFill/>
-          <a:ln w="12700">
-            <a:solidFill>
-              <a:prstClr val="black"/>
-            </a:solidFill>
-          </a:ln>
-        </p:spPr>
-        <p:txBody>
-          <a:bodyPr vert="horz" lIns="91440" tIns="45720" rIns="91440" bIns="45720" rtlCol="0" anchor="ctr"/>
-          <a:lstStyle/>
-          <a:p>
-            <a:endParaRPr lang="en-US"/>
-          </a:p>
-        </p:txBody>
-      </p:sp>
-      <p:sp>
-        <p:nvSpPr>
-          <p:cNvPr id="5" name="Notes Placeholder 4"/>
-          <p:cNvSpPr>
-            <a:spLocks noGrp="1"/>
-          </p:cNvSpPr>
-          <p:nvPr>
-            <p:ph type="body" sz="quarter" idx="3"/>
-          </p:nvPr>
-        </p:nvSpPr>
-        <p:spPr>
-          <a:xfrm>
-            <a:off x="685800" y="4400550"/>
-            <a:ext cx="5486400" cy="3600450"/>
-          </a:xfrm>
-          <a:prstGeom prst="rect">
-            <a:avLst/>
-          </a:prstGeom>
-        </p:spPr>
-        <p:txBody>
-          <a:bodyPr vert="horz" lIns="91440" tIns="45720" rIns="91440" bIns="45720" rtlCol="0"/>
-          <a:lstStyle/>
-          <a:p>
-            <a:pPr lvl="0"/>
-            <a:r>
-              <a:rPr lang="en-US"/>
-              <a:t>Click to edit Master text styles</a:t>
-            </a:r>
-          </a:p>
-          <a:p>
-            <a:pPr lvl="1"/>
-            <a:r>
-              <a:rPr lang="en-US"/>
-              <a:t>Second level</a:t>
-            </a:r>
-          </a:p>
-          <a:p>
-            <a:pPr lvl="2"/>
-            <a:r>
-              <a:rPr lang="en-US"/>
-              <a:t>Third level</a:t>
-            </a:r>
-          </a:p>
-          <a:p>
-            <a:pPr lvl="3"/>
-            <a:r>
-              <a:rPr lang="en-US"/>
-              <a:t>Fourth level</a:t>
-            </a:r>
-          </a:p>
-          <a:p>
-            <a:pPr lvl="4"/>
-            <a:r>
-              <a:rPr lang="en-US"/>
-              <a:t>Fifth level</a:t>
-            </a:r>
-          </a:p>
-        </p:txBody>
-      </p:sp>
-      <p:sp>
-        <p:nvSpPr>
-          <p:cNvPr id="6" name="Footer Placeholder 5"/>
-          <p:cNvSpPr>
-            <a:spLocks noGrp="1"/>
-          </p:cNvSpPr>
-          <p:nvPr>
-            <p:ph type="ftr" sz="quarter" idx="4"/>
-          </p:nvPr>
-        </p:nvSpPr>
-        <p:spPr>
-          <a:xfrm>
-            <a:off x="0" y="8685213"/>
-            <a:ext cx="2971800" cy="458787"/>
-          </a:xfrm>
-          <a:prstGeom prst="rect">
-            <a:avLst/>
-          </a:prstGeom>
-        </p:spPr>
-        <p:txBody>
-          <a:bodyPr vert="horz" lIns="91440" tIns="45720" rIns="91440" bIns="45720" rtlCol="0" anchor="b"/>
-          <a:lstStyle>
-            <a:lvl1pPr algn="l">
-              <a:defRPr sz="1200"/>
-            </a:lvl1pPr>
-          </a:lstStyle>
-          <a:p>
-            <a:endParaRPr lang="en-US"/>
-          </a:p>
-        </p:txBody>
-      </p:sp>
-      <p:sp>
-        <p:nvSpPr>
-          <p:cNvPr id="7" name="Slide Number Placeholder 6"/>
-          <p:cNvSpPr>
-            <a:spLocks noGrp="1"/>
-          </p:cNvSpPr>
-          <p:nvPr>
-            <p:ph type="sldNum" sz="quarter" idx="5"/>
-          </p:nvPr>
-        </p:nvSpPr>
-        <p:spPr>
-          <a:xfrm>
-            <a:off x="3884613" y="8685213"/>
-            <a:ext cx="2971800" cy="458787"/>
-          </a:xfrm>
-          <a:prstGeom prst="rect">
-            <a:avLst/>
-          </a:prstGeom>
-        </p:spPr>
-        <p:txBody>
-          <a:bodyPr vert="horz" lIns="91440" tIns="45720" rIns="91440" bIns="45720" rtlCol="0" anchor="b"/>
-          <a:lstStyle>
-            <a:lvl1pPr algn="r">
-              <a:defRPr sz="1200"/>
-            </a:lvl1pPr>
-          </a:lstStyle>
-          <a:p>
-            <a:fld id="{CE5E9CC1-C706-0F49-92D6-E571CC5EEA8F}" type="slidenum">
-              <a:rPr lang="en-US"/>
-              <a:t>‹#›</a:t>
-            </a:fld>
-            <a:endParaRPr lang="en-US"/>
-          </a:p>
-        </p:txBody>
-      </p:sp>
     </p:spTree>
     <p:extLst>
       <p:ext uri="{BB962C8B-B14F-4D97-AF65-F5344CB8AC3E}">
-        <p14:creationId xmlns:p14="http://schemas.microsoft.com/office/powerpoint/2010/main" val="1024086991"/>
+        <p14:creationId xmlns:p14="http://schemas.microsoft.com/office/powerpoint/2010/main" val="1192779556"/>
       </p:ext>
     </p:extLst>
   </p:cSld>
@@ -451,10 +309,6 @@
           <a:bodyPr/>
           <a:lstStyle/>
           <a:p>
-            <a:r>
-              <a:rPr lang="en-US" dirty="0"/>
-              <a:t/>
-            </a:r>
             <a:endParaRPr lang="en-US" dirty="0"/>
           </a:p>
         </p:txBody>
@@ -539,10 +393,6 @@
           <a:bodyPr/>
           <a:lstStyle/>
           <a:p>
-            <a:r>
-              <a:rPr lang="en-US" dirty="0"/>
-              <a:t/>
-            </a:r>
             <a:endParaRPr lang="en-US" dirty="0"/>
           </a:p>
         </p:txBody>
@@ -564,7 +414,7 @@
           <a:p>
             <a:fld id="{F7021451-1387-4CA6-816F-3879F97B5CBC}" type="slidenum">
               <a:rPr lang="en-US"/>
-              <a:t>10</a:t>
+              <a:t>12</a:t>
             </a:fld>
             <a:endParaRPr lang="en-US"/>
           </a:p>
@@ -627,10 +477,6 @@
           <a:bodyPr/>
           <a:lstStyle/>
           <a:p>
-            <a:r>
-              <a:rPr lang="en-US" dirty="0"/>
-              <a:t/>
-            </a:r>
             <a:endParaRPr lang="en-US" dirty="0"/>
           </a:p>
         </p:txBody>
@@ -715,10 +561,6 @@
           <a:bodyPr/>
           <a:lstStyle/>
           <a:p>
-            <a:r>
-              <a:rPr lang="en-US" dirty="0"/>
-              <a:t/>
-            </a:r>
             <a:endParaRPr lang="en-US" dirty="0"/>
           </a:p>
         </p:txBody>
@@ -803,10 +645,6 @@
           <a:bodyPr/>
           <a:lstStyle/>
           <a:p>
-            <a:r>
-              <a:rPr lang="en-US" dirty="0"/>
-              <a:t/>
-            </a:r>
             <a:endParaRPr lang="en-US" dirty="0"/>
           </a:p>
         </p:txBody>
@@ -891,10 +729,6 @@
           <a:bodyPr/>
           <a:lstStyle/>
           <a:p>
-            <a:r>
-              <a:rPr lang="en-US" dirty="0"/>
-              <a:t/>
-            </a:r>
             <a:endParaRPr lang="en-US" dirty="0"/>
           </a:p>
         </p:txBody>
@@ -916,7 +750,7 @@
           <a:p>
             <a:fld id="{F7021451-1387-4CA6-816F-3879F97B5CBC}" type="slidenum">
               <a:rPr lang="en-US"/>
-              <a:t>5</a:t>
+              <a:t>7</a:t>
             </a:fld>
             <a:endParaRPr lang="en-US"/>
           </a:p>
@@ -979,10 +813,6 @@
           <a:bodyPr/>
           <a:lstStyle/>
           <a:p>
-            <a:r>
-              <a:rPr lang="en-US" dirty="0"/>
-              <a:t/>
-            </a:r>
             <a:endParaRPr lang="en-US" dirty="0"/>
           </a:p>
         </p:txBody>
@@ -1004,7 +834,7 @@
           <a:p>
             <a:fld id="{F7021451-1387-4CA6-816F-3879F97B5CBC}" type="slidenum">
               <a:rPr lang="en-US"/>
-              <a:t>6</a:t>
+              <a:t>8</a:t>
             </a:fld>
             <a:endParaRPr lang="en-US"/>
           </a:p>
@@ -1067,10 +897,6 @@
           <a:bodyPr/>
           <a:lstStyle/>
           <a:p>
-            <a:r>
-              <a:rPr lang="en-US" dirty="0"/>
-              <a:t/>
-            </a:r>
             <a:endParaRPr lang="en-US" dirty="0"/>
           </a:p>
         </p:txBody>
@@ -1092,7 +918,7 @@
           <a:p>
             <a:fld id="{F7021451-1387-4CA6-816F-3879F97B5CBC}" type="slidenum">
               <a:rPr lang="en-US"/>
-              <a:t>7</a:t>
+              <a:t>9</a:t>
             </a:fld>
             <a:endParaRPr lang="en-US"/>
           </a:p>
@@ -1155,10 +981,6 @@
           <a:bodyPr/>
           <a:lstStyle/>
           <a:p>
-            <a:r>
-              <a:rPr lang="en-US" dirty="0"/>
-              <a:t/>
-            </a:r>
             <a:endParaRPr lang="en-US" dirty="0"/>
           </a:p>
         </p:txBody>
@@ -1180,7 +1002,7 @@
           <a:p>
             <a:fld id="{F7021451-1387-4CA6-816F-3879F97B5CBC}" type="slidenum">
               <a:rPr lang="en-US"/>
-              <a:t>8</a:t>
+              <a:t>10</a:t>
             </a:fld>
             <a:endParaRPr lang="en-US"/>
           </a:p>
@@ -1243,10 +1065,6 @@
           <a:bodyPr/>
           <a:lstStyle/>
           <a:p>
-            <a:r>
-              <a:rPr lang="en-US" dirty="0"/>
-              <a:t/>
-            </a:r>
             <a:endParaRPr lang="en-US" dirty="0"/>
           </a:p>
         </p:txBody>
@@ -1268,7 +1086,7 @@
           <a:p>
             <a:fld id="{F7021451-1387-4CA6-816F-3879F97B5CBC}" type="slidenum">
               <a:rPr lang="en-US"/>
-              <a:t>9</a:t>
+              <a:t>11</a:t>
             </a:fld>
             <a:endParaRPr lang="en-US"/>
           </a:p>
@@ -1377,7 +1195,7 @@
       <p:pic>
         <p:nvPicPr>
           <p:cNvPr id="4" name="Image 0" descr="preencoded.png">
-            <a:hlinkClick r:id="rId2" tooltip=""/>
+            <a:hlinkClick r:id="rId2"/>
           </p:cNvPr>
           <p:cNvPicPr>
             <a:picLocks noChangeAspect="1"/>
@@ -1385,7 +1203,7 @@
           <p:nvPr/>
         </p:nvPicPr>
         <p:blipFill>
-          <a:blip r:embed="rId1"/>
+          <a:blip r:embed="rId3"/>
           <a:stretch>
             <a:fillRect/>
           </a:stretch>
@@ -1468,7 +1286,7 @@
       <p:pic>
         <p:nvPicPr>
           <p:cNvPr id="4" name="Image 0" descr="preencoded.png">
-            <a:hlinkClick r:id="rId2" tooltip=""/>
+            <a:hlinkClick r:id="rId2"/>
           </p:cNvPr>
           <p:cNvPicPr>
             <a:picLocks noChangeAspect="1"/>
@@ -1476,7 +1294,7 @@
           <p:nvPr/>
         </p:nvPicPr>
         <p:blipFill>
-          <a:blip r:embed="rId1"/>
+          <a:blip r:embed="rId3"/>
           <a:stretch>
             <a:fillRect/>
           </a:stretch>
@@ -1559,7 +1377,7 @@
       <p:pic>
         <p:nvPicPr>
           <p:cNvPr id="4" name="Image 0" descr="preencoded.png">
-            <a:hlinkClick r:id="rId2" tooltip=""/>
+            <a:hlinkClick r:id="rId2"/>
           </p:cNvPr>
           <p:cNvPicPr>
             <a:picLocks noChangeAspect="1"/>
@@ -1567,7 +1385,7 @@
           <p:nvPr/>
         </p:nvPicPr>
         <p:blipFill>
-          <a:blip r:embed="rId1"/>
+          <a:blip r:embed="rId3"/>
           <a:stretch>
             <a:fillRect/>
           </a:stretch>
@@ -1650,7 +1468,7 @@
       <p:pic>
         <p:nvPicPr>
           <p:cNvPr id="4" name="Image 0" descr="preencoded.png">
-            <a:hlinkClick r:id="rId2" tooltip=""/>
+            <a:hlinkClick r:id="rId2"/>
           </p:cNvPr>
           <p:cNvPicPr>
             <a:picLocks noChangeAspect="1"/>
@@ -1658,7 +1476,7 @@
           <p:nvPr/>
         </p:nvPicPr>
         <p:blipFill>
-          <a:blip r:embed="rId1"/>
+          <a:blip r:embed="rId3"/>
           <a:stretch>
             <a:fillRect/>
           </a:stretch>
@@ -1741,7 +1559,7 @@
       <p:pic>
         <p:nvPicPr>
           <p:cNvPr id="4" name="Image 0" descr="preencoded.png">
-            <a:hlinkClick r:id="rId2" tooltip=""/>
+            <a:hlinkClick r:id="rId2"/>
           </p:cNvPr>
           <p:cNvPicPr>
             <a:picLocks noChangeAspect="1"/>
@@ -1749,7 +1567,7 @@
           <p:nvPr/>
         </p:nvPicPr>
         <p:blipFill>
-          <a:blip r:embed="rId1"/>
+          <a:blip r:embed="rId3"/>
           <a:stretch>
             <a:fillRect/>
           </a:stretch>
@@ -1832,7 +1650,7 @@
       <p:pic>
         <p:nvPicPr>
           <p:cNvPr id="4" name="Image 0" descr="preencoded.png">
-            <a:hlinkClick r:id="rId2" tooltip=""/>
+            <a:hlinkClick r:id="rId2"/>
           </p:cNvPr>
           <p:cNvPicPr>
             <a:picLocks noChangeAspect="1"/>
@@ -1840,7 +1658,7 @@
           <p:nvPr/>
         </p:nvPicPr>
         <p:blipFill>
-          <a:blip r:embed="rId1"/>
+          <a:blip r:embed="rId3"/>
           <a:stretch>
             <a:fillRect/>
           </a:stretch>
@@ -1923,7 +1741,7 @@
       <p:pic>
         <p:nvPicPr>
           <p:cNvPr id="4" name="Image 0" descr="preencoded.png">
-            <a:hlinkClick r:id="rId2" tooltip=""/>
+            <a:hlinkClick r:id="rId2"/>
           </p:cNvPr>
           <p:cNvPicPr>
             <a:picLocks noChangeAspect="1"/>
@@ -1931,7 +1749,7 @@
           <p:nvPr/>
         </p:nvPicPr>
         <p:blipFill>
-          <a:blip r:embed="rId1"/>
+          <a:blip r:embed="rId3"/>
           <a:stretch>
             <a:fillRect/>
           </a:stretch>
@@ -2014,7 +1832,7 @@
       <p:pic>
         <p:nvPicPr>
           <p:cNvPr id="4" name="Image 0" descr="preencoded.png">
-            <a:hlinkClick r:id="rId2" tooltip=""/>
+            <a:hlinkClick r:id="rId2"/>
           </p:cNvPr>
           <p:cNvPicPr>
             <a:picLocks noChangeAspect="1"/>
@@ -2022,7 +1840,7 @@
           <p:nvPr/>
         </p:nvPicPr>
         <p:blipFill>
-          <a:blip r:embed="rId1"/>
+          <a:blip r:embed="rId3"/>
           <a:stretch>
             <a:fillRect/>
           </a:stretch>
@@ -2105,7 +1923,7 @@
       <p:pic>
         <p:nvPicPr>
           <p:cNvPr id="4" name="Image 0" descr="preencoded.png">
-            <a:hlinkClick r:id="rId2" tooltip=""/>
+            <a:hlinkClick r:id="rId2"/>
           </p:cNvPr>
           <p:cNvPicPr>
             <a:picLocks noChangeAspect="1"/>
@@ -2113,7 +1931,7 @@
           <p:nvPr/>
         </p:nvPicPr>
         <p:blipFill>
-          <a:blip r:embed="rId1"/>
+          <a:blip r:embed="rId3"/>
           <a:stretch>
             <a:fillRect/>
           </a:stretch>
@@ -2196,7 +2014,7 @@
       <p:pic>
         <p:nvPicPr>
           <p:cNvPr id="4" name="Image 0" descr="preencoded.png">
-            <a:hlinkClick r:id="rId2" tooltip=""/>
+            <a:hlinkClick r:id="rId2"/>
           </p:cNvPr>
           <p:cNvPicPr>
             <a:picLocks noChangeAspect="1"/>
@@ -2204,7 +2022,7 @@
           <p:nvPr/>
         </p:nvPicPr>
         <p:blipFill>
-          <a:blip r:embed="rId1"/>
+          <a:blip r:embed="rId3"/>
           <a:stretch>
             <a:fillRect/>
           </a:stretch>
@@ -2230,6 +2048,11 @@
 <file path=ppt/slideMasters/slideMaster1.xml><?xml version="1.0" encoding="utf-8"?>
 <p:sldMaster xmlns:a="http://schemas.openxmlformats.org/drawingml/2006/main" xmlns:r="http://schemas.openxmlformats.org/officeDocument/2006/relationships" xmlns:p="http://schemas.openxmlformats.org/presentationml/2006/main">
   <p:cSld>
+    <p:bg>
+      <p:bgRef idx="1001">
+        <a:schemeClr val="bg1"/>
+      </p:bgRef>
+    </p:bg>
     <p:spTree>
       <p:nvGrpSpPr>
         <p:cNvPr id="1" name=""/>
@@ -2533,14 +2356,14 @@
       </p:grpSpPr>
       <p:pic>
         <p:nvPicPr>
-          <p:cNvPr id="2" name="Image 0" descr="preencoded.png">    </p:cNvPr>
+          <p:cNvPr id="2" name="Image 0" descr="preencoded.png"/>
           <p:cNvPicPr>
             <a:picLocks noChangeAspect="1"/>
           </p:cNvPicPr>
           <p:nvPr/>
         </p:nvPicPr>
         <p:blipFill>
-          <a:blip r:embed="rId1"/>
+          <a:blip r:embed="rId3"/>
           <a:stretch>
             <a:fillRect/>
           </a:stretch>
@@ -2576,7 +2399,7 @@
           <a:bodyPr wrap="square" lIns="0" tIns="0" rIns="0" bIns="0" rtlCol="0" anchor="t"/>
           <a:lstStyle/>
           <a:p>
-            <a:pPr algn="l" indent="0" marL="0">
+            <a:pPr marL="0" indent="0" algn="l">
               <a:lnSpc>
                 <a:spcPts val="5600"/>
               </a:lnSpc>
@@ -2618,7 +2441,7 @@
           <a:bodyPr wrap="square" lIns="0" tIns="0" rIns="0" bIns="0" rtlCol="0" anchor="t"/>
           <a:lstStyle/>
           <a:p>
-            <a:pPr algn="l" indent="0" marL="0">
+            <a:pPr marL="0" indent="0" algn="l">
               <a:lnSpc>
                 <a:spcPts val="2700"/>
               </a:lnSpc>
@@ -2648,6 +2471,996 @@
 </file>
 
 <file path=ppt/slides/slide10.xml><?xml version="1.0" encoding="utf-8"?>
+<p:sld xmlns:a="http://schemas.openxmlformats.org/drawingml/2006/main" xmlns:r="http://schemas.openxmlformats.org/officeDocument/2006/relationships" xmlns:p="http://schemas.openxmlformats.org/presentationml/2006/main">
+  <p:cSld name="Slide 8">
+    <p:spTree>
+      <p:nvGrpSpPr>
+        <p:cNvPr id="1" name=""/>
+        <p:cNvGrpSpPr/>
+        <p:nvPr/>
+      </p:nvGrpSpPr>
+      <p:grpSpPr>
+        <a:xfrm>
+          <a:off x="0" y="0"/>
+          <a:ext cx="0" cy="0"/>
+          <a:chOff x="0" y="0"/>
+          <a:chExt cx="0" cy="0"/>
+        </a:xfrm>
+      </p:grpSpPr>
+      <p:sp>
+        <p:nvSpPr>
+          <p:cNvPr id="2" name="Text 0"/>
+          <p:cNvSpPr/>
+          <p:nvPr/>
+        </p:nvSpPr>
+        <p:spPr>
+          <a:xfrm>
+            <a:off x="758309" y="1588770"/>
+            <a:ext cx="5701546" cy="712708"/>
+          </a:xfrm>
+          <a:prstGeom prst="rect">
+            <a:avLst/>
+          </a:prstGeom>
+          <a:noFill/>
+          <a:ln/>
+        </p:spPr>
+        <p:txBody>
+          <a:bodyPr wrap="none" lIns="0" tIns="0" rIns="0" bIns="0" rtlCol="0" anchor="t"/>
+          <a:lstStyle/>
+          <a:p>
+            <a:pPr marL="0" indent="0" algn="l">
+              <a:lnSpc>
+                <a:spcPts val="5600"/>
+              </a:lnSpc>
+              <a:buNone/>
+            </a:pPr>
+            <a:r>
+              <a:rPr lang="en-US" sz="4450" b="1" dirty="0">
+                <a:solidFill>
+                  <a:srgbClr val="9998FF"/>
+                </a:solidFill>
+                <a:latin typeface="Barlow Bold" pitchFamily="34" charset="0"/>
+                <a:ea typeface="Barlow Bold" pitchFamily="34" charset="-122"/>
+                <a:cs typeface="Barlow Bold" pitchFamily="34" charset="-120"/>
+              </a:rPr>
+              <a:t>Business Applications</a:t>
+            </a:r>
+            <a:endParaRPr lang="en-US" sz="4450" dirty="0"/>
+          </a:p>
+        </p:txBody>
+      </p:sp>
+      <p:pic>
+        <p:nvPicPr>
+          <p:cNvPr id="3" name="Image 0" descr="preencoded.png"/>
+          <p:cNvPicPr>
+            <a:picLocks noChangeAspect="1"/>
+          </p:cNvPicPr>
+          <p:nvPr/>
+        </p:nvPicPr>
+        <p:blipFill>
+          <a:blip r:embed="rId3"/>
+          <a:stretch>
+            <a:fillRect/>
+          </a:stretch>
+        </p:blipFill>
+        <p:spPr>
+          <a:xfrm>
+            <a:off x="2954774" y="2734747"/>
+            <a:ext cx="2163723" cy="1265992"/>
+          </a:xfrm>
+          <a:prstGeom prst="rect">
+            <a:avLst/>
+          </a:prstGeom>
+        </p:spPr>
+      </p:pic>
+      <p:pic>
+        <p:nvPicPr>
+          <p:cNvPr id="4" name="Image 1" descr="preencoded.png"/>
+          <p:cNvPicPr>
+            <a:picLocks noChangeAspect="1"/>
+          </p:cNvPicPr>
+          <p:nvPr/>
+        </p:nvPicPr>
+        <p:blipFill>
+          <a:blip r:embed="rId4"/>
+          <a:stretch>
+            <a:fillRect/>
+          </a:stretch>
+        </p:blipFill>
+        <p:spPr>
+          <a:xfrm>
+            <a:off x="3884176" y="3334703"/>
+            <a:ext cx="304681" cy="380762"/>
+          </a:xfrm>
+          <a:prstGeom prst="rect">
+            <a:avLst/>
+          </a:prstGeom>
+        </p:spPr>
+      </p:pic>
+      <p:sp>
+        <p:nvSpPr>
+          <p:cNvPr id="5" name="Text 1"/>
+          <p:cNvSpPr/>
+          <p:nvPr/>
+        </p:nvSpPr>
+        <p:spPr>
+          <a:xfrm>
+            <a:off x="5335072" y="2951321"/>
+            <a:ext cx="2850713" cy="356235"/>
+          </a:xfrm>
+          <a:prstGeom prst="rect">
+            <a:avLst/>
+          </a:prstGeom>
+          <a:noFill/>
+          <a:ln/>
+        </p:spPr>
+        <p:txBody>
+          <a:bodyPr wrap="none" lIns="0" tIns="0" rIns="0" bIns="0" rtlCol="0" anchor="t"/>
+          <a:lstStyle/>
+          <a:p>
+            <a:pPr marL="0" indent="0" algn="l">
+              <a:lnSpc>
+                <a:spcPts val="2800"/>
+              </a:lnSpc>
+              <a:buNone/>
+            </a:pPr>
+            <a:r>
+              <a:rPr lang="en-US" sz="2200" b="1" dirty="0">
+                <a:solidFill>
+                  <a:srgbClr val="EEEFF5"/>
+                </a:solidFill>
+                <a:latin typeface="Barlow Bold" pitchFamily="34" charset="0"/>
+                <a:ea typeface="Barlow Bold" pitchFamily="34" charset="-122"/>
+                <a:cs typeface="Barlow Bold" pitchFamily="34" charset="-120"/>
+              </a:rPr>
+              <a:t>Smart City Integration</a:t>
+            </a:r>
+            <a:endParaRPr lang="en-US" sz="2200" dirty="0"/>
+          </a:p>
+        </p:txBody>
+      </p:sp>
+      <p:sp>
+        <p:nvSpPr>
+          <p:cNvPr id="6" name="Text 2"/>
+          <p:cNvSpPr/>
+          <p:nvPr/>
+        </p:nvSpPr>
+        <p:spPr>
+          <a:xfrm>
+            <a:off x="5335072" y="3437453"/>
+            <a:ext cx="3131106" cy="346710"/>
+          </a:xfrm>
+          <a:prstGeom prst="rect">
+            <a:avLst/>
+          </a:prstGeom>
+          <a:noFill/>
+          <a:ln/>
+        </p:spPr>
+        <p:txBody>
+          <a:bodyPr wrap="none" lIns="0" tIns="0" rIns="0" bIns="0" rtlCol="0" anchor="t"/>
+          <a:lstStyle/>
+          <a:p>
+            <a:pPr marL="0" indent="0" algn="l">
+              <a:lnSpc>
+                <a:spcPts val="2700"/>
+              </a:lnSpc>
+              <a:buNone/>
+            </a:pPr>
+            <a:r>
+              <a:rPr lang="en-US" sz="1700" dirty="0">
+                <a:solidFill>
+                  <a:srgbClr val="EEEFF5"/>
+                </a:solidFill>
+                <a:latin typeface="Montserrat" pitchFamily="34" charset="0"/>
+                <a:ea typeface="Montserrat" pitchFamily="34" charset="-122"/>
+                <a:cs typeface="Montserrat" pitchFamily="34" charset="-120"/>
+              </a:rPr>
+              <a:t>Future-proof urban planning</a:t>
+            </a:r>
+            <a:endParaRPr lang="en-US" sz="1700" dirty="0"/>
+          </a:p>
+        </p:txBody>
+      </p:sp>
+      <p:sp>
+        <p:nvSpPr>
+          <p:cNvPr id="7" name="Shape 3"/>
+          <p:cNvSpPr/>
+          <p:nvPr/>
+        </p:nvSpPr>
+        <p:spPr>
+          <a:xfrm>
+            <a:off x="5172551" y="4012525"/>
+            <a:ext cx="8645485" cy="15240"/>
+          </a:xfrm>
+          <a:prstGeom prst="roundRect">
+            <a:avLst>
+              <a:gd name="adj" fmla="val 1279500"/>
+            </a:avLst>
+          </a:prstGeom>
+          <a:solidFill>
+            <a:srgbClr val="60646A"/>
+          </a:solidFill>
+          <a:ln/>
+        </p:spPr>
+        <p:txBody>
+          <a:bodyPr/>
+          <a:lstStyle/>
+          <a:p>
+            <a:endParaRPr lang="en-AU"/>
+          </a:p>
+        </p:txBody>
+      </p:sp>
+      <p:pic>
+        <p:nvPicPr>
+          <p:cNvPr id="8" name="Image 2" descr="preencoded.png"/>
+          <p:cNvPicPr>
+            <a:picLocks noChangeAspect="1"/>
+          </p:cNvPicPr>
+          <p:nvPr/>
+        </p:nvPicPr>
+        <p:blipFill>
+          <a:blip r:embed="rId5"/>
+          <a:stretch>
+            <a:fillRect/>
+          </a:stretch>
+        </p:blipFill>
+        <p:spPr>
+          <a:xfrm>
+            <a:off x="1872972" y="4054793"/>
+            <a:ext cx="4327446" cy="1265992"/>
+          </a:xfrm>
+          <a:prstGeom prst="rect">
+            <a:avLst/>
+          </a:prstGeom>
+        </p:spPr>
+      </p:pic>
+      <p:pic>
+        <p:nvPicPr>
+          <p:cNvPr id="9" name="Image 3" descr="preencoded.png"/>
+          <p:cNvPicPr>
+            <a:picLocks noChangeAspect="1"/>
+          </p:cNvPicPr>
+          <p:nvPr/>
+        </p:nvPicPr>
+        <p:blipFill>
+          <a:blip r:embed="rId6"/>
+          <a:stretch>
+            <a:fillRect/>
+          </a:stretch>
+        </p:blipFill>
+        <p:spPr>
+          <a:xfrm>
+            <a:off x="3884295" y="4497348"/>
+            <a:ext cx="304681" cy="380762"/>
+          </a:xfrm>
+          <a:prstGeom prst="rect">
+            <a:avLst/>
+          </a:prstGeom>
+        </p:spPr>
+      </p:pic>
+      <p:sp>
+        <p:nvSpPr>
+          <p:cNvPr id="10" name="Text 4"/>
+          <p:cNvSpPr/>
+          <p:nvPr/>
+        </p:nvSpPr>
+        <p:spPr>
+          <a:xfrm>
+            <a:off x="6416993" y="4271367"/>
+            <a:ext cx="3190161" cy="356235"/>
+          </a:xfrm>
+          <a:prstGeom prst="rect">
+            <a:avLst/>
+          </a:prstGeom>
+          <a:noFill/>
+          <a:ln/>
+        </p:spPr>
+        <p:txBody>
+          <a:bodyPr wrap="none" lIns="0" tIns="0" rIns="0" bIns="0" rtlCol="0" anchor="t"/>
+          <a:lstStyle/>
+          <a:p>
+            <a:pPr marL="0" indent="0" algn="l">
+              <a:lnSpc>
+                <a:spcPts val="2800"/>
+              </a:lnSpc>
+              <a:buNone/>
+            </a:pPr>
+            <a:r>
+              <a:rPr lang="en-US" sz="2200" b="1" dirty="0">
+                <a:solidFill>
+                  <a:srgbClr val="EEEFF5"/>
+                </a:solidFill>
+                <a:latin typeface="Barlow Bold" pitchFamily="34" charset="0"/>
+                <a:ea typeface="Barlow Bold" pitchFamily="34" charset="-122"/>
+                <a:cs typeface="Barlow Bold" pitchFamily="34" charset="-120"/>
+              </a:rPr>
+              <a:t>Adaptive Traffic Systems</a:t>
+            </a:r>
+            <a:endParaRPr lang="en-US" sz="2200" dirty="0"/>
+          </a:p>
+        </p:txBody>
+      </p:sp>
+      <p:sp>
+        <p:nvSpPr>
+          <p:cNvPr id="11" name="Text 5"/>
+          <p:cNvSpPr/>
+          <p:nvPr/>
+        </p:nvSpPr>
+        <p:spPr>
+          <a:xfrm>
+            <a:off x="6416993" y="4757499"/>
+            <a:ext cx="3203853" cy="346710"/>
+          </a:xfrm>
+          <a:prstGeom prst="rect">
+            <a:avLst/>
+          </a:prstGeom>
+          <a:noFill/>
+          <a:ln/>
+        </p:spPr>
+        <p:txBody>
+          <a:bodyPr wrap="none" lIns="0" tIns="0" rIns="0" bIns="0" rtlCol="0" anchor="t"/>
+          <a:lstStyle/>
+          <a:p>
+            <a:pPr marL="0" indent="0" algn="l">
+              <a:lnSpc>
+                <a:spcPts val="2700"/>
+              </a:lnSpc>
+              <a:buNone/>
+            </a:pPr>
+            <a:r>
+              <a:rPr lang="en-US" sz="1700" dirty="0">
+                <a:solidFill>
+                  <a:srgbClr val="EEEFF5"/>
+                </a:solidFill>
+                <a:latin typeface="Montserrat" pitchFamily="34" charset="0"/>
+                <a:ea typeface="Montserrat" pitchFamily="34" charset="-122"/>
+                <a:cs typeface="Montserrat" pitchFamily="34" charset="-120"/>
+              </a:rPr>
+              <a:t>Real-time signal optimization</a:t>
+            </a:r>
+            <a:endParaRPr lang="en-US" sz="1700" dirty="0"/>
+          </a:p>
+        </p:txBody>
+      </p:sp>
+      <p:sp>
+        <p:nvSpPr>
+          <p:cNvPr id="12" name="Shape 6"/>
+          <p:cNvSpPr/>
+          <p:nvPr/>
+        </p:nvSpPr>
+        <p:spPr>
+          <a:xfrm>
+            <a:off x="6254472" y="5332571"/>
+            <a:ext cx="7563564" cy="15240"/>
+          </a:xfrm>
+          <a:prstGeom prst="roundRect">
+            <a:avLst>
+              <a:gd name="adj" fmla="val 1279500"/>
+            </a:avLst>
+          </a:prstGeom>
+          <a:solidFill>
+            <a:srgbClr val="60646A"/>
+          </a:solidFill>
+          <a:ln/>
+        </p:spPr>
+        <p:txBody>
+          <a:bodyPr/>
+          <a:lstStyle/>
+          <a:p>
+            <a:endParaRPr lang="en-AU"/>
+          </a:p>
+        </p:txBody>
+      </p:sp>
+      <p:pic>
+        <p:nvPicPr>
+          <p:cNvPr id="13" name="Image 4" descr="preencoded.png"/>
+          <p:cNvPicPr>
+            <a:picLocks noChangeAspect="1"/>
+          </p:cNvPicPr>
+          <p:nvPr/>
+        </p:nvPicPr>
+        <p:blipFill>
+          <a:blip r:embed="rId7"/>
+          <a:stretch>
+            <a:fillRect/>
+          </a:stretch>
+        </p:blipFill>
+        <p:spPr>
+          <a:xfrm>
+            <a:off x="791051" y="5374838"/>
+            <a:ext cx="6491288" cy="1265992"/>
+          </a:xfrm>
+          <a:prstGeom prst="rect">
+            <a:avLst/>
+          </a:prstGeom>
+        </p:spPr>
+      </p:pic>
+      <p:pic>
+        <p:nvPicPr>
+          <p:cNvPr id="14" name="Image 5" descr="preencoded.png"/>
+          <p:cNvPicPr>
+            <a:picLocks noChangeAspect="1"/>
+          </p:cNvPicPr>
+          <p:nvPr/>
+        </p:nvPicPr>
+        <p:blipFill>
+          <a:blip r:embed="rId8"/>
+          <a:stretch>
+            <a:fillRect/>
+          </a:stretch>
+        </p:blipFill>
+        <p:spPr>
+          <a:xfrm>
+            <a:off x="3884295" y="5817394"/>
+            <a:ext cx="304681" cy="380762"/>
+          </a:xfrm>
+          <a:prstGeom prst="rect">
+            <a:avLst/>
+          </a:prstGeom>
+        </p:spPr>
+      </p:pic>
+      <p:sp>
+        <p:nvSpPr>
+          <p:cNvPr id="15" name="Text 7"/>
+          <p:cNvSpPr/>
+          <p:nvPr/>
+        </p:nvSpPr>
+        <p:spPr>
+          <a:xfrm>
+            <a:off x="7498913" y="5591413"/>
+            <a:ext cx="2850713" cy="356235"/>
+          </a:xfrm>
+          <a:prstGeom prst="rect">
+            <a:avLst/>
+          </a:prstGeom>
+          <a:noFill/>
+          <a:ln/>
+        </p:spPr>
+        <p:txBody>
+          <a:bodyPr wrap="none" lIns="0" tIns="0" rIns="0" bIns="0" rtlCol="0" anchor="t"/>
+          <a:lstStyle/>
+          <a:p>
+            <a:pPr marL="0" indent="0" algn="l">
+              <a:lnSpc>
+                <a:spcPts val="2800"/>
+              </a:lnSpc>
+              <a:buNone/>
+            </a:pPr>
+            <a:r>
+              <a:rPr lang="en-US" sz="2200" b="1" dirty="0">
+                <a:solidFill>
+                  <a:srgbClr val="EEEFF5"/>
+                </a:solidFill>
+                <a:latin typeface="Barlow Bold" pitchFamily="34" charset="0"/>
+                <a:ea typeface="Barlow Bold" pitchFamily="34" charset="-122"/>
+                <a:cs typeface="Barlow Bold" pitchFamily="34" charset="-120"/>
+              </a:rPr>
+              <a:t>Navigation Platforms</a:t>
+            </a:r>
+            <a:endParaRPr lang="en-US" sz="2200" dirty="0"/>
+          </a:p>
+        </p:txBody>
+      </p:sp>
+      <p:sp>
+        <p:nvSpPr>
+          <p:cNvPr id="16" name="Text 8"/>
+          <p:cNvSpPr/>
+          <p:nvPr/>
+        </p:nvSpPr>
+        <p:spPr>
+          <a:xfrm>
+            <a:off x="7498913" y="6077545"/>
+            <a:ext cx="3819168" cy="346710"/>
+          </a:xfrm>
+          <a:prstGeom prst="rect">
+            <a:avLst/>
+          </a:prstGeom>
+          <a:noFill/>
+          <a:ln/>
+        </p:spPr>
+        <p:txBody>
+          <a:bodyPr wrap="none" lIns="0" tIns="0" rIns="0" bIns="0" rtlCol="0" anchor="t"/>
+          <a:lstStyle/>
+          <a:p>
+            <a:pPr marL="0" indent="0" algn="l">
+              <a:lnSpc>
+                <a:spcPts val="2700"/>
+              </a:lnSpc>
+              <a:buNone/>
+            </a:pPr>
+            <a:r>
+              <a:rPr lang="en-US" sz="1700" dirty="0">
+                <a:solidFill>
+                  <a:srgbClr val="EEEFF5"/>
+                </a:solidFill>
+                <a:latin typeface="Montserrat" pitchFamily="34" charset="0"/>
+                <a:ea typeface="Montserrat" pitchFamily="34" charset="-122"/>
+                <a:cs typeface="Montserrat" pitchFamily="34" charset="-120"/>
+              </a:rPr>
+              <a:t>Enhanced route recommendations</a:t>
+            </a:r>
+            <a:endParaRPr lang="en-US" sz="1700" dirty="0"/>
+          </a:p>
+        </p:txBody>
+      </p:sp>
+    </p:spTree>
+  </p:cSld>
+  <p:clrMapOvr>
+    <a:masterClrMapping/>
+  </p:clrMapOvr>
+</p:sld>
+</file>
+
+<file path=ppt/slides/slide11.xml><?xml version="1.0" encoding="utf-8"?>
+<p:sld xmlns:a="http://schemas.openxmlformats.org/drawingml/2006/main" xmlns:r="http://schemas.openxmlformats.org/officeDocument/2006/relationships" xmlns:p="http://schemas.openxmlformats.org/presentationml/2006/main">
+  <p:cSld name="Slide 9">
+    <p:spTree>
+      <p:nvGrpSpPr>
+        <p:cNvPr id="1" name=""/>
+        <p:cNvGrpSpPr/>
+        <p:nvPr/>
+      </p:nvGrpSpPr>
+      <p:grpSpPr>
+        <a:xfrm>
+          <a:off x="0" y="0"/>
+          <a:ext cx="0" cy="0"/>
+          <a:chOff x="0" y="0"/>
+          <a:chExt cx="0" cy="0"/>
+        </a:xfrm>
+      </p:grpSpPr>
+      <p:pic>
+        <p:nvPicPr>
+          <p:cNvPr id="2" name="Image 0" descr="preencoded.png"/>
+          <p:cNvPicPr>
+            <a:picLocks noChangeAspect="1"/>
+          </p:cNvPicPr>
+          <p:nvPr/>
+        </p:nvPicPr>
+        <p:blipFill>
+          <a:blip r:embed="rId3"/>
+          <a:stretch>
+            <a:fillRect/>
+          </a:stretch>
+        </p:blipFill>
+        <p:spPr>
+          <a:xfrm>
+            <a:off x="9144000" y="0"/>
+            <a:ext cx="5486400" cy="8229600"/>
+          </a:xfrm>
+          <a:prstGeom prst="rect">
+            <a:avLst/>
+          </a:prstGeom>
+        </p:spPr>
+      </p:pic>
+      <p:sp>
+        <p:nvSpPr>
+          <p:cNvPr id="3" name="Text 0"/>
+          <p:cNvSpPr/>
+          <p:nvPr/>
+        </p:nvSpPr>
+        <p:spPr>
+          <a:xfrm>
+            <a:off x="758309" y="1344335"/>
+            <a:ext cx="5701546" cy="712708"/>
+          </a:xfrm>
+          <a:prstGeom prst="rect">
+            <a:avLst/>
+          </a:prstGeom>
+          <a:noFill/>
+          <a:ln/>
+        </p:spPr>
+        <p:txBody>
+          <a:bodyPr wrap="none" lIns="0" tIns="0" rIns="0" bIns="0" rtlCol="0" anchor="t"/>
+          <a:lstStyle/>
+          <a:p>
+            <a:pPr marL="0" indent="0" algn="l">
+              <a:lnSpc>
+                <a:spcPts val="5600"/>
+              </a:lnSpc>
+              <a:buNone/>
+            </a:pPr>
+            <a:r>
+              <a:rPr lang="en-US" sz="4450" b="1" dirty="0">
+                <a:solidFill>
+                  <a:srgbClr val="9998FF"/>
+                </a:solidFill>
+                <a:latin typeface="Barlow Bold" pitchFamily="34" charset="0"/>
+                <a:ea typeface="Barlow Bold" pitchFamily="34" charset="-122"/>
+                <a:cs typeface="Barlow Bold" pitchFamily="34" charset="-120"/>
+              </a:rPr>
+              <a:t>Revenue Potential</a:t>
+            </a:r>
+            <a:endParaRPr lang="en-US" sz="4450" dirty="0"/>
+          </a:p>
+        </p:txBody>
+      </p:sp>
+      <p:sp>
+        <p:nvSpPr>
+          <p:cNvPr id="4" name="Text 1"/>
+          <p:cNvSpPr/>
+          <p:nvPr/>
+        </p:nvSpPr>
+        <p:spPr>
+          <a:xfrm>
+            <a:off x="758309" y="2490192"/>
+            <a:ext cx="3651171" cy="714970"/>
+          </a:xfrm>
+          <a:prstGeom prst="rect">
+            <a:avLst/>
+          </a:prstGeom>
+          <a:noFill/>
+          <a:ln/>
+        </p:spPr>
+        <p:txBody>
+          <a:bodyPr wrap="none" lIns="0" tIns="0" rIns="0" bIns="0" rtlCol="0" anchor="t"/>
+          <a:lstStyle/>
+          <a:p>
+            <a:pPr marL="0" indent="0" algn="ctr">
+              <a:lnSpc>
+                <a:spcPts val="5600"/>
+              </a:lnSpc>
+              <a:buNone/>
+            </a:pPr>
+            <a:r>
+              <a:rPr lang="en-US" sz="5600" b="1" dirty="0">
+                <a:solidFill>
+                  <a:srgbClr val="EEEFF5"/>
+                </a:solidFill>
+                <a:latin typeface="Barlow Bold" pitchFamily="34" charset="0"/>
+                <a:ea typeface="Barlow Bold" pitchFamily="34" charset="-122"/>
+                <a:cs typeface="Barlow Bold" pitchFamily="34" charset="-120"/>
+              </a:rPr>
+              <a:t>$2.5M</a:t>
+            </a:r>
+            <a:endParaRPr lang="en-US" sz="5600" dirty="0"/>
+          </a:p>
+        </p:txBody>
+      </p:sp>
+      <p:sp>
+        <p:nvSpPr>
+          <p:cNvPr id="5" name="Text 2"/>
+          <p:cNvSpPr/>
+          <p:nvPr/>
+        </p:nvSpPr>
+        <p:spPr>
+          <a:xfrm>
+            <a:off x="1158478" y="3475792"/>
+            <a:ext cx="2850713" cy="356235"/>
+          </a:xfrm>
+          <a:prstGeom prst="rect">
+            <a:avLst/>
+          </a:prstGeom>
+          <a:noFill/>
+          <a:ln/>
+        </p:spPr>
+        <p:txBody>
+          <a:bodyPr wrap="none" lIns="0" tIns="0" rIns="0" bIns="0" rtlCol="0" anchor="t"/>
+          <a:lstStyle/>
+          <a:p>
+            <a:pPr marL="0" indent="0" algn="ctr">
+              <a:lnSpc>
+                <a:spcPts val="2800"/>
+              </a:lnSpc>
+              <a:buNone/>
+            </a:pPr>
+            <a:r>
+              <a:rPr lang="en-US" sz="2200" b="1" dirty="0">
+                <a:solidFill>
+                  <a:srgbClr val="EEEFF5"/>
+                </a:solidFill>
+                <a:latin typeface="Barlow Bold" pitchFamily="34" charset="0"/>
+                <a:ea typeface="Barlow Bold" pitchFamily="34" charset="-122"/>
+                <a:cs typeface="Barlow Bold" pitchFamily="34" charset="-120"/>
+              </a:rPr>
+              <a:t>Infrastructure Savings</a:t>
+            </a:r>
+            <a:endParaRPr lang="en-US" sz="2200" dirty="0"/>
+          </a:p>
+        </p:txBody>
+      </p:sp>
+      <p:sp>
+        <p:nvSpPr>
+          <p:cNvPr id="6" name="Text 3"/>
+          <p:cNvSpPr/>
+          <p:nvPr/>
+        </p:nvSpPr>
+        <p:spPr>
+          <a:xfrm>
+            <a:off x="758309" y="3961924"/>
+            <a:ext cx="3651171" cy="346710"/>
+          </a:xfrm>
+          <a:prstGeom prst="rect">
+            <a:avLst/>
+          </a:prstGeom>
+          <a:noFill/>
+          <a:ln/>
+        </p:spPr>
+        <p:txBody>
+          <a:bodyPr wrap="none" lIns="0" tIns="0" rIns="0" bIns="0" rtlCol="0" anchor="t"/>
+          <a:lstStyle/>
+          <a:p>
+            <a:pPr marL="0" indent="0" algn="ctr">
+              <a:lnSpc>
+                <a:spcPts val="2700"/>
+              </a:lnSpc>
+              <a:buNone/>
+            </a:pPr>
+            <a:r>
+              <a:rPr lang="en-US" sz="1700" dirty="0">
+                <a:solidFill>
+                  <a:srgbClr val="EEEFF5"/>
+                </a:solidFill>
+                <a:latin typeface="Montserrat" pitchFamily="34" charset="0"/>
+                <a:ea typeface="Montserrat" pitchFamily="34" charset="-122"/>
+                <a:cs typeface="Montserrat" pitchFamily="34" charset="-120"/>
+              </a:rPr>
+              <a:t>Reduced congestion costs</a:t>
+            </a:r>
+            <a:endParaRPr lang="en-US" sz="1700" dirty="0"/>
+          </a:p>
+        </p:txBody>
+      </p:sp>
+      <p:sp>
+        <p:nvSpPr>
+          <p:cNvPr id="7" name="Text 4"/>
+          <p:cNvSpPr/>
+          <p:nvPr/>
+        </p:nvSpPr>
+        <p:spPr>
+          <a:xfrm>
+            <a:off x="4734401" y="2490192"/>
+            <a:ext cx="3651290" cy="714970"/>
+          </a:xfrm>
+          <a:prstGeom prst="rect">
+            <a:avLst/>
+          </a:prstGeom>
+          <a:noFill/>
+          <a:ln/>
+        </p:spPr>
+        <p:txBody>
+          <a:bodyPr wrap="none" lIns="0" tIns="0" rIns="0" bIns="0" rtlCol="0" anchor="t"/>
+          <a:lstStyle/>
+          <a:p>
+            <a:pPr marL="0" indent="0" algn="ctr">
+              <a:lnSpc>
+                <a:spcPts val="5600"/>
+              </a:lnSpc>
+              <a:buNone/>
+            </a:pPr>
+            <a:r>
+              <a:rPr lang="en-US" sz="5600" b="1" dirty="0">
+                <a:solidFill>
+                  <a:srgbClr val="EEEFF5"/>
+                </a:solidFill>
+                <a:latin typeface="Barlow Bold" pitchFamily="34" charset="0"/>
+                <a:ea typeface="Barlow Bold" pitchFamily="34" charset="-122"/>
+                <a:cs typeface="Barlow Bold" pitchFamily="34" charset="-120"/>
+              </a:rPr>
+              <a:t>15%</a:t>
+            </a:r>
+            <a:endParaRPr lang="en-US" sz="5600" dirty="0"/>
+          </a:p>
+        </p:txBody>
+      </p:sp>
+      <p:sp>
+        <p:nvSpPr>
+          <p:cNvPr id="8" name="Text 5"/>
+          <p:cNvSpPr/>
+          <p:nvPr/>
+        </p:nvSpPr>
+        <p:spPr>
+          <a:xfrm>
+            <a:off x="5134689" y="3475792"/>
+            <a:ext cx="2850713" cy="356235"/>
+          </a:xfrm>
+          <a:prstGeom prst="rect">
+            <a:avLst/>
+          </a:prstGeom>
+          <a:noFill/>
+          <a:ln/>
+        </p:spPr>
+        <p:txBody>
+          <a:bodyPr wrap="none" lIns="0" tIns="0" rIns="0" bIns="0" rtlCol="0" anchor="t"/>
+          <a:lstStyle/>
+          <a:p>
+            <a:pPr marL="0" indent="0" algn="ctr">
+              <a:lnSpc>
+                <a:spcPts val="2800"/>
+              </a:lnSpc>
+              <a:buNone/>
+            </a:pPr>
+            <a:r>
+              <a:rPr lang="en-US" sz="2200" b="1" dirty="0">
+                <a:solidFill>
+                  <a:srgbClr val="EEEFF5"/>
+                </a:solidFill>
+                <a:latin typeface="Barlow Bold" pitchFamily="34" charset="0"/>
+                <a:ea typeface="Barlow Bold" pitchFamily="34" charset="-122"/>
+                <a:cs typeface="Barlow Bold" pitchFamily="34" charset="-120"/>
+              </a:rPr>
+              <a:t>Efficiency Gain</a:t>
+            </a:r>
+            <a:endParaRPr lang="en-US" sz="2200" dirty="0"/>
+          </a:p>
+        </p:txBody>
+      </p:sp>
+      <p:sp>
+        <p:nvSpPr>
+          <p:cNvPr id="9" name="Text 6"/>
+          <p:cNvSpPr/>
+          <p:nvPr/>
+        </p:nvSpPr>
+        <p:spPr>
+          <a:xfrm>
+            <a:off x="4734401" y="3961924"/>
+            <a:ext cx="3651290" cy="346710"/>
+          </a:xfrm>
+          <a:prstGeom prst="rect">
+            <a:avLst/>
+          </a:prstGeom>
+          <a:noFill/>
+          <a:ln/>
+        </p:spPr>
+        <p:txBody>
+          <a:bodyPr wrap="none" lIns="0" tIns="0" rIns="0" bIns="0" rtlCol="0" anchor="t"/>
+          <a:lstStyle/>
+          <a:p>
+            <a:pPr marL="0" indent="0" algn="ctr">
+              <a:lnSpc>
+                <a:spcPts val="2700"/>
+              </a:lnSpc>
+              <a:buNone/>
+            </a:pPr>
+            <a:r>
+              <a:rPr lang="en-US" sz="1700" dirty="0">
+                <a:solidFill>
+                  <a:srgbClr val="EEEFF5"/>
+                </a:solidFill>
+                <a:latin typeface="Montserrat" pitchFamily="34" charset="0"/>
+                <a:ea typeface="Montserrat" pitchFamily="34" charset="-122"/>
+                <a:cs typeface="Montserrat" pitchFamily="34" charset="-120"/>
+              </a:rPr>
+              <a:t>Improved traffic flow</a:t>
+            </a:r>
+            <a:endParaRPr lang="en-US" sz="1700" dirty="0"/>
+          </a:p>
+        </p:txBody>
+      </p:sp>
+      <p:sp>
+        <p:nvSpPr>
+          <p:cNvPr id="10" name="Text 7"/>
+          <p:cNvSpPr/>
+          <p:nvPr/>
+        </p:nvSpPr>
+        <p:spPr>
+          <a:xfrm>
+            <a:off x="2746296" y="5066824"/>
+            <a:ext cx="3651290" cy="714970"/>
+          </a:xfrm>
+          <a:prstGeom prst="rect">
+            <a:avLst/>
+          </a:prstGeom>
+          <a:noFill/>
+          <a:ln/>
+        </p:spPr>
+        <p:txBody>
+          <a:bodyPr wrap="none" lIns="0" tIns="0" rIns="0" bIns="0" rtlCol="0" anchor="t"/>
+          <a:lstStyle/>
+          <a:p>
+            <a:pPr marL="0" indent="0" algn="ctr">
+              <a:lnSpc>
+                <a:spcPts val="5600"/>
+              </a:lnSpc>
+              <a:buNone/>
+            </a:pPr>
+            <a:r>
+              <a:rPr lang="en-US" sz="5600" b="1" dirty="0">
+                <a:solidFill>
+                  <a:srgbClr val="EEEFF5"/>
+                </a:solidFill>
+                <a:latin typeface="Barlow Bold" pitchFamily="34" charset="0"/>
+                <a:ea typeface="Barlow Bold" pitchFamily="34" charset="-122"/>
+                <a:cs typeface="Barlow Bold" pitchFamily="34" charset="-120"/>
+              </a:rPr>
+              <a:t>$1.2M</a:t>
+            </a:r>
+            <a:endParaRPr lang="en-US" sz="5600" dirty="0"/>
+          </a:p>
+        </p:txBody>
+      </p:sp>
+      <p:sp>
+        <p:nvSpPr>
+          <p:cNvPr id="11" name="Text 8"/>
+          <p:cNvSpPr/>
+          <p:nvPr/>
+        </p:nvSpPr>
+        <p:spPr>
+          <a:xfrm>
+            <a:off x="3146584" y="6052423"/>
+            <a:ext cx="2850713" cy="356235"/>
+          </a:xfrm>
+          <a:prstGeom prst="rect">
+            <a:avLst/>
+          </a:prstGeom>
+          <a:noFill/>
+          <a:ln/>
+        </p:spPr>
+        <p:txBody>
+          <a:bodyPr wrap="none" lIns="0" tIns="0" rIns="0" bIns="0" rtlCol="0" anchor="t"/>
+          <a:lstStyle/>
+          <a:p>
+            <a:pPr marL="0" indent="0" algn="ctr">
+              <a:lnSpc>
+                <a:spcPts val="2800"/>
+              </a:lnSpc>
+              <a:buNone/>
+            </a:pPr>
+            <a:r>
+              <a:rPr lang="en-US" sz="2200" b="1" dirty="0">
+                <a:solidFill>
+                  <a:srgbClr val="EEEFF5"/>
+                </a:solidFill>
+                <a:latin typeface="Barlow Bold" pitchFamily="34" charset="0"/>
+                <a:ea typeface="Barlow Bold" pitchFamily="34" charset="-122"/>
+                <a:cs typeface="Barlow Bold" pitchFamily="34" charset="-120"/>
+              </a:rPr>
+              <a:t>Licensing Revenue</a:t>
+            </a:r>
+            <a:endParaRPr lang="en-US" sz="2200" dirty="0"/>
+          </a:p>
+        </p:txBody>
+      </p:sp>
+      <p:sp>
+        <p:nvSpPr>
+          <p:cNvPr id="12" name="Text 9"/>
+          <p:cNvSpPr/>
+          <p:nvPr/>
+        </p:nvSpPr>
+        <p:spPr>
+          <a:xfrm>
+            <a:off x="2746296" y="6538555"/>
+            <a:ext cx="3651290" cy="346710"/>
+          </a:xfrm>
+          <a:prstGeom prst="rect">
+            <a:avLst/>
+          </a:prstGeom>
+          <a:noFill/>
+          <a:ln/>
+        </p:spPr>
+        <p:txBody>
+          <a:bodyPr wrap="none" lIns="0" tIns="0" rIns="0" bIns="0" rtlCol="0" anchor="t"/>
+          <a:lstStyle/>
+          <a:p>
+            <a:pPr marL="0" indent="0" algn="ctr">
+              <a:lnSpc>
+                <a:spcPts val="2700"/>
+              </a:lnSpc>
+              <a:buNone/>
+            </a:pPr>
+            <a:r>
+              <a:rPr lang="en-US" sz="1700" dirty="0">
+                <a:solidFill>
+                  <a:srgbClr val="EEEFF5"/>
+                </a:solidFill>
+                <a:latin typeface="Montserrat" pitchFamily="34" charset="0"/>
+                <a:ea typeface="Montserrat" pitchFamily="34" charset="-122"/>
+                <a:cs typeface="Montserrat" pitchFamily="34" charset="-120"/>
+              </a:rPr>
+              <a:t>API access for developers</a:t>
+            </a:r>
+            <a:endParaRPr lang="en-US" sz="1700" dirty="0"/>
+          </a:p>
+        </p:txBody>
+      </p:sp>
+    </p:spTree>
+  </p:cSld>
+  <p:clrMapOvr>
+    <a:masterClrMapping/>
+  </p:clrMapOvr>
+</p:sld>
+</file>
+
+<file path=ppt/slides/slide12.xml><?xml version="1.0" encoding="utf-8"?>
 <p:sld xmlns:a="http://schemas.openxmlformats.org/drawingml/2006/main" xmlns:r="http://schemas.openxmlformats.org/officeDocument/2006/relationships" xmlns:p="http://schemas.openxmlformats.org/presentationml/2006/main">
   <p:cSld name="Slide 10">
     <p:spTree>
@@ -2685,7 +3498,7 @@
           <a:bodyPr wrap="none" lIns="0" tIns="0" rIns="0" bIns="0" rtlCol="0" anchor="t"/>
           <a:lstStyle/>
           <a:p>
-            <a:pPr algn="l" indent="0" marL="0">
+            <a:pPr marL="0" indent="0" algn="l">
               <a:lnSpc>
                 <a:spcPts val="5600"/>
               </a:lnSpc>
@@ -2727,335 +3540,24 @@
           </a:solidFill>
           <a:ln/>
           <a:effectLst>
-            <a:outerShdw sx="100000" sy="100000" kx="0" ky="0" algn="bl" rotWithShape="0" blurRad="53340" dist="26670" dir="13500000">
-              <a:srgbClr val="ffffff">
+            <a:outerShdw blurRad="53340" dist="26670" dir="13500000" algn="bl" rotWithShape="0">
+              <a:srgbClr val="FFFFFF">
                 <a:alpha val="10000"/>
               </a:srgbClr>
             </a:outerShdw>
           </a:effectLst>
         </p:spPr>
+        <p:txBody>
+          <a:bodyPr/>
+          <a:lstStyle/>
+          <a:p>
+            <a:endParaRPr lang="en-AU"/>
+          </a:p>
+        </p:txBody>
       </p:sp>
       <p:pic>
         <p:nvPicPr>
-          <p:cNvPr id="4" name="Image 0" descr="preencoded.png">    </p:cNvPr>
-          <p:cNvPicPr>
-            <a:picLocks noChangeAspect="1"/>
-          </p:cNvPicPr>
-          <p:nvPr/>
-        </p:nvPicPr>
-        <p:blipFill>
-          <a:blip r:embed="rId1"/>
-          <a:stretch>
-            <a:fillRect/>
-          </a:stretch>
-        </p:blipFill>
-        <p:spPr>
-          <a:xfrm>
-            <a:off x="1698665" y="3123128"/>
-            <a:ext cx="304681" cy="380762"/>
-          </a:xfrm>
-          <a:prstGeom prst="rect">
-            <a:avLst/>
-          </a:prstGeom>
-        </p:spPr>
-      </p:pic>
-      <p:sp>
-        <p:nvSpPr>
-          <p:cNvPr id="5" name="Text 2"/>
-          <p:cNvSpPr/>
-          <p:nvPr/>
-        </p:nvSpPr>
-        <p:spPr>
-          <a:xfrm>
-            <a:off x="3160395" y="2897148"/>
-            <a:ext cx="2850713" cy="356235"/>
-          </a:xfrm>
-          <a:prstGeom prst="rect">
-            <a:avLst/>
-          </a:prstGeom>
-          <a:noFill/>
-          <a:ln/>
-        </p:spPr>
-        <p:txBody>
-          <a:bodyPr wrap="none" lIns="0" tIns="0" rIns="0" bIns="0" rtlCol="0" anchor="t"/>
-          <a:lstStyle/>
-          <a:p>
-            <a:pPr algn="l" indent="0" marL="0">
-              <a:lnSpc>
-                <a:spcPts val="2800"/>
-              </a:lnSpc>
-              <a:buNone/>
-            </a:pPr>
-            <a:r>
-              <a:rPr lang="en-US" sz="2200" b="1" dirty="0">
-                <a:solidFill>
-                  <a:srgbClr val="EEEFF5"/>
-                </a:solidFill>
-                <a:latin typeface="Barlow Bold" pitchFamily="34" charset="0"/>
-                <a:ea typeface="Barlow Bold" pitchFamily="34" charset="-122"/>
-                <a:cs typeface="Barlow Bold" pitchFamily="34" charset="-120"/>
-              </a:rPr>
-              <a:t>Scale deployment</a:t>
-            </a:r>
-            <a:endParaRPr lang="en-US" sz="2200" dirty="0"/>
-          </a:p>
-        </p:txBody>
-      </p:sp>
-      <p:sp>
-        <p:nvSpPr>
-          <p:cNvPr id="6" name="Text 3"/>
-          <p:cNvSpPr/>
-          <p:nvPr/>
-        </p:nvSpPr>
-        <p:spPr>
-          <a:xfrm>
-            <a:off x="3160395" y="3383280"/>
-            <a:ext cx="3115866" cy="346710"/>
-          </a:xfrm>
-          <a:prstGeom prst="rect">
-            <a:avLst/>
-          </a:prstGeom>
-          <a:noFill/>
-          <a:ln/>
-        </p:spPr>
-        <p:txBody>
-          <a:bodyPr wrap="none" lIns="0" tIns="0" rIns="0" bIns="0" rtlCol="0" anchor="t"/>
-          <a:lstStyle/>
-          <a:p>
-            <a:pPr algn="l" indent="0" marL="0">
-              <a:lnSpc>
-                <a:spcPts val="2700"/>
-              </a:lnSpc>
-              <a:buNone/>
-            </a:pPr>
-            <a:r>
-              <a:rPr lang="en-US" sz="1700" dirty="0">
-                <a:solidFill>
-                  <a:srgbClr val="EEEFF5"/>
-                </a:solidFill>
-                <a:latin typeface="Montserrat" pitchFamily="34" charset="0"/>
-                <a:ea typeface="Montserrat" pitchFamily="34" charset="-122"/>
-                <a:cs typeface="Montserrat" pitchFamily="34" charset="-120"/>
-              </a:rPr>
-              <a:t>Expand to additional regions</a:t>
-            </a:r>
-            <a:endParaRPr lang="en-US" sz="1700" dirty="0"/>
-          </a:p>
-        </p:txBody>
-      </p:sp>
-      <p:sp>
-        <p:nvSpPr>
-          <p:cNvPr id="7" name="Shape 4"/>
-          <p:cNvSpPr/>
-          <p:nvPr/>
-        </p:nvSpPr>
-        <p:spPr>
-          <a:xfrm>
-            <a:off x="3052048" y="3931325"/>
-            <a:ext cx="10711815" cy="15240"/>
-          </a:xfrm>
-          <a:prstGeom prst="roundRect">
-            <a:avLst>
-              <a:gd name="adj" fmla="val 1279500"/>
-            </a:avLst>
-          </a:prstGeom>
-          <a:solidFill>
-            <a:srgbClr val="60646A"/>
-          </a:solidFill>
-          <a:ln/>
-        </p:spPr>
-      </p:sp>
-      <p:sp>
-        <p:nvSpPr>
-          <p:cNvPr id="8" name="Shape 5"/>
-          <p:cNvSpPr/>
-          <p:nvPr/>
-        </p:nvSpPr>
-        <p:spPr>
-          <a:xfrm>
-            <a:off x="758309" y="4054793"/>
-            <a:ext cx="4371142" cy="1265992"/>
-          </a:xfrm>
-          <a:prstGeom prst="roundRect">
-            <a:avLst>
-              <a:gd name="adj" fmla="val 15403"/>
-            </a:avLst>
-          </a:prstGeom>
-          <a:solidFill>
-            <a:srgbClr val="282C32"/>
-          </a:solidFill>
-          <a:ln/>
-          <a:effectLst>
-            <a:outerShdw sx="100000" sy="100000" kx="0" ky="0" algn="bl" rotWithShape="0" blurRad="53340" dist="26670" dir="13500000">
-              <a:srgbClr val="ffffff">
-                <a:alpha val="10000"/>
-              </a:srgbClr>
-            </a:outerShdw>
-          </a:effectLst>
-        </p:spPr>
-      </p:sp>
-      <p:pic>
-        <p:nvPicPr>
-          <p:cNvPr id="9" name="Image 1" descr="preencoded.png">    </p:cNvPr>
-          <p:cNvPicPr>
-            <a:picLocks noChangeAspect="1"/>
-          </p:cNvPicPr>
-          <p:nvPr/>
-        </p:nvPicPr>
-        <p:blipFill>
-          <a:blip r:embed="rId2"/>
-          <a:stretch>
-            <a:fillRect/>
-          </a:stretch>
-        </p:blipFill>
-        <p:spPr>
-          <a:xfrm>
-            <a:off x="2791539" y="4497348"/>
-            <a:ext cx="304681" cy="380762"/>
-          </a:xfrm>
-          <a:prstGeom prst="rect">
-            <a:avLst/>
-          </a:prstGeom>
-        </p:spPr>
-      </p:pic>
-      <p:sp>
-        <p:nvSpPr>
-          <p:cNvPr id="10" name="Text 6"/>
-          <p:cNvSpPr/>
-          <p:nvPr/>
-        </p:nvSpPr>
-        <p:spPr>
-          <a:xfrm>
-            <a:off x="5346025" y="4271367"/>
-            <a:ext cx="2850713" cy="356235"/>
-          </a:xfrm>
-          <a:prstGeom prst="rect">
-            <a:avLst/>
-          </a:prstGeom>
-          <a:noFill/>
-          <a:ln/>
-        </p:spPr>
-        <p:txBody>
-          <a:bodyPr wrap="none" lIns="0" tIns="0" rIns="0" bIns="0" rtlCol="0" anchor="t"/>
-          <a:lstStyle/>
-          <a:p>
-            <a:pPr algn="l" indent="0" marL="0">
-              <a:lnSpc>
-                <a:spcPts val="2800"/>
-              </a:lnSpc>
-              <a:buNone/>
-            </a:pPr>
-            <a:r>
-              <a:rPr lang="en-US" sz="2200" b="1" dirty="0">
-                <a:solidFill>
-                  <a:srgbClr val="EEEFF5"/>
-                </a:solidFill>
-                <a:latin typeface="Barlow Bold" pitchFamily="34" charset="0"/>
-                <a:ea typeface="Barlow Bold" pitchFamily="34" charset="-122"/>
-                <a:cs typeface="Barlow Bold" pitchFamily="34" charset="-120"/>
-              </a:rPr>
-              <a:t>Real-time integration</a:t>
-            </a:r>
-            <a:endParaRPr lang="en-US" sz="2200" dirty="0"/>
-          </a:p>
-        </p:txBody>
-      </p:sp>
-      <p:sp>
-        <p:nvSpPr>
-          <p:cNvPr id="11" name="Text 7"/>
-          <p:cNvSpPr/>
-          <p:nvPr/>
-        </p:nvSpPr>
-        <p:spPr>
-          <a:xfrm>
-            <a:off x="5346025" y="4757499"/>
-            <a:ext cx="4037409" cy="346710"/>
-          </a:xfrm>
-          <a:prstGeom prst="rect">
-            <a:avLst/>
-          </a:prstGeom>
-          <a:noFill/>
-          <a:ln/>
-        </p:spPr>
-        <p:txBody>
-          <a:bodyPr wrap="none" lIns="0" tIns="0" rIns="0" bIns="0" rtlCol="0" anchor="t"/>
-          <a:lstStyle/>
-          <a:p>
-            <a:pPr algn="l" indent="0" marL="0">
-              <a:lnSpc>
-                <a:spcPts val="2700"/>
-              </a:lnSpc>
-              <a:buNone/>
-            </a:pPr>
-            <a:r>
-              <a:rPr lang="en-US" sz="1700" dirty="0">
-                <a:solidFill>
-                  <a:srgbClr val="EEEFF5"/>
-                </a:solidFill>
-                <a:latin typeface="Montserrat" pitchFamily="34" charset="0"/>
-                <a:ea typeface="Montserrat" pitchFamily="34" charset="-122"/>
-                <a:cs typeface="Montserrat" pitchFamily="34" charset="-120"/>
-              </a:rPr>
-              <a:t>Live data feeds and API development</a:t>
-            </a:r>
-            <a:endParaRPr lang="en-US" sz="1700" dirty="0"/>
-          </a:p>
-        </p:txBody>
-      </p:sp>
-      <p:sp>
-        <p:nvSpPr>
-          <p:cNvPr id="12" name="Shape 8"/>
-          <p:cNvSpPr/>
-          <p:nvPr/>
-        </p:nvSpPr>
-        <p:spPr>
-          <a:xfrm>
-            <a:off x="5237678" y="5305544"/>
-            <a:ext cx="8526185" cy="15240"/>
-          </a:xfrm>
-          <a:prstGeom prst="roundRect">
-            <a:avLst>
-              <a:gd name="adj" fmla="val 1279500"/>
-            </a:avLst>
-          </a:prstGeom>
-          <a:solidFill>
-            <a:srgbClr val="60646A"/>
-          </a:solidFill>
-          <a:ln/>
-        </p:spPr>
-      </p:sp>
-      <p:sp>
-        <p:nvSpPr>
-          <p:cNvPr id="13" name="Shape 9"/>
-          <p:cNvSpPr/>
-          <p:nvPr/>
-        </p:nvSpPr>
-        <p:spPr>
-          <a:xfrm>
-            <a:off x="758309" y="5429012"/>
-            <a:ext cx="6556891" cy="1265992"/>
-          </a:xfrm>
-          <a:prstGeom prst="roundRect">
-            <a:avLst>
-              <a:gd name="adj" fmla="val 15403"/>
-            </a:avLst>
-          </a:prstGeom>
-          <a:solidFill>
-            <a:srgbClr val="282C32"/>
-          </a:solidFill>
-          <a:ln/>
-          <a:effectLst>
-            <a:outerShdw sx="100000" sy="100000" kx="0" ky="0" algn="bl" rotWithShape="0" blurRad="53340" dist="26670" dir="13500000">
-              <a:srgbClr val="ffffff">
-                <a:alpha val="10000"/>
-              </a:srgbClr>
-            </a:outerShdw>
-          </a:effectLst>
-        </p:spPr>
-      </p:sp>
-      <p:pic>
-        <p:nvPicPr>
-          <p:cNvPr id="14" name="Image 2" descr="preencoded.png">    </p:cNvPr>
+          <p:cNvPr id="4" name="Image 0" descr="preencoded.png"/>
           <p:cNvPicPr>
             <a:picLocks noChangeAspect="1"/>
           </p:cNvPicPr>
@@ -3069,7 +3571,7 @@
         </p:blipFill>
         <p:spPr>
           <a:xfrm>
-            <a:off x="3884414" y="5871567"/>
+            <a:off x="1698665" y="3123128"/>
             <a:ext cx="304681" cy="380762"/>
           </a:xfrm>
           <a:prstGeom prst="rect">
@@ -3079,13 +3581,13 @@
       </p:pic>
       <p:sp>
         <p:nvSpPr>
-          <p:cNvPr id="15" name="Text 10"/>
-          <p:cNvSpPr/>
-          <p:nvPr/>
-        </p:nvSpPr>
-        <p:spPr>
-          <a:xfrm>
-            <a:off x="7531775" y="5645587"/>
+          <p:cNvPr id="5" name="Text 2"/>
+          <p:cNvSpPr/>
+          <p:nvPr/>
+        </p:nvSpPr>
+        <p:spPr>
+          <a:xfrm>
+            <a:off x="3160395" y="2897148"/>
             <a:ext cx="2850713" cy="356235"/>
           </a:xfrm>
           <a:prstGeom prst="rect">
@@ -3098,7 +3600,7 @@
           <a:bodyPr wrap="none" lIns="0" tIns="0" rIns="0" bIns="0" rtlCol="0" anchor="t"/>
           <a:lstStyle/>
           <a:p>
-            <a:pPr algn="l" indent="0" marL="0">
+            <a:pPr marL="0" indent="0" algn="l">
               <a:lnSpc>
                 <a:spcPts val="2800"/>
               </a:lnSpc>
@@ -3113,6 +3615,352 @@
                 <a:ea typeface="Barlow Bold" pitchFamily="34" charset="-122"/>
                 <a:cs typeface="Barlow Bold" pitchFamily="34" charset="-120"/>
               </a:rPr>
+              <a:t>Scale deployment</a:t>
+            </a:r>
+            <a:endParaRPr lang="en-US" sz="2200" dirty="0"/>
+          </a:p>
+        </p:txBody>
+      </p:sp>
+      <p:sp>
+        <p:nvSpPr>
+          <p:cNvPr id="6" name="Text 3"/>
+          <p:cNvSpPr/>
+          <p:nvPr/>
+        </p:nvSpPr>
+        <p:spPr>
+          <a:xfrm>
+            <a:off x="3160395" y="3383280"/>
+            <a:ext cx="3115866" cy="346710"/>
+          </a:xfrm>
+          <a:prstGeom prst="rect">
+            <a:avLst/>
+          </a:prstGeom>
+          <a:noFill/>
+          <a:ln/>
+        </p:spPr>
+        <p:txBody>
+          <a:bodyPr wrap="none" lIns="0" tIns="0" rIns="0" bIns="0" rtlCol="0" anchor="t"/>
+          <a:lstStyle/>
+          <a:p>
+            <a:pPr marL="0" indent="0" algn="l">
+              <a:lnSpc>
+                <a:spcPts val="2700"/>
+              </a:lnSpc>
+              <a:buNone/>
+            </a:pPr>
+            <a:r>
+              <a:rPr lang="en-US" sz="1700" dirty="0">
+                <a:solidFill>
+                  <a:srgbClr val="EEEFF5"/>
+                </a:solidFill>
+                <a:latin typeface="Montserrat" pitchFamily="34" charset="0"/>
+                <a:ea typeface="Montserrat" pitchFamily="34" charset="-122"/>
+                <a:cs typeface="Montserrat" pitchFamily="34" charset="-120"/>
+              </a:rPr>
+              <a:t>Expand to additional regions</a:t>
+            </a:r>
+            <a:endParaRPr lang="en-US" sz="1700" dirty="0"/>
+          </a:p>
+        </p:txBody>
+      </p:sp>
+      <p:sp>
+        <p:nvSpPr>
+          <p:cNvPr id="7" name="Shape 4"/>
+          <p:cNvSpPr/>
+          <p:nvPr/>
+        </p:nvSpPr>
+        <p:spPr>
+          <a:xfrm>
+            <a:off x="3052048" y="3931325"/>
+            <a:ext cx="10711815" cy="15240"/>
+          </a:xfrm>
+          <a:prstGeom prst="roundRect">
+            <a:avLst>
+              <a:gd name="adj" fmla="val 1279500"/>
+            </a:avLst>
+          </a:prstGeom>
+          <a:solidFill>
+            <a:srgbClr val="60646A"/>
+          </a:solidFill>
+          <a:ln/>
+        </p:spPr>
+        <p:txBody>
+          <a:bodyPr/>
+          <a:lstStyle/>
+          <a:p>
+            <a:endParaRPr lang="en-AU"/>
+          </a:p>
+        </p:txBody>
+      </p:sp>
+      <p:sp>
+        <p:nvSpPr>
+          <p:cNvPr id="8" name="Shape 5"/>
+          <p:cNvSpPr/>
+          <p:nvPr/>
+        </p:nvSpPr>
+        <p:spPr>
+          <a:xfrm>
+            <a:off x="758309" y="4054793"/>
+            <a:ext cx="4371142" cy="1265992"/>
+          </a:xfrm>
+          <a:prstGeom prst="roundRect">
+            <a:avLst>
+              <a:gd name="adj" fmla="val 15403"/>
+            </a:avLst>
+          </a:prstGeom>
+          <a:solidFill>
+            <a:srgbClr val="282C32"/>
+          </a:solidFill>
+          <a:ln/>
+          <a:effectLst>
+            <a:outerShdw blurRad="53340" dist="26670" dir="13500000" algn="bl" rotWithShape="0">
+              <a:srgbClr val="FFFFFF">
+                <a:alpha val="10000"/>
+              </a:srgbClr>
+            </a:outerShdw>
+          </a:effectLst>
+        </p:spPr>
+        <p:txBody>
+          <a:bodyPr/>
+          <a:lstStyle/>
+          <a:p>
+            <a:endParaRPr lang="en-AU"/>
+          </a:p>
+        </p:txBody>
+      </p:sp>
+      <p:pic>
+        <p:nvPicPr>
+          <p:cNvPr id="9" name="Image 1" descr="preencoded.png"/>
+          <p:cNvPicPr>
+            <a:picLocks noChangeAspect="1"/>
+          </p:cNvPicPr>
+          <p:nvPr/>
+        </p:nvPicPr>
+        <p:blipFill>
+          <a:blip r:embed="rId4"/>
+          <a:stretch>
+            <a:fillRect/>
+          </a:stretch>
+        </p:blipFill>
+        <p:spPr>
+          <a:xfrm>
+            <a:off x="2791539" y="4497348"/>
+            <a:ext cx="304681" cy="380762"/>
+          </a:xfrm>
+          <a:prstGeom prst="rect">
+            <a:avLst/>
+          </a:prstGeom>
+        </p:spPr>
+      </p:pic>
+      <p:sp>
+        <p:nvSpPr>
+          <p:cNvPr id="10" name="Text 6"/>
+          <p:cNvSpPr/>
+          <p:nvPr/>
+        </p:nvSpPr>
+        <p:spPr>
+          <a:xfrm>
+            <a:off x="5346025" y="4271367"/>
+            <a:ext cx="2850713" cy="356235"/>
+          </a:xfrm>
+          <a:prstGeom prst="rect">
+            <a:avLst/>
+          </a:prstGeom>
+          <a:noFill/>
+          <a:ln/>
+        </p:spPr>
+        <p:txBody>
+          <a:bodyPr wrap="none" lIns="0" tIns="0" rIns="0" bIns="0" rtlCol="0" anchor="t"/>
+          <a:lstStyle/>
+          <a:p>
+            <a:pPr marL="0" indent="0" algn="l">
+              <a:lnSpc>
+                <a:spcPts val="2800"/>
+              </a:lnSpc>
+              <a:buNone/>
+            </a:pPr>
+            <a:r>
+              <a:rPr lang="en-US" sz="2200" b="1" dirty="0">
+                <a:solidFill>
+                  <a:srgbClr val="EEEFF5"/>
+                </a:solidFill>
+                <a:latin typeface="Barlow Bold" pitchFamily="34" charset="0"/>
+                <a:ea typeface="Barlow Bold" pitchFamily="34" charset="-122"/>
+                <a:cs typeface="Barlow Bold" pitchFamily="34" charset="-120"/>
+              </a:rPr>
+              <a:t>Real-time integration</a:t>
+            </a:r>
+            <a:endParaRPr lang="en-US" sz="2200" dirty="0"/>
+          </a:p>
+        </p:txBody>
+      </p:sp>
+      <p:sp>
+        <p:nvSpPr>
+          <p:cNvPr id="11" name="Text 7"/>
+          <p:cNvSpPr/>
+          <p:nvPr/>
+        </p:nvSpPr>
+        <p:spPr>
+          <a:xfrm>
+            <a:off x="5346025" y="4757499"/>
+            <a:ext cx="4037409" cy="346710"/>
+          </a:xfrm>
+          <a:prstGeom prst="rect">
+            <a:avLst/>
+          </a:prstGeom>
+          <a:noFill/>
+          <a:ln/>
+        </p:spPr>
+        <p:txBody>
+          <a:bodyPr wrap="none" lIns="0" tIns="0" rIns="0" bIns="0" rtlCol="0" anchor="t"/>
+          <a:lstStyle/>
+          <a:p>
+            <a:pPr marL="0" indent="0" algn="l">
+              <a:lnSpc>
+                <a:spcPts val="2700"/>
+              </a:lnSpc>
+              <a:buNone/>
+            </a:pPr>
+            <a:r>
+              <a:rPr lang="en-US" sz="1700" dirty="0">
+                <a:solidFill>
+                  <a:srgbClr val="EEEFF5"/>
+                </a:solidFill>
+                <a:latin typeface="Montserrat" pitchFamily="34" charset="0"/>
+                <a:ea typeface="Montserrat" pitchFamily="34" charset="-122"/>
+                <a:cs typeface="Montserrat" pitchFamily="34" charset="-120"/>
+              </a:rPr>
+              <a:t>Live data feeds and API development</a:t>
+            </a:r>
+            <a:endParaRPr lang="en-US" sz="1700" dirty="0"/>
+          </a:p>
+        </p:txBody>
+      </p:sp>
+      <p:sp>
+        <p:nvSpPr>
+          <p:cNvPr id="12" name="Shape 8"/>
+          <p:cNvSpPr/>
+          <p:nvPr/>
+        </p:nvSpPr>
+        <p:spPr>
+          <a:xfrm>
+            <a:off x="5237678" y="5305544"/>
+            <a:ext cx="8526185" cy="15240"/>
+          </a:xfrm>
+          <a:prstGeom prst="roundRect">
+            <a:avLst>
+              <a:gd name="adj" fmla="val 1279500"/>
+            </a:avLst>
+          </a:prstGeom>
+          <a:solidFill>
+            <a:srgbClr val="60646A"/>
+          </a:solidFill>
+          <a:ln/>
+        </p:spPr>
+        <p:txBody>
+          <a:bodyPr/>
+          <a:lstStyle/>
+          <a:p>
+            <a:endParaRPr lang="en-AU"/>
+          </a:p>
+        </p:txBody>
+      </p:sp>
+      <p:sp>
+        <p:nvSpPr>
+          <p:cNvPr id="13" name="Shape 9"/>
+          <p:cNvSpPr/>
+          <p:nvPr/>
+        </p:nvSpPr>
+        <p:spPr>
+          <a:xfrm>
+            <a:off x="758309" y="5429012"/>
+            <a:ext cx="6556891" cy="1265992"/>
+          </a:xfrm>
+          <a:prstGeom prst="roundRect">
+            <a:avLst>
+              <a:gd name="adj" fmla="val 15403"/>
+            </a:avLst>
+          </a:prstGeom>
+          <a:solidFill>
+            <a:srgbClr val="282C32"/>
+          </a:solidFill>
+          <a:ln/>
+          <a:effectLst>
+            <a:outerShdw blurRad="53340" dist="26670" dir="13500000" algn="bl" rotWithShape="0">
+              <a:srgbClr val="FFFFFF">
+                <a:alpha val="10000"/>
+              </a:srgbClr>
+            </a:outerShdw>
+          </a:effectLst>
+        </p:spPr>
+        <p:txBody>
+          <a:bodyPr/>
+          <a:lstStyle/>
+          <a:p>
+            <a:endParaRPr lang="en-AU"/>
+          </a:p>
+        </p:txBody>
+      </p:sp>
+      <p:pic>
+        <p:nvPicPr>
+          <p:cNvPr id="14" name="Image 2" descr="preencoded.png"/>
+          <p:cNvPicPr>
+            <a:picLocks noChangeAspect="1"/>
+          </p:cNvPicPr>
+          <p:nvPr/>
+        </p:nvPicPr>
+        <p:blipFill>
+          <a:blip r:embed="rId5"/>
+          <a:stretch>
+            <a:fillRect/>
+          </a:stretch>
+        </p:blipFill>
+        <p:spPr>
+          <a:xfrm>
+            <a:off x="3884414" y="5871567"/>
+            <a:ext cx="304681" cy="380762"/>
+          </a:xfrm>
+          <a:prstGeom prst="rect">
+            <a:avLst/>
+          </a:prstGeom>
+        </p:spPr>
+      </p:pic>
+      <p:sp>
+        <p:nvSpPr>
+          <p:cNvPr id="15" name="Text 10"/>
+          <p:cNvSpPr/>
+          <p:nvPr/>
+        </p:nvSpPr>
+        <p:spPr>
+          <a:xfrm>
+            <a:off x="7531775" y="5645587"/>
+            <a:ext cx="2850713" cy="356235"/>
+          </a:xfrm>
+          <a:prstGeom prst="rect">
+            <a:avLst/>
+          </a:prstGeom>
+          <a:noFill/>
+          <a:ln/>
+        </p:spPr>
+        <p:txBody>
+          <a:bodyPr wrap="none" lIns="0" tIns="0" rIns="0" bIns="0" rtlCol="0" anchor="t"/>
+          <a:lstStyle/>
+          <a:p>
+            <a:pPr marL="0" indent="0" algn="l">
+              <a:lnSpc>
+                <a:spcPts val="2800"/>
+              </a:lnSpc>
+              <a:buNone/>
+            </a:pPr>
+            <a:r>
+              <a:rPr lang="en-US" sz="2200" b="1" dirty="0">
+                <a:solidFill>
+                  <a:srgbClr val="EEEFF5"/>
+                </a:solidFill>
+                <a:latin typeface="Barlow Bold" pitchFamily="34" charset="0"/>
+                <a:ea typeface="Barlow Bold" pitchFamily="34" charset="-122"/>
+                <a:cs typeface="Barlow Bold" pitchFamily="34" charset="-120"/>
+              </a:rPr>
               <a:t>Partner engagement</a:t>
             </a:r>
             <a:endParaRPr lang="en-US" sz="2200" dirty="0"/>
@@ -3140,7 +3988,7 @@
           <a:bodyPr wrap="none" lIns="0" tIns="0" rIns="0" bIns="0" rtlCol="0" anchor="t"/>
           <a:lstStyle/>
           <a:p>
-            <a:pPr algn="l" indent="0" marL="0">
+            <a:pPr marL="0" indent="0" algn="l">
               <a:lnSpc>
                 <a:spcPts val="2700"/>
               </a:lnSpc>
@@ -3188,239 +4036,7 @@
       </p:grpSpPr>
       <p:pic>
         <p:nvPicPr>
-          <p:cNvPr id="2" name="Image 0" descr="preencoded.png">    </p:cNvPr>
-          <p:cNvPicPr>
-            <a:picLocks noChangeAspect="1"/>
-          </p:cNvPicPr>
-          <p:nvPr/>
-        </p:nvPicPr>
-        <p:blipFill>
-          <a:blip r:embed="rId1"/>
-          <a:stretch>
-            <a:fillRect/>
-          </a:stretch>
-        </p:blipFill>
-        <p:spPr>
-          <a:xfrm>
-            <a:off x="0" y="0"/>
-            <a:ext cx="14630400" cy="2708196"/>
-          </a:xfrm>
-          <a:prstGeom prst="rect">
-            <a:avLst/>
-          </a:prstGeom>
-        </p:spPr>
-      </p:pic>
-      <p:sp>
-        <p:nvSpPr>
-          <p:cNvPr id="3" name="Text 0"/>
-          <p:cNvSpPr/>
-          <p:nvPr/>
-        </p:nvSpPr>
-        <p:spPr>
-          <a:xfrm>
-            <a:off x="758309" y="4323040"/>
-            <a:ext cx="5701546" cy="712708"/>
-          </a:xfrm>
-          <a:prstGeom prst="rect">
-            <a:avLst/>
-          </a:prstGeom>
-          <a:noFill/>
-          <a:ln/>
-        </p:spPr>
-        <p:txBody>
-          <a:bodyPr wrap="none" lIns="0" tIns="0" rIns="0" bIns="0" rtlCol="0" anchor="t"/>
-          <a:lstStyle/>
-          <a:p>
-            <a:pPr algn="l" indent="0" marL="0">
-              <a:lnSpc>
-                <a:spcPts val="5600"/>
-              </a:lnSpc>
-              <a:buNone/>
-            </a:pPr>
-            <a:r>
-              <a:rPr lang="en-US" sz="4450" b="1" dirty="0">
-                <a:solidFill>
-                  <a:srgbClr val="9998FF"/>
-                </a:solidFill>
-                <a:latin typeface="Barlow Bold" pitchFamily="34" charset="0"/>
-                <a:ea typeface="Barlow Bold" pitchFamily="34" charset="-122"/>
-                <a:cs typeface="Barlow Bold" pitchFamily="34" charset="-120"/>
-              </a:rPr>
-              <a:t>Project Overview</a:t>
-            </a:r>
-            <a:endParaRPr lang="en-US" sz="4450" dirty="0"/>
-          </a:p>
-        </p:txBody>
-      </p:sp>
-      <p:sp>
-        <p:nvSpPr>
-          <p:cNvPr id="4" name="Shape 1"/>
-          <p:cNvSpPr/>
-          <p:nvPr/>
-        </p:nvSpPr>
-        <p:spPr>
-          <a:xfrm>
-            <a:off x="758309" y="5360670"/>
-            <a:ext cx="487442" cy="487442"/>
-          </a:xfrm>
-          <a:prstGeom prst="roundRect">
-            <a:avLst>
-              <a:gd name="adj" fmla="val 40004"/>
-            </a:avLst>
-          </a:prstGeom>
-          <a:solidFill>
-            <a:srgbClr val="282C32"/>
-          </a:solidFill>
-          <a:ln/>
-          <a:effectLst>
-            <a:outerShdw sx="100000" sy="100000" kx="0" ky="0" algn="bl" rotWithShape="0" blurRad="53340" dist="26670" dir="13500000">
-              <a:srgbClr val="ffffff">
-                <a:alpha val="10000"/>
-              </a:srgbClr>
-            </a:outerShdw>
-          </a:effectLst>
-        </p:spPr>
-      </p:sp>
-      <p:pic>
-        <p:nvPicPr>
-          <p:cNvPr id="5" name="Image 1" descr="preencoded.png">    </p:cNvPr>
-          <p:cNvPicPr>
-            <a:picLocks noChangeAspect="1"/>
-          </p:cNvPicPr>
-          <p:nvPr/>
-        </p:nvPicPr>
-        <p:blipFill>
-          <a:blip r:embed="rId2"/>
-          <a:stretch>
-            <a:fillRect/>
-          </a:stretch>
-        </p:blipFill>
-        <p:spPr>
-          <a:xfrm>
-            <a:off x="830997" y="5390614"/>
-            <a:ext cx="342067" cy="427553"/>
-          </a:xfrm>
-          <a:prstGeom prst="rect">
-            <a:avLst/>
-          </a:prstGeom>
-        </p:spPr>
-      </p:pic>
-      <p:sp>
-        <p:nvSpPr>
-          <p:cNvPr id="6" name="Text 2"/>
-          <p:cNvSpPr/>
-          <p:nvPr/>
-        </p:nvSpPr>
-        <p:spPr>
-          <a:xfrm>
-            <a:off x="1462326" y="5435084"/>
-            <a:ext cx="2850713" cy="356235"/>
-          </a:xfrm>
-          <a:prstGeom prst="rect">
-            <a:avLst/>
-          </a:prstGeom>
-          <a:noFill/>
-          <a:ln/>
-        </p:spPr>
-        <p:txBody>
-          <a:bodyPr wrap="none" lIns="0" tIns="0" rIns="0" bIns="0" rtlCol="0" anchor="t"/>
-          <a:lstStyle/>
-          <a:p>
-            <a:pPr algn="l" indent="0" marL="0">
-              <a:lnSpc>
-                <a:spcPts val="2800"/>
-              </a:lnSpc>
-              <a:buNone/>
-            </a:pPr>
-            <a:r>
-              <a:rPr lang="en-US" sz="2200" b="1" dirty="0">
-                <a:solidFill>
-                  <a:srgbClr val="EEEFF5"/>
-                </a:solidFill>
-                <a:latin typeface="Barlow Bold" pitchFamily="34" charset="0"/>
-                <a:ea typeface="Barlow Bold" pitchFamily="34" charset="-122"/>
-                <a:cs typeface="Barlow Bold" pitchFamily="34" charset="-120"/>
-              </a:rPr>
-              <a:t>Data Integration</a:t>
-            </a:r>
-            <a:endParaRPr lang="en-US" sz="2200" dirty="0"/>
-          </a:p>
-        </p:txBody>
-      </p:sp>
-      <p:sp>
-        <p:nvSpPr>
-          <p:cNvPr id="7" name="Text 3"/>
-          <p:cNvSpPr/>
-          <p:nvPr/>
-        </p:nvSpPr>
-        <p:spPr>
-          <a:xfrm>
-            <a:off x="1462326" y="5921216"/>
-            <a:ext cx="3486745" cy="693420"/>
-          </a:xfrm>
-          <a:prstGeom prst="rect">
-            <a:avLst/>
-          </a:prstGeom>
-          <a:noFill/>
-          <a:ln/>
-        </p:spPr>
-        <p:txBody>
-          <a:bodyPr wrap="square" lIns="0" tIns="0" rIns="0" bIns="0" rtlCol="0" anchor="t"/>
-          <a:lstStyle/>
-          <a:p>
-            <a:pPr algn="l" indent="0" marL="0">
-              <a:lnSpc>
-                <a:spcPts val="2700"/>
-              </a:lnSpc>
-              <a:buNone/>
-            </a:pPr>
-            <a:r>
-              <a:rPr lang="en-US" sz="1700" dirty="0">
-                <a:solidFill>
-                  <a:srgbClr val="EEEFF5"/>
-                </a:solidFill>
-                <a:latin typeface="Montserrat" pitchFamily="34" charset="0"/>
-                <a:ea typeface="Montserrat" pitchFamily="34" charset="-122"/>
-                <a:cs typeface="Montserrat" pitchFamily="34" charset="-120"/>
-              </a:rPr>
-              <a:t>Historical traffic records + station metadata</a:t>
-            </a:r>
-            <a:endParaRPr lang="en-US" sz="1700" dirty="0"/>
-          </a:p>
-        </p:txBody>
-      </p:sp>
-      <p:sp>
-        <p:nvSpPr>
-          <p:cNvPr id="8" name="Shape 4"/>
-          <p:cNvSpPr/>
-          <p:nvPr/>
-        </p:nvSpPr>
-        <p:spPr>
-          <a:xfrm>
-            <a:off x="5219819" y="5360670"/>
-            <a:ext cx="487442" cy="487442"/>
-          </a:xfrm>
-          <a:prstGeom prst="roundRect">
-            <a:avLst>
-              <a:gd name="adj" fmla="val 40004"/>
-            </a:avLst>
-          </a:prstGeom>
-          <a:solidFill>
-            <a:srgbClr val="282C32"/>
-          </a:solidFill>
-          <a:ln/>
-          <a:effectLst>
-            <a:outerShdw sx="100000" sy="100000" kx="0" ky="0" algn="bl" rotWithShape="0" blurRad="53340" dist="26670" dir="13500000">
-              <a:srgbClr val="ffffff">
-                <a:alpha val="10000"/>
-              </a:srgbClr>
-            </a:outerShdw>
-          </a:effectLst>
-        </p:spPr>
-      </p:sp>
-      <p:pic>
-        <p:nvPicPr>
-          <p:cNvPr id="9" name="Image 2" descr="preencoded.png">    </p:cNvPr>
+          <p:cNvPr id="2" name="Image 0" descr="preencoded.png"/>
           <p:cNvPicPr>
             <a:picLocks noChangeAspect="1"/>
           </p:cNvPicPr>
@@ -3434,8 +4050,8 @@
         </p:blipFill>
         <p:spPr>
           <a:xfrm>
-            <a:off x="5292507" y="5390614"/>
-            <a:ext cx="342067" cy="427553"/>
+            <a:off x="0" y="0"/>
+            <a:ext cx="14630400" cy="2708196"/>
           </a:xfrm>
           <a:prstGeom prst="rect">
             <a:avLst/>
@@ -3444,14 +4060,14 @@
       </p:pic>
       <p:sp>
         <p:nvSpPr>
-          <p:cNvPr id="10" name="Text 5"/>
-          <p:cNvSpPr/>
-          <p:nvPr/>
-        </p:nvSpPr>
-        <p:spPr>
-          <a:xfrm>
-            <a:off x="5923836" y="5435084"/>
-            <a:ext cx="2850713" cy="356235"/>
+          <p:cNvPr id="3" name="Text 0"/>
+          <p:cNvSpPr/>
+          <p:nvPr/>
+        </p:nvSpPr>
+        <p:spPr>
+          <a:xfrm>
+            <a:off x="758309" y="4323040"/>
+            <a:ext cx="5701546" cy="712708"/>
           </a:xfrm>
           <a:prstGeom prst="rect">
             <a:avLst/>
@@ -3463,78 +4079,36 @@
           <a:bodyPr wrap="none" lIns="0" tIns="0" rIns="0" bIns="0" rtlCol="0" anchor="t"/>
           <a:lstStyle/>
           <a:p>
-            <a:pPr algn="l" indent="0" marL="0">
+            <a:pPr marL="0" indent="0" algn="l">
               <a:lnSpc>
-                <a:spcPts val="2800"/>
+                <a:spcPts val="5600"/>
               </a:lnSpc>
               <a:buNone/>
             </a:pPr>
             <a:r>
-              <a:rPr lang="en-US" sz="2200" b="1" dirty="0">
-                <a:solidFill>
-                  <a:srgbClr val="EEEFF5"/>
+              <a:rPr lang="en-US" sz="4450" b="1" dirty="0">
+                <a:solidFill>
+                  <a:srgbClr val="9998FF"/>
                 </a:solidFill>
                 <a:latin typeface="Barlow Bold" pitchFamily="34" charset="0"/>
                 <a:ea typeface="Barlow Bold" pitchFamily="34" charset="-122"/>
                 <a:cs typeface="Barlow Bold" pitchFamily="34" charset="-120"/>
               </a:rPr>
-              <a:t>Machine Learning</a:t>
-            </a:r>
-            <a:endParaRPr lang="en-US" sz="2200" dirty="0"/>
-          </a:p>
-        </p:txBody>
-      </p:sp>
-      <p:sp>
-        <p:nvSpPr>
-          <p:cNvPr id="11" name="Text 6"/>
-          <p:cNvSpPr/>
-          <p:nvPr/>
-        </p:nvSpPr>
-        <p:spPr>
-          <a:xfrm>
-            <a:off x="5923836" y="5921216"/>
-            <a:ext cx="3486745" cy="693420"/>
-          </a:xfrm>
-          <a:prstGeom prst="rect">
-            <a:avLst/>
-          </a:prstGeom>
-          <a:noFill/>
-          <a:ln/>
-        </p:spPr>
-        <p:txBody>
-          <a:bodyPr wrap="square" lIns="0" tIns="0" rIns="0" bIns="0" rtlCol="0" anchor="t"/>
-          <a:lstStyle/>
-          <a:p>
-            <a:pPr algn="l" indent="0" marL="0">
-              <a:lnSpc>
-                <a:spcPts val="2700"/>
-              </a:lnSpc>
-              <a:buNone/>
-            </a:pPr>
-            <a:r>
-              <a:rPr lang="en-US" sz="1700" dirty="0">
-                <a:solidFill>
-                  <a:srgbClr val="EEEFF5"/>
-                </a:solidFill>
-                <a:latin typeface="Montserrat" pitchFamily="34" charset="0"/>
-                <a:ea typeface="Montserrat" pitchFamily="34" charset="-122"/>
-                <a:cs typeface="Montserrat" pitchFamily="34" charset="-120"/>
-              </a:rPr>
-              <a:t>Predict traffic volume with road characteristics impact</a:t>
-            </a:r>
-            <a:endParaRPr lang="en-US" sz="1700" dirty="0"/>
-          </a:p>
-        </p:txBody>
-      </p:sp>
-      <p:sp>
-        <p:nvSpPr>
-          <p:cNvPr id="12" name="Shape 7"/>
-          <p:cNvSpPr/>
-          <p:nvPr/>
-        </p:nvSpPr>
-        <p:spPr>
-          <a:xfrm>
-            <a:off x="9681329" y="5360670"/>
+              <a:t>Project Overview</a:t>
+            </a:r>
+            <a:endParaRPr lang="en-US" sz="4450" dirty="0"/>
+          </a:p>
+        </p:txBody>
+      </p:sp>
+      <p:sp>
+        <p:nvSpPr>
+          <p:cNvPr id="4" name="Shape 1"/>
+          <p:cNvSpPr/>
+          <p:nvPr/>
+        </p:nvSpPr>
+        <p:spPr>
+          <a:xfrm>
+            <a:off x="758309" y="5360670"/>
             <a:ext cx="487442" cy="487442"/>
           </a:xfrm>
           <a:prstGeom prst="roundRect">
@@ -3547,17 +4121,24 @@
           </a:solidFill>
           <a:ln/>
           <a:effectLst>
-            <a:outerShdw sx="100000" sy="100000" kx="0" ky="0" algn="bl" rotWithShape="0" blurRad="53340" dist="26670" dir="13500000">
-              <a:srgbClr val="ffffff">
+            <a:outerShdw blurRad="53340" dist="26670" dir="13500000" algn="bl" rotWithShape="0">
+              <a:srgbClr val="FFFFFF">
                 <a:alpha val="10000"/>
               </a:srgbClr>
             </a:outerShdw>
           </a:effectLst>
         </p:spPr>
+        <p:txBody>
+          <a:bodyPr/>
+          <a:lstStyle/>
+          <a:p>
+            <a:endParaRPr lang="en-AU"/>
+          </a:p>
+        </p:txBody>
       </p:sp>
       <p:pic>
         <p:nvPicPr>
-          <p:cNvPr id="13" name="Image 3" descr="preencoded.png">    </p:cNvPr>
+          <p:cNvPr id="5" name="Image 1" descr="preencoded.png"/>
           <p:cNvPicPr>
             <a:picLocks noChangeAspect="1"/>
           </p:cNvPicPr>
@@ -3571,7 +4152,7 @@
         </p:blipFill>
         <p:spPr>
           <a:xfrm>
-            <a:off x="9754017" y="5390614"/>
+            <a:off x="830997" y="5390614"/>
             <a:ext cx="342067" cy="427553"/>
           </a:xfrm>
           <a:prstGeom prst="rect">
@@ -3581,13 +4162,13 @@
       </p:pic>
       <p:sp>
         <p:nvSpPr>
-          <p:cNvPr id="14" name="Text 8"/>
-          <p:cNvSpPr/>
-          <p:nvPr/>
-        </p:nvSpPr>
-        <p:spPr>
-          <a:xfrm>
-            <a:off x="10385346" y="5435084"/>
+          <p:cNvPr id="6" name="Text 2"/>
+          <p:cNvSpPr/>
+          <p:nvPr/>
+        </p:nvSpPr>
+        <p:spPr>
+          <a:xfrm>
+            <a:off x="1462326" y="5435084"/>
             <a:ext cx="2850713" cy="356235"/>
           </a:xfrm>
           <a:prstGeom prst="rect">
@@ -3600,7 +4181,7 @@
           <a:bodyPr wrap="none" lIns="0" tIns="0" rIns="0" bIns="0" rtlCol="0" anchor="t"/>
           <a:lstStyle/>
           <a:p>
-            <a:pPr algn="l" indent="0" marL="0">
+            <a:pPr marL="0" indent="0" algn="l">
               <a:lnSpc>
                 <a:spcPts val="2800"/>
               </a:lnSpc>
@@ -3615,6 +4196,294 @@
                 <a:ea typeface="Barlow Bold" pitchFamily="34" charset="-122"/>
                 <a:cs typeface="Barlow Bold" pitchFamily="34" charset="-120"/>
               </a:rPr>
+              <a:t>Data Integration</a:t>
+            </a:r>
+            <a:endParaRPr lang="en-US" sz="2200" dirty="0"/>
+          </a:p>
+        </p:txBody>
+      </p:sp>
+      <p:sp>
+        <p:nvSpPr>
+          <p:cNvPr id="7" name="Text 3"/>
+          <p:cNvSpPr/>
+          <p:nvPr/>
+        </p:nvSpPr>
+        <p:spPr>
+          <a:xfrm>
+            <a:off x="1462326" y="5921216"/>
+            <a:ext cx="3486745" cy="693420"/>
+          </a:xfrm>
+          <a:prstGeom prst="rect">
+            <a:avLst/>
+          </a:prstGeom>
+          <a:noFill/>
+          <a:ln/>
+        </p:spPr>
+        <p:txBody>
+          <a:bodyPr wrap="square" lIns="0" tIns="0" rIns="0" bIns="0" rtlCol="0" anchor="t"/>
+          <a:lstStyle/>
+          <a:p>
+            <a:pPr marL="0" indent="0" algn="l">
+              <a:lnSpc>
+                <a:spcPts val="2700"/>
+              </a:lnSpc>
+              <a:buNone/>
+            </a:pPr>
+            <a:r>
+              <a:rPr lang="en-US" sz="1700" dirty="0">
+                <a:solidFill>
+                  <a:srgbClr val="EEEFF5"/>
+                </a:solidFill>
+                <a:latin typeface="Montserrat" pitchFamily="34" charset="0"/>
+                <a:ea typeface="Montserrat" pitchFamily="34" charset="-122"/>
+                <a:cs typeface="Montserrat" pitchFamily="34" charset="-120"/>
+              </a:rPr>
+              <a:t>Historical traffic records + station metadata</a:t>
+            </a:r>
+            <a:endParaRPr lang="en-US" sz="1700" dirty="0"/>
+          </a:p>
+        </p:txBody>
+      </p:sp>
+      <p:sp>
+        <p:nvSpPr>
+          <p:cNvPr id="8" name="Shape 4"/>
+          <p:cNvSpPr/>
+          <p:nvPr/>
+        </p:nvSpPr>
+        <p:spPr>
+          <a:xfrm>
+            <a:off x="5219819" y="5360670"/>
+            <a:ext cx="487442" cy="487442"/>
+          </a:xfrm>
+          <a:prstGeom prst="roundRect">
+            <a:avLst>
+              <a:gd name="adj" fmla="val 40004"/>
+            </a:avLst>
+          </a:prstGeom>
+          <a:solidFill>
+            <a:srgbClr val="282C32"/>
+          </a:solidFill>
+          <a:ln/>
+          <a:effectLst>
+            <a:outerShdw blurRad="53340" dist="26670" dir="13500000" algn="bl" rotWithShape="0">
+              <a:srgbClr val="FFFFFF">
+                <a:alpha val="10000"/>
+              </a:srgbClr>
+            </a:outerShdw>
+          </a:effectLst>
+        </p:spPr>
+        <p:txBody>
+          <a:bodyPr/>
+          <a:lstStyle/>
+          <a:p>
+            <a:endParaRPr lang="en-AU"/>
+          </a:p>
+        </p:txBody>
+      </p:sp>
+      <p:pic>
+        <p:nvPicPr>
+          <p:cNvPr id="9" name="Image 2" descr="preencoded.png"/>
+          <p:cNvPicPr>
+            <a:picLocks noChangeAspect="1"/>
+          </p:cNvPicPr>
+          <p:nvPr/>
+        </p:nvPicPr>
+        <p:blipFill>
+          <a:blip r:embed="rId5"/>
+          <a:stretch>
+            <a:fillRect/>
+          </a:stretch>
+        </p:blipFill>
+        <p:spPr>
+          <a:xfrm>
+            <a:off x="5292507" y="5390614"/>
+            <a:ext cx="342067" cy="427553"/>
+          </a:xfrm>
+          <a:prstGeom prst="rect">
+            <a:avLst/>
+          </a:prstGeom>
+        </p:spPr>
+      </p:pic>
+      <p:sp>
+        <p:nvSpPr>
+          <p:cNvPr id="10" name="Text 5"/>
+          <p:cNvSpPr/>
+          <p:nvPr/>
+        </p:nvSpPr>
+        <p:spPr>
+          <a:xfrm>
+            <a:off x="5923836" y="5435084"/>
+            <a:ext cx="2850713" cy="356235"/>
+          </a:xfrm>
+          <a:prstGeom prst="rect">
+            <a:avLst/>
+          </a:prstGeom>
+          <a:noFill/>
+          <a:ln/>
+        </p:spPr>
+        <p:txBody>
+          <a:bodyPr wrap="none" lIns="0" tIns="0" rIns="0" bIns="0" rtlCol="0" anchor="t"/>
+          <a:lstStyle/>
+          <a:p>
+            <a:pPr marL="0" indent="0" algn="l">
+              <a:lnSpc>
+                <a:spcPts val="2800"/>
+              </a:lnSpc>
+              <a:buNone/>
+            </a:pPr>
+            <a:r>
+              <a:rPr lang="en-US" sz="2200" b="1" dirty="0">
+                <a:solidFill>
+                  <a:srgbClr val="EEEFF5"/>
+                </a:solidFill>
+                <a:latin typeface="Barlow Bold" pitchFamily="34" charset="0"/>
+                <a:ea typeface="Barlow Bold" pitchFamily="34" charset="-122"/>
+                <a:cs typeface="Barlow Bold" pitchFamily="34" charset="-120"/>
+              </a:rPr>
+              <a:t>Machine Learning</a:t>
+            </a:r>
+            <a:endParaRPr lang="en-US" sz="2200" dirty="0"/>
+          </a:p>
+        </p:txBody>
+      </p:sp>
+      <p:sp>
+        <p:nvSpPr>
+          <p:cNvPr id="11" name="Text 6"/>
+          <p:cNvSpPr/>
+          <p:nvPr/>
+        </p:nvSpPr>
+        <p:spPr>
+          <a:xfrm>
+            <a:off x="5923836" y="5921216"/>
+            <a:ext cx="3486745" cy="693420"/>
+          </a:xfrm>
+          <a:prstGeom prst="rect">
+            <a:avLst/>
+          </a:prstGeom>
+          <a:noFill/>
+          <a:ln/>
+        </p:spPr>
+        <p:txBody>
+          <a:bodyPr wrap="square" lIns="0" tIns="0" rIns="0" bIns="0" rtlCol="0" anchor="t"/>
+          <a:lstStyle/>
+          <a:p>
+            <a:pPr marL="0" indent="0" algn="l">
+              <a:lnSpc>
+                <a:spcPts val="2700"/>
+              </a:lnSpc>
+              <a:buNone/>
+            </a:pPr>
+            <a:r>
+              <a:rPr lang="en-US" sz="1700" dirty="0">
+                <a:solidFill>
+                  <a:srgbClr val="EEEFF5"/>
+                </a:solidFill>
+                <a:latin typeface="Montserrat" pitchFamily="34" charset="0"/>
+                <a:ea typeface="Montserrat" pitchFamily="34" charset="-122"/>
+                <a:cs typeface="Montserrat" pitchFamily="34" charset="-120"/>
+              </a:rPr>
+              <a:t>Predict traffic volume with road characteristics impact</a:t>
+            </a:r>
+            <a:endParaRPr lang="en-US" sz="1700" dirty="0"/>
+          </a:p>
+        </p:txBody>
+      </p:sp>
+      <p:sp>
+        <p:nvSpPr>
+          <p:cNvPr id="12" name="Shape 7"/>
+          <p:cNvSpPr/>
+          <p:nvPr/>
+        </p:nvSpPr>
+        <p:spPr>
+          <a:xfrm>
+            <a:off x="9681329" y="5360670"/>
+            <a:ext cx="487442" cy="487442"/>
+          </a:xfrm>
+          <a:prstGeom prst="roundRect">
+            <a:avLst>
+              <a:gd name="adj" fmla="val 40004"/>
+            </a:avLst>
+          </a:prstGeom>
+          <a:solidFill>
+            <a:srgbClr val="282C32"/>
+          </a:solidFill>
+          <a:ln/>
+          <a:effectLst>
+            <a:outerShdw blurRad="53340" dist="26670" dir="13500000" algn="bl" rotWithShape="0">
+              <a:srgbClr val="FFFFFF">
+                <a:alpha val="10000"/>
+              </a:srgbClr>
+            </a:outerShdw>
+          </a:effectLst>
+        </p:spPr>
+        <p:txBody>
+          <a:bodyPr/>
+          <a:lstStyle/>
+          <a:p>
+            <a:endParaRPr lang="en-AU"/>
+          </a:p>
+        </p:txBody>
+      </p:sp>
+      <p:pic>
+        <p:nvPicPr>
+          <p:cNvPr id="13" name="Image 3" descr="preencoded.png"/>
+          <p:cNvPicPr>
+            <a:picLocks noChangeAspect="1"/>
+          </p:cNvPicPr>
+          <p:nvPr/>
+        </p:nvPicPr>
+        <p:blipFill>
+          <a:blip r:embed="rId6"/>
+          <a:stretch>
+            <a:fillRect/>
+          </a:stretch>
+        </p:blipFill>
+        <p:spPr>
+          <a:xfrm>
+            <a:off x="9754017" y="5390614"/>
+            <a:ext cx="342067" cy="427553"/>
+          </a:xfrm>
+          <a:prstGeom prst="rect">
+            <a:avLst/>
+          </a:prstGeom>
+        </p:spPr>
+      </p:pic>
+      <p:sp>
+        <p:nvSpPr>
+          <p:cNvPr id="14" name="Text 8"/>
+          <p:cNvSpPr/>
+          <p:nvPr/>
+        </p:nvSpPr>
+        <p:spPr>
+          <a:xfrm>
+            <a:off x="10385346" y="5435084"/>
+            <a:ext cx="2850713" cy="356235"/>
+          </a:xfrm>
+          <a:prstGeom prst="rect">
+            <a:avLst/>
+          </a:prstGeom>
+          <a:noFill/>
+          <a:ln/>
+        </p:spPr>
+        <p:txBody>
+          <a:bodyPr wrap="none" lIns="0" tIns="0" rIns="0" bIns="0" rtlCol="0" anchor="t"/>
+          <a:lstStyle/>
+          <a:p>
+            <a:pPr marL="0" indent="0" algn="l">
+              <a:lnSpc>
+                <a:spcPts val="2800"/>
+              </a:lnSpc>
+              <a:buNone/>
+            </a:pPr>
+            <a:r>
+              <a:rPr lang="en-US" sz="2200" b="1" dirty="0">
+                <a:solidFill>
+                  <a:srgbClr val="EEEFF5"/>
+                </a:solidFill>
+                <a:latin typeface="Barlow Bold" pitchFamily="34" charset="0"/>
+                <a:ea typeface="Barlow Bold" pitchFamily="34" charset="-122"/>
+                <a:cs typeface="Barlow Bold" pitchFamily="34" charset="-120"/>
+              </a:rPr>
               <a:t>Weather Awareness</a:t>
             </a:r>
             <a:endParaRPr lang="en-US" sz="2200" dirty="0"/>
@@ -3642,7 +4511,7 @@
           <a:bodyPr wrap="square" lIns="0" tIns="0" rIns="0" bIns="0" rtlCol="0" anchor="t"/>
           <a:lstStyle/>
           <a:p>
-            <a:pPr algn="l" indent="0" marL="0">
+            <a:pPr marL="0" indent="0" algn="l">
               <a:lnSpc>
                 <a:spcPts val="2700"/>
               </a:lnSpc>
@@ -3690,181 +4559,7 @@
       </p:grpSpPr>
       <p:pic>
         <p:nvPicPr>
-          <p:cNvPr id="2" name="Image 0" descr="preencoded.png">    </p:cNvPr>
-          <p:cNvPicPr>
-            <a:picLocks noChangeAspect="1"/>
-          </p:cNvPicPr>
-          <p:nvPr/>
-        </p:nvPicPr>
-        <p:blipFill>
-          <a:blip r:embed="rId1"/>
-          <a:stretch>
-            <a:fillRect/>
-          </a:stretch>
-        </p:blipFill>
-        <p:spPr>
-          <a:xfrm>
-            <a:off x="9144000" y="0"/>
-            <a:ext cx="5486400" cy="8229600"/>
-          </a:xfrm>
-          <a:prstGeom prst="rect">
-            <a:avLst/>
-          </a:prstGeom>
-        </p:spPr>
-      </p:pic>
-      <p:sp>
-        <p:nvSpPr>
-          <p:cNvPr id="3" name="Text 0"/>
-          <p:cNvSpPr/>
-          <p:nvPr/>
-        </p:nvSpPr>
-        <p:spPr>
-          <a:xfrm>
-            <a:off x="758309" y="1646039"/>
-            <a:ext cx="5701546" cy="712708"/>
-          </a:xfrm>
-          <a:prstGeom prst="rect">
-            <a:avLst/>
-          </a:prstGeom>
-          <a:noFill/>
-          <a:ln/>
-        </p:spPr>
-        <p:txBody>
-          <a:bodyPr wrap="none" lIns="0" tIns="0" rIns="0" bIns="0" rtlCol="0" anchor="t"/>
-          <a:lstStyle/>
-          <a:p>
-            <a:pPr algn="l" indent="0" marL="0">
-              <a:lnSpc>
-                <a:spcPts val="5600"/>
-              </a:lnSpc>
-              <a:buNone/>
-            </a:pPr>
-            <a:r>
-              <a:rPr lang="en-US" sz="4450" b="1" dirty="0">
-                <a:solidFill>
-                  <a:srgbClr val="9998FF"/>
-                </a:solidFill>
-                <a:latin typeface="Barlow Bold" pitchFamily="34" charset="0"/>
-                <a:ea typeface="Barlow Bold" pitchFamily="34" charset="-122"/>
-                <a:cs typeface="Barlow Bold" pitchFamily="34" charset="-120"/>
-              </a:rPr>
-              <a:t>Problem Statement</a:t>
-            </a:r>
-            <a:endParaRPr lang="en-US" sz="4450" dirty="0"/>
-          </a:p>
-        </p:txBody>
-      </p:sp>
-      <p:pic>
-        <p:nvPicPr>
-          <p:cNvPr id="4" name="Image 1" descr="preencoded.png">    </p:cNvPr>
-          <p:cNvPicPr>
-            <a:picLocks noChangeAspect="1"/>
-          </p:cNvPicPr>
-          <p:nvPr/>
-        </p:nvPicPr>
-        <p:blipFill>
-          <a:blip r:embed="rId2"/>
-          <a:stretch>
-            <a:fillRect/>
-          </a:stretch>
-        </p:blipFill>
-        <p:spPr>
-          <a:xfrm>
-            <a:off x="758309" y="2683669"/>
-            <a:ext cx="1083231" cy="1299924"/>
-          </a:xfrm>
-          <a:prstGeom prst="rect">
-            <a:avLst/>
-          </a:prstGeom>
-        </p:spPr>
-      </p:pic>
-      <p:sp>
-        <p:nvSpPr>
-          <p:cNvPr id="5" name="Text 1"/>
-          <p:cNvSpPr/>
-          <p:nvPr/>
-        </p:nvSpPr>
-        <p:spPr>
-          <a:xfrm>
-            <a:off x="2166461" y="2900243"/>
-            <a:ext cx="4510683" cy="356235"/>
-          </a:xfrm>
-          <a:prstGeom prst="rect">
-            <a:avLst/>
-          </a:prstGeom>
-          <a:noFill/>
-          <a:ln/>
-        </p:spPr>
-        <p:txBody>
-          <a:bodyPr wrap="none" lIns="0" tIns="0" rIns="0" bIns="0" rtlCol="0" anchor="t"/>
-          <a:lstStyle/>
-          <a:p>
-            <a:pPr algn="l" indent="0" marL="0">
-              <a:lnSpc>
-                <a:spcPts val="2800"/>
-              </a:lnSpc>
-              <a:buNone/>
-            </a:pPr>
-            <a:r>
-              <a:rPr lang="en-US" sz="2200" b="1" dirty="0">
-                <a:solidFill>
-                  <a:srgbClr val="EEEFF5"/>
-                </a:solidFill>
-                <a:latin typeface="Barlow Bold" pitchFamily="34" charset="0"/>
-                <a:ea typeface="Barlow Bold" pitchFamily="34" charset="-122"/>
-                <a:cs typeface="Barlow Bold" pitchFamily="34" charset="-120"/>
-              </a:rPr>
-              <a:t>Sub-problem A: Baseline Prediction</a:t>
-            </a:r>
-            <a:endParaRPr lang="en-US" sz="2200" dirty="0"/>
-          </a:p>
-        </p:txBody>
-      </p:sp>
-      <p:sp>
-        <p:nvSpPr>
-          <p:cNvPr id="6" name="Text 2"/>
-          <p:cNvSpPr/>
-          <p:nvPr/>
-        </p:nvSpPr>
-        <p:spPr>
-          <a:xfrm>
-            <a:off x="2166461" y="3386376"/>
-            <a:ext cx="6219230" cy="346710"/>
-          </a:xfrm>
-          <a:prstGeom prst="rect">
-            <a:avLst/>
-          </a:prstGeom>
-          <a:noFill/>
-          <a:ln/>
-        </p:spPr>
-        <p:txBody>
-          <a:bodyPr wrap="none" lIns="0" tIns="0" rIns="0" bIns="0" rtlCol="0" anchor="t"/>
-          <a:lstStyle/>
-          <a:p>
-            <a:pPr algn="l" indent="0" marL="0">
-              <a:lnSpc>
-                <a:spcPts val="2700"/>
-              </a:lnSpc>
-              <a:buNone/>
-            </a:pPr>
-            <a:r>
-              <a:rPr lang="en-US" sz="1700" dirty="0">
-                <a:solidFill>
-                  <a:srgbClr val="EEEFF5"/>
-                </a:solidFill>
-                <a:latin typeface="Montserrat" pitchFamily="34" charset="0"/>
-                <a:ea typeface="Montserrat" pitchFamily="34" charset="-122"/>
-                <a:cs typeface="Montserrat" pitchFamily="34" charset="-120"/>
-              </a:rPr>
-              <a:t>Learn traffic trends using temporal features</a:t>
-            </a:r>
-            <a:endParaRPr lang="en-US" sz="1700" dirty="0"/>
-          </a:p>
-        </p:txBody>
-      </p:sp>
-      <p:pic>
-        <p:nvPicPr>
-          <p:cNvPr id="7" name="Image 2" descr="preencoded.png">    </p:cNvPr>
+          <p:cNvPr id="2" name="Image 0" descr="preencoded.png"/>
           <p:cNvPicPr>
             <a:picLocks noChangeAspect="1"/>
           </p:cNvPicPr>
@@ -3878,8 +4573,8 @@
         </p:blipFill>
         <p:spPr>
           <a:xfrm>
-            <a:off x="758309" y="3983593"/>
-            <a:ext cx="1083231" cy="1299924"/>
+            <a:off x="9144000" y="0"/>
+            <a:ext cx="5486400" cy="8229600"/>
           </a:xfrm>
           <a:prstGeom prst="rect">
             <a:avLst/>
@@ -3888,14 +4583,14 @@
       </p:pic>
       <p:sp>
         <p:nvSpPr>
-          <p:cNvPr id="8" name="Text 3"/>
-          <p:cNvSpPr/>
-          <p:nvPr/>
-        </p:nvSpPr>
-        <p:spPr>
-          <a:xfrm>
-            <a:off x="2166461" y="4200168"/>
-            <a:ext cx="4053007" cy="356235"/>
+          <p:cNvPr id="3" name="Text 0"/>
+          <p:cNvSpPr/>
+          <p:nvPr/>
+        </p:nvSpPr>
+        <p:spPr>
+          <a:xfrm>
+            <a:off x="758309" y="1646039"/>
+            <a:ext cx="5701546" cy="712708"/>
           </a:xfrm>
           <a:prstGeom prst="rect">
             <a:avLst/>
@@ -3907,72 +4602,30 @@
           <a:bodyPr wrap="none" lIns="0" tIns="0" rIns="0" bIns="0" rtlCol="0" anchor="t"/>
           <a:lstStyle/>
           <a:p>
-            <a:pPr algn="l" indent="0" marL="0">
+            <a:pPr marL="0" indent="0" algn="l">
               <a:lnSpc>
-                <a:spcPts val="2800"/>
+                <a:spcPts val="5600"/>
               </a:lnSpc>
               <a:buNone/>
             </a:pPr>
             <a:r>
-              <a:rPr lang="en-US" sz="2200" b="1" dirty="0">
-                <a:solidFill>
-                  <a:srgbClr val="EEEFF5"/>
+              <a:rPr lang="en-US" sz="4450" b="1" dirty="0">
+                <a:solidFill>
+                  <a:srgbClr val="9998FF"/>
                 </a:solidFill>
                 <a:latin typeface="Barlow Bold" pitchFamily="34" charset="0"/>
                 <a:ea typeface="Barlow Bold" pitchFamily="34" charset="-122"/>
                 <a:cs typeface="Barlow Bold" pitchFamily="34" charset="-120"/>
               </a:rPr>
-              <a:t>Sub-problem B: Weather Impact</a:t>
-            </a:r>
-            <a:endParaRPr lang="en-US" sz="2200" dirty="0"/>
-          </a:p>
-        </p:txBody>
-      </p:sp>
-      <p:sp>
-        <p:nvSpPr>
-          <p:cNvPr id="9" name="Text 4"/>
-          <p:cNvSpPr/>
-          <p:nvPr/>
-        </p:nvSpPr>
-        <p:spPr>
-          <a:xfrm>
-            <a:off x="2166461" y="4686300"/>
-            <a:ext cx="6219230" cy="346710"/>
-          </a:xfrm>
-          <a:prstGeom prst="rect">
-            <a:avLst/>
-          </a:prstGeom>
-          <a:noFill/>
-          <a:ln/>
-        </p:spPr>
-        <p:txBody>
-          <a:bodyPr wrap="none" lIns="0" tIns="0" rIns="0" bIns="0" rtlCol="0" anchor="t"/>
-          <a:lstStyle/>
-          <a:p>
-            <a:pPr algn="l" indent="0" marL="0">
-              <a:lnSpc>
-                <a:spcPts val="2700"/>
-              </a:lnSpc>
-              <a:buNone/>
-            </a:pPr>
-            <a:r>
-              <a:rPr lang="en-US" sz="1700" dirty="0">
-                <a:solidFill>
-                  <a:srgbClr val="EEEFF5"/>
-                </a:solidFill>
-                <a:latin typeface="Montserrat" pitchFamily="34" charset="0"/>
-                <a:ea typeface="Montserrat" pitchFamily="34" charset="-122"/>
-                <a:cs typeface="Montserrat" pitchFamily="34" charset="-120"/>
-              </a:rPr>
-              <a:t>Learn how weather modifies baseline traffic</a:t>
-            </a:r>
-            <a:endParaRPr lang="en-US" sz="1700" dirty="0"/>
+              <a:t>Problem Statement</a:t>
+            </a:r>
+            <a:endParaRPr lang="en-US" sz="4450" dirty="0"/>
           </a:p>
         </p:txBody>
       </p:sp>
       <p:pic>
         <p:nvPicPr>
-          <p:cNvPr id="10" name="Image 3" descr="preencoded.png">    </p:cNvPr>
+          <p:cNvPr id="4" name="Image 1" descr="preencoded.png"/>
           <p:cNvPicPr>
             <a:picLocks noChangeAspect="1"/>
           </p:cNvPicPr>
@@ -3986,7 +4639,7 @@
         </p:blipFill>
         <p:spPr>
           <a:xfrm>
-            <a:off x="758309" y="5283518"/>
+            <a:off x="758309" y="2683669"/>
             <a:ext cx="1083231" cy="1299924"/>
           </a:xfrm>
           <a:prstGeom prst="rect">
@@ -3996,14 +4649,14 @@
       </p:pic>
       <p:sp>
         <p:nvSpPr>
-          <p:cNvPr id="11" name="Text 5"/>
-          <p:cNvSpPr/>
-          <p:nvPr/>
-        </p:nvSpPr>
-        <p:spPr>
-          <a:xfrm>
-            <a:off x="2166461" y="5500092"/>
-            <a:ext cx="2850713" cy="356235"/>
+          <p:cNvPr id="5" name="Text 1"/>
+          <p:cNvSpPr/>
+          <p:nvPr/>
+        </p:nvSpPr>
+        <p:spPr>
+          <a:xfrm>
+            <a:off x="2166461" y="2900243"/>
+            <a:ext cx="4510683" cy="356235"/>
           </a:xfrm>
           <a:prstGeom prst="rect">
             <a:avLst/>
@@ -4015,7 +4668,7 @@
           <a:bodyPr wrap="none" lIns="0" tIns="0" rIns="0" bIns="0" rtlCol="0" anchor="t"/>
           <a:lstStyle/>
           <a:p>
-            <a:pPr algn="l" indent="0" marL="0">
+            <a:pPr marL="0" indent="0" algn="l">
               <a:lnSpc>
                 <a:spcPts val="2800"/>
               </a:lnSpc>
@@ -4030,6 +4683,222 @@
                 <a:ea typeface="Barlow Bold" pitchFamily="34" charset="-122"/>
                 <a:cs typeface="Barlow Bold" pitchFamily="34" charset="-120"/>
               </a:rPr>
+              <a:t>Sub-problem A: Baseline Prediction</a:t>
+            </a:r>
+            <a:endParaRPr lang="en-US" sz="2200" dirty="0"/>
+          </a:p>
+        </p:txBody>
+      </p:sp>
+      <p:sp>
+        <p:nvSpPr>
+          <p:cNvPr id="6" name="Text 2"/>
+          <p:cNvSpPr/>
+          <p:nvPr/>
+        </p:nvSpPr>
+        <p:spPr>
+          <a:xfrm>
+            <a:off x="2166461" y="3386376"/>
+            <a:ext cx="6219230" cy="346710"/>
+          </a:xfrm>
+          <a:prstGeom prst="rect">
+            <a:avLst/>
+          </a:prstGeom>
+          <a:noFill/>
+          <a:ln/>
+        </p:spPr>
+        <p:txBody>
+          <a:bodyPr wrap="none" lIns="0" tIns="0" rIns="0" bIns="0" rtlCol="0" anchor="t"/>
+          <a:lstStyle/>
+          <a:p>
+            <a:pPr marL="0" indent="0" algn="l">
+              <a:lnSpc>
+                <a:spcPts val="2700"/>
+              </a:lnSpc>
+              <a:buNone/>
+            </a:pPr>
+            <a:r>
+              <a:rPr lang="en-US" sz="1700" dirty="0">
+                <a:solidFill>
+                  <a:srgbClr val="EEEFF5"/>
+                </a:solidFill>
+                <a:latin typeface="Montserrat" pitchFamily="34" charset="0"/>
+                <a:ea typeface="Montserrat" pitchFamily="34" charset="-122"/>
+                <a:cs typeface="Montserrat" pitchFamily="34" charset="-120"/>
+              </a:rPr>
+              <a:t>Learn traffic trends using temporal features</a:t>
+            </a:r>
+            <a:endParaRPr lang="en-US" sz="1700" dirty="0"/>
+          </a:p>
+        </p:txBody>
+      </p:sp>
+      <p:pic>
+        <p:nvPicPr>
+          <p:cNvPr id="7" name="Image 2" descr="preencoded.png"/>
+          <p:cNvPicPr>
+            <a:picLocks noChangeAspect="1"/>
+          </p:cNvPicPr>
+          <p:nvPr/>
+        </p:nvPicPr>
+        <p:blipFill>
+          <a:blip r:embed="rId5"/>
+          <a:stretch>
+            <a:fillRect/>
+          </a:stretch>
+        </p:blipFill>
+        <p:spPr>
+          <a:xfrm>
+            <a:off x="758309" y="3983593"/>
+            <a:ext cx="1083231" cy="1299924"/>
+          </a:xfrm>
+          <a:prstGeom prst="rect">
+            <a:avLst/>
+          </a:prstGeom>
+        </p:spPr>
+      </p:pic>
+      <p:sp>
+        <p:nvSpPr>
+          <p:cNvPr id="8" name="Text 3"/>
+          <p:cNvSpPr/>
+          <p:nvPr/>
+        </p:nvSpPr>
+        <p:spPr>
+          <a:xfrm>
+            <a:off x="2166461" y="4200168"/>
+            <a:ext cx="4053007" cy="356235"/>
+          </a:xfrm>
+          <a:prstGeom prst="rect">
+            <a:avLst/>
+          </a:prstGeom>
+          <a:noFill/>
+          <a:ln/>
+        </p:spPr>
+        <p:txBody>
+          <a:bodyPr wrap="none" lIns="0" tIns="0" rIns="0" bIns="0" rtlCol="0" anchor="t"/>
+          <a:lstStyle/>
+          <a:p>
+            <a:pPr marL="0" indent="0" algn="l">
+              <a:lnSpc>
+                <a:spcPts val="2800"/>
+              </a:lnSpc>
+              <a:buNone/>
+            </a:pPr>
+            <a:r>
+              <a:rPr lang="en-US" sz="2200" b="1" dirty="0">
+                <a:solidFill>
+                  <a:srgbClr val="EEEFF5"/>
+                </a:solidFill>
+                <a:latin typeface="Barlow Bold" pitchFamily="34" charset="0"/>
+                <a:ea typeface="Barlow Bold" pitchFamily="34" charset="-122"/>
+                <a:cs typeface="Barlow Bold" pitchFamily="34" charset="-120"/>
+              </a:rPr>
+              <a:t>Sub-problem B: Weather Impact</a:t>
+            </a:r>
+            <a:endParaRPr lang="en-US" sz="2200" dirty="0"/>
+          </a:p>
+        </p:txBody>
+      </p:sp>
+      <p:sp>
+        <p:nvSpPr>
+          <p:cNvPr id="9" name="Text 4"/>
+          <p:cNvSpPr/>
+          <p:nvPr/>
+        </p:nvSpPr>
+        <p:spPr>
+          <a:xfrm>
+            <a:off x="2166461" y="4686300"/>
+            <a:ext cx="6219230" cy="346710"/>
+          </a:xfrm>
+          <a:prstGeom prst="rect">
+            <a:avLst/>
+          </a:prstGeom>
+          <a:noFill/>
+          <a:ln/>
+        </p:spPr>
+        <p:txBody>
+          <a:bodyPr wrap="none" lIns="0" tIns="0" rIns="0" bIns="0" rtlCol="0" anchor="t"/>
+          <a:lstStyle/>
+          <a:p>
+            <a:pPr marL="0" indent="0" algn="l">
+              <a:lnSpc>
+                <a:spcPts val="2700"/>
+              </a:lnSpc>
+              <a:buNone/>
+            </a:pPr>
+            <a:r>
+              <a:rPr lang="en-US" sz="1700" dirty="0">
+                <a:solidFill>
+                  <a:srgbClr val="EEEFF5"/>
+                </a:solidFill>
+                <a:latin typeface="Montserrat" pitchFamily="34" charset="0"/>
+                <a:ea typeface="Montserrat" pitchFamily="34" charset="-122"/>
+                <a:cs typeface="Montserrat" pitchFamily="34" charset="-120"/>
+              </a:rPr>
+              <a:t>Learn how weather modifies baseline traffic</a:t>
+            </a:r>
+            <a:endParaRPr lang="en-US" sz="1700" dirty="0"/>
+          </a:p>
+        </p:txBody>
+      </p:sp>
+      <p:pic>
+        <p:nvPicPr>
+          <p:cNvPr id="10" name="Image 3" descr="preencoded.png"/>
+          <p:cNvPicPr>
+            <a:picLocks noChangeAspect="1"/>
+          </p:cNvPicPr>
+          <p:nvPr/>
+        </p:nvPicPr>
+        <p:blipFill>
+          <a:blip r:embed="rId6"/>
+          <a:stretch>
+            <a:fillRect/>
+          </a:stretch>
+        </p:blipFill>
+        <p:spPr>
+          <a:xfrm>
+            <a:off x="758309" y="5283518"/>
+            <a:ext cx="1083231" cy="1299924"/>
+          </a:xfrm>
+          <a:prstGeom prst="rect">
+            <a:avLst/>
+          </a:prstGeom>
+        </p:spPr>
+      </p:pic>
+      <p:sp>
+        <p:nvSpPr>
+          <p:cNvPr id="11" name="Text 5"/>
+          <p:cNvSpPr/>
+          <p:nvPr/>
+        </p:nvSpPr>
+        <p:spPr>
+          <a:xfrm>
+            <a:off x="2166461" y="5500092"/>
+            <a:ext cx="2850713" cy="356235"/>
+          </a:xfrm>
+          <a:prstGeom prst="rect">
+            <a:avLst/>
+          </a:prstGeom>
+          <a:noFill/>
+          <a:ln/>
+        </p:spPr>
+        <p:txBody>
+          <a:bodyPr wrap="none" lIns="0" tIns="0" rIns="0" bIns="0" rtlCol="0" anchor="t"/>
+          <a:lstStyle/>
+          <a:p>
+            <a:pPr marL="0" indent="0" algn="l">
+              <a:lnSpc>
+                <a:spcPts val="2800"/>
+              </a:lnSpc>
+              <a:buNone/>
+            </a:pPr>
+            <a:r>
+              <a:rPr lang="en-US" sz="2200" b="1" dirty="0">
+                <a:solidFill>
+                  <a:srgbClr val="EEEFF5"/>
+                </a:solidFill>
+                <a:latin typeface="Barlow Bold" pitchFamily="34" charset="0"/>
+                <a:ea typeface="Barlow Bold" pitchFamily="34" charset="-122"/>
+                <a:cs typeface="Barlow Bold" pitchFamily="34" charset="-120"/>
+              </a:rPr>
               <a:t>Combined Solution</a:t>
             </a:r>
             <a:endParaRPr lang="en-US" sz="2200" dirty="0"/>
@@ -4057,7 +4926,7 @@
           <a:bodyPr wrap="none" lIns="0" tIns="0" rIns="0" bIns="0" rtlCol="0" anchor="t"/>
           <a:lstStyle/>
           <a:p>
-            <a:pPr algn="l" indent="0" marL="0">
+            <a:pPr marL="0" indent="0" algn="l">
               <a:lnSpc>
                 <a:spcPts val="2700"/>
               </a:lnSpc>
@@ -4124,7 +4993,7 @@
           <a:bodyPr wrap="none" lIns="0" tIns="0" rIns="0" bIns="0" rtlCol="0" anchor="t"/>
           <a:lstStyle/>
           <a:p>
-            <a:pPr algn="l" indent="0" marL="0">
+            <a:pPr marL="0" indent="0" algn="l">
               <a:lnSpc>
                 <a:spcPts val="5600"/>
               </a:lnSpc>
@@ -4166,7 +5035,7 @@
           <a:bodyPr wrap="none" lIns="0" tIns="0" rIns="0" bIns="0" rtlCol="0" anchor="t"/>
           <a:lstStyle/>
           <a:p>
-            <a:pPr algn="l" indent="0" marL="0">
+            <a:pPr marL="0" indent="0" algn="l">
               <a:lnSpc>
                 <a:spcPts val="2800"/>
               </a:lnSpc>
@@ -4208,7 +5077,7 @@
           <a:bodyPr wrap="none" lIns="0" tIns="0" rIns="0" bIns="0" rtlCol="0" anchor="t"/>
           <a:lstStyle/>
           <a:p>
-            <a:pPr algn="l" marL="342900" indent="-342900">
+            <a:pPr marL="342900" indent="-342900" algn="l">
               <a:lnSpc>
                 <a:spcPts val="2700"/>
               </a:lnSpc>
@@ -4251,7 +5120,7 @@
           <a:bodyPr wrap="none" lIns="0" tIns="0" rIns="0" bIns="0" rtlCol="0" anchor="t"/>
           <a:lstStyle/>
           <a:p>
-            <a:pPr algn="l" marL="342900" indent="-342900">
+            <a:pPr marL="342900" indent="-342900" algn="l">
               <a:lnSpc>
                 <a:spcPts val="2700"/>
               </a:lnSpc>
@@ -4294,7 +5163,7 @@
           <a:bodyPr wrap="none" lIns="0" tIns="0" rIns="0" bIns="0" rtlCol="0" anchor="t"/>
           <a:lstStyle/>
           <a:p>
-            <a:pPr algn="l" marL="342900" indent="-342900">
+            <a:pPr marL="342900" indent="-342900" algn="l">
               <a:lnSpc>
                 <a:spcPts val="2700"/>
               </a:lnSpc>
@@ -4312,7 +5181,6 @@
               </a:rPr>
               <a:t>Quality stations filtered</a:t>
             </a:r>
-            <a:endParaRPr lang="en-US" sz="1700" dirty="0"/>
           </a:p>
         </p:txBody>
       </p:sp>
@@ -4337,7 +5205,7 @@
           <a:bodyPr wrap="none" lIns="0" tIns="0" rIns="0" bIns="0" rtlCol="0" anchor="t"/>
           <a:lstStyle/>
           <a:p>
-            <a:pPr algn="l" indent="0" marL="0">
+            <a:pPr marL="0" indent="0" algn="l">
               <a:lnSpc>
                 <a:spcPts val="2800"/>
               </a:lnSpc>
@@ -4379,7 +5247,7 @@
           <a:bodyPr wrap="none" lIns="0" tIns="0" rIns="0" bIns="0" rtlCol="0" anchor="t"/>
           <a:lstStyle/>
           <a:p>
-            <a:pPr algn="l" marL="342900" indent="-342900">
+            <a:pPr marL="342900" indent="-342900" algn="l">
               <a:lnSpc>
                 <a:spcPts val="2700"/>
               </a:lnSpc>
@@ -4422,7 +5290,7 @@
           <a:bodyPr wrap="none" lIns="0" tIns="0" rIns="0" bIns="0" rtlCol="0" anchor="t"/>
           <a:lstStyle/>
           <a:p>
-            <a:pPr algn="l" marL="342900" indent="-342900">
+            <a:pPr marL="342900" indent="-342900" algn="l">
               <a:lnSpc>
                 <a:spcPts val="2700"/>
               </a:lnSpc>
@@ -4438,7 +5306,7 @@
                 <a:ea typeface="Montserrat" pitchFamily="34" charset="-122"/>
                 <a:cs typeface="Montserrat" pitchFamily="34" charset="-120"/>
               </a:rPr>
-              <a:t>Geospatial matching</a:t>
+              <a:t>Geospatial matching </a:t>
             </a:r>
             <a:endParaRPr lang="en-US" sz="1700" dirty="0"/>
           </a:p>
@@ -4465,7 +5333,7 @@
           <a:bodyPr wrap="none" lIns="0" tIns="0" rIns="0" bIns="0" rtlCol="0" anchor="t"/>
           <a:lstStyle/>
           <a:p>
-            <a:pPr algn="l" marL="342900" indent="-342900">
+            <a:pPr marL="342900" indent="-342900" algn="l">
               <a:lnSpc>
                 <a:spcPts val="2700"/>
               </a:lnSpc>
@@ -4481,9 +5349,463 @@
                 <a:ea typeface="Montserrat" pitchFamily="34" charset="-122"/>
                 <a:cs typeface="Montserrat" pitchFamily="34" charset="-120"/>
               </a:rPr>
-              <a:t>Missing data interpolated</a:t>
-            </a:r>
-            <a:endParaRPr lang="en-US" sz="1700" dirty="0"/>
+              <a:t>Missing data interpolated </a:t>
+            </a:r>
+            <a:r>
+              <a:rPr lang="en-US" sz="1700" dirty="0">
+                <a:solidFill>
+                  <a:srgbClr val="FF0000"/>
+                </a:solidFill>
+                <a:latin typeface="Montserrat" pitchFamily="34" charset="0"/>
+                <a:ea typeface="Montserrat" pitchFamily="34" charset="-122"/>
+                <a:cs typeface="Montserrat" pitchFamily="34" charset="-120"/>
+              </a:rPr>
+              <a:t>(there was no missing data)</a:t>
+            </a:r>
+            <a:endParaRPr lang="en-US" sz="1700" dirty="0">
+              <a:solidFill>
+                <a:srgbClr val="FF0000"/>
+              </a:solidFill>
+            </a:endParaRPr>
+          </a:p>
+        </p:txBody>
+      </p:sp>
+      <p:sp>
+        <p:nvSpPr>
+          <p:cNvPr id="12" name="TextBox 11">
+            <a:extLst>
+              <a:ext uri="{FF2B5EF4-FFF2-40B4-BE49-F238E27FC236}">
+                <a16:creationId xmlns:a16="http://schemas.microsoft.com/office/drawing/2014/main" id="{FD261BE1-2495-4322-EEF4-25553CEE09C7}"/>
+              </a:ext>
+            </a:extLst>
+          </p:cNvPr>
+          <p:cNvSpPr txBox="1"/>
+          <p:nvPr/>
+        </p:nvSpPr>
+        <p:spPr>
+          <a:xfrm>
+            <a:off x="758309" y="5714881"/>
+            <a:ext cx="4368862" cy="369332"/>
+          </a:xfrm>
+          <a:prstGeom prst="rect">
+            <a:avLst/>
+          </a:prstGeom>
+          <a:noFill/>
+        </p:spPr>
+        <p:txBody>
+          <a:bodyPr wrap="square">
+            <a:spAutoFit/>
+          </a:bodyPr>
+          <a:lstStyle/>
+          <a:p>
+            <a:r>
+              <a:rPr lang="en-AU" dirty="0">
+                <a:solidFill>
+                  <a:srgbClr val="FF0000"/>
+                </a:solidFill>
+              </a:rPr>
+              <a:t>- Remove unnecessary columns</a:t>
+            </a:r>
+          </a:p>
+        </p:txBody>
+      </p:sp>
+      <p:sp>
+        <p:nvSpPr>
+          <p:cNvPr id="13" name="TextBox 12">
+            <a:extLst>
+              <a:ext uri="{FF2B5EF4-FFF2-40B4-BE49-F238E27FC236}">
+                <a16:creationId xmlns:a16="http://schemas.microsoft.com/office/drawing/2014/main" id="{DC83ABEA-AB09-8A66-9481-45ADEE4ABD59}"/>
+              </a:ext>
+            </a:extLst>
+          </p:cNvPr>
+          <p:cNvSpPr txBox="1"/>
+          <p:nvPr/>
+        </p:nvSpPr>
+        <p:spPr>
+          <a:xfrm>
+            <a:off x="7587139" y="5682615"/>
+            <a:ext cx="4368862" cy="369332"/>
+          </a:xfrm>
+          <a:prstGeom prst="rect">
+            <a:avLst/>
+          </a:prstGeom>
+          <a:noFill/>
+        </p:spPr>
+        <p:txBody>
+          <a:bodyPr wrap="square">
+            <a:spAutoFit/>
+          </a:bodyPr>
+          <a:lstStyle/>
+          <a:p>
+            <a:r>
+              <a:rPr lang="en-AU" dirty="0">
+                <a:solidFill>
+                  <a:srgbClr val="FF0000"/>
+                </a:solidFill>
+              </a:rPr>
+              <a:t>- Gather weather data from API</a:t>
+            </a:r>
+          </a:p>
+        </p:txBody>
+      </p:sp>
+      <p:sp>
+        <p:nvSpPr>
+          <p:cNvPr id="14" name="TextBox 13">
+            <a:extLst>
+              <a:ext uri="{FF2B5EF4-FFF2-40B4-BE49-F238E27FC236}">
+                <a16:creationId xmlns:a16="http://schemas.microsoft.com/office/drawing/2014/main" id="{F172633D-0A08-132C-C282-AD812028F601}"/>
+              </a:ext>
+            </a:extLst>
+          </p:cNvPr>
+          <p:cNvSpPr txBox="1"/>
+          <p:nvPr/>
+        </p:nvSpPr>
+        <p:spPr>
+          <a:xfrm>
+            <a:off x="7587139" y="6051947"/>
+            <a:ext cx="6284952" cy="369332"/>
+          </a:xfrm>
+          <a:prstGeom prst="rect">
+            <a:avLst/>
+          </a:prstGeom>
+          <a:noFill/>
+        </p:spPr>
+        <p:txBody>
+          <a:bodyPr wrap="square">
+            <a:spAutoFit/>
+          </a:bodyPr>
+          <a:lstStyle/>
+          <a:p>
+            <a:r>
+              <a:rPr lang="en-AU" dirty="0">
+                <a:solidFill>
+                  <a:srgbClr val="FF0000"/>
+                </a:solidFill>
+              </a:rPr>
+              <a:t>- Organise weather record indexes to match traffic record indexes</a:t>
+            </a:r>
+          </a:p>
+        </p:txBody>
+      </p:sp>
+      <p:sp>
+        <p:nvSpPr>
+          <p:cNvPr id="15" name="TextBox 14">
+            <a:extLst>
+              <a:ext uri="{FF2B5EF4-FFF2-40B4-BE49-F238E27FC236}">
+                <a16:creationId xmlns:a16="http://schemas.microsoft.com/office/drawing/2014/main" id="{CFAC4DEB-22C5-CB87-8EF9-6DA87E152511}"/>
+              </a:ext>
+            </a:extLst>
+          </p:cNvPr>
+          <p:cNvSpPr txBox="1"/>
+          <p:nvPr/>
+        </p:nvSpPr>
+        <p:spPr>
+          <a:xfrm>
+            <a:off x="758309" y="6098113"/>
+            <a:ext cx="4368862" cy="646331"/>
+          </a:xfrm>
+          <a:prstGeom prst="rect">
+            <a:avLst/>
+          </a:prstGeom>
+          <a:noFill/>
+        </p:spPr>
+        <p:txBody>
+          <a:bodyPr wrap="square">
+            <a:spAutoFit/>
+          </a:bodyPr>
+          <a:lstStyle/>
+          <a:p>
+            <a:r>
+              <a:rPr lang="en-AU" dirty="0">
+                <a:solidFill>
+                  <a:srgbClr val="FF0000"/>
+                </a:solidFill>
+              </a:rPr>
+              <a:t>- Final cleaned dataset has </a:t>
+            </a:r>
+            <a:r>
+              <a:rPr lang="en-AU" b="0" i="0" dirty="0">
+                <a:solidFill>
+                  <a:srgbClr val="FF0000"/>
+                </a:solidFill>
+                <a:effectLst/>
+                <a:latin typeface="Google Sans"/>
+              </a:rPr>
+              <a:t>≈ 3.5 million rows, and 35 columns</a:t>
+            </a:r>
+            <a:endParaRPr lang="en-AU" dirty="0">
+              <a:solidFill>
+                <a:srgbClr val="FF0000"/>
+              </a:solidFill>
+            </a:endParaRPr>
+          </a:p>
+        </p:txBody>
+      </p:sp>
+      <p:sp>
+        <p:nvSpPr>
+          <p:cNvPr id="16" name="TextBox 15">
+            <a:extLst>
+              <a:ext uri="{FF2B5EF4-FFF2-40B4-BE49-F238E27FC236}">
+                <a16:creationId xmlns:a16="http://schemas.microsoft.com/office/drawing/2014/main" id="{02CFE5E5-1196-50B4-3B69-CC25DC186765}"/>
+              </a:ext>
+            </a:extLst>
+          </p:cNvPr>
+          <p:cNvSpPr txBox="1"/>
+          <p:nvPr/>
+        </p:nvSpPr>
+        <p:spPr>
+          <a:xfrm>
+            <a:off x="758309" y="6837717"/>
+            <a:ext cx="5701546" cy="646331"/>
+          </a:xfrm>
+          <a:prstGeom prst="rect">
+            <a:avLst/>
+          </a:prstGeom>
+          <a:noFill/>
+        </p:spPr>
+        <p:txBody>
+          <a:bodyPr wrap="square">
+            <a:spAutoFit/>
+          </a:bodyPr>
+          <a:lstStyle/>
+          <a:p>
+            <a:r>
+              <a:rPr lang="en-AU" dirty="0">
+                <a:solidFill>
+                  <a:srgbClr val="FF0000"/>
+                </a:solidFill>
+              </a:rPr>
+              <a:t>- Some important columns include: date, </a:t>
+            </a:r>
+            <a:r>
+              <a:rPr lang="en-AU" dirty="0" err="1">
+                <a:solidFill>
+                  <a:srgbClr val="FF0000"/>
+                </a:solidFill>
+              </a:rPr>
+              <a:t>public_holiday</a:t>
+            </a:r>
+            <a:r>
+              <a:rPr lang="en-AU" dirty="0">
+                <a:solidFill>
+                  <a:srgbClr val="FF0000"/>
+                </a:solidFill>
+              </a:rPr>
+              <a:t>, </a:t>
+            </a:r>
+            <a:r>
+              <a:rPr lang="en-AU" dirty="0" err="1">
+                <a:solidFill>
+                  <a:srgbClr val="FF0000"/>
+                </a:solidFill>
+              </a:rPr>
+              <a:t>school_holiday</a:t>
+            </a:r>
+            <a:r>
+              <a:rPr lang="en-AU" dirty="0">
+                <a:solidFill>
+                  <a:srgbClr val="FF0000"/>
+                </a:solidFill>
+              </a:rPr>
+              <a:t>, </a:t>
+            </a:r>
+            <a:r>
+              <a:rPr lang="en-AU" dirty="0" err="1">
+                <a:solidFill>
+                  <a:srgbClr val="FF0000"/>
+                </a:solidFill>
+              </a:rPr>
+              <a:t>daily_total</a:t>
+            </a:r>
+            <a:r>
+              <a:rPr lang="en-AU" dirty="0">
+                <a:solidFill>
+                  <a:srgbClr val="FF0000"/>
+                </a:solidFill>
+              </a:rPr>
+              <a:t>, and hourly traffic counts</a:t>
+            </a:r>
+          </a:p>
+        </p:txBody>
+      </p:sp>
+      <p:sp>
+        <p:nvSpPr>
+          <p:cNvPr id="17" name="TextBox 16">
+            <a:extLst>
+              <a:ext uri="{FF2B5EF4-FFF2-40B4-BE49-F238E27FC236}">
+                <a16:creationId xmlns:a16="http://schemas.microsoft.com/office/drawing/2014/main" id="{D6804C19-1675-4FE0-2BF9-596CF06ADA09}"/>
+              </a:ext>
+            </a:extLst>
+          </p:cNvPr>
+          <p:cNvSpPr txBox="1"/>
+          <p:nvPr/>
+        </p:nvSpPr>
+        <p:spPr>
+          <a:xfrm>
+            <a:off x="758249" y="7470433"/>
+            <a:ext cx="5701546" cy="646331"/>
+          </a:xfrm>
+          <a:prstGeom prst="rect">
+            <a:avLst/>
+          </a:prstGeom>
+          <a:noFill/>
+        </p:spPr>
+        <p:txBody>
+          <a:bodyPr wrap="square">
+            <a:spAutoFit/>
+          </a:bodyPr>
+          <a:lstStyle/>
+          <a:p>
+            <a:r>
+              <a:rPr lang="en-AU" dirty="0">
+                <a:solidFill>
+                  <a:srgbClr val="FF0000"/>
+                </a:solidFill>
+              </a:rPr>
+              <a:t>- Records from 532 different traffic recording stations around NSW are used </a:t>
+            </a:r>
+          </a:p>
+        </p:txBody>
+      </p:sp>
+      <p:sp>
+        <p:nvSpPr>
+          <p:cNvPr id="18" name="TextBox 17">
+            <a:extLst>
+              <a:ext uri="{FF2B5EF4-FFF2-40B4-BE49-F238E27FC236}">
+                <a16:creationId xmlns:a16="http://schemas.microsoft.com/office/drawing/2014/main" id="{31CA2AFE-50F2-BE53-88A6-00F09EB5B7F4}"/>
+              </a:ext>
+            </a:extLst>
+          </p:cNvPr>
+          <p:cNvSpPr txBox="1"/>
+          <p:nvPr/>
+        </p:nvSpPr>
+        <p:spPr>
+          <a:xfrm>
+            <a:off x="7587139" y="6468385"/>
+            <a:ext cx="6284952" cy="369332"/>
+          </a:xfrm>
+          <a:prstGeom prst="rect">
+            <a:avLst/>
+          </a:prstGeom>
+          <a:noFill/>
+        </p:spPr>
+        <p:txBody>
+          <a:bodyPr wrap="square">
+            <a:spAutoFit/>
+          </a:bodyPr>
+          <a:lstStyle/>
+          <a:p>
+            <a:r>
+              <a:rPr lang="en-AU" dirty="0">
+                <a:solidFill>
+                  <a:srgbClr val="FF0000"/>
+                </a:solidFill>
+              </a:rPr>
+              <a:t>- max, min, and daily rainfall was retrieved</a:t>
+            </a:r>
+          </a:p>
+        </p:txBody>
+      </p:sp>
+      <p:sp>
+        <p:nvSpPr>
+          <p:cNvPr id="19" name="TextBox 18">
+            <a:extLst>
+              <a:ext uri="{FF2B5EF4-FFF2-40B4-BE49-F238E27FC236}">
+                <a16:creationId xmlns:a16="http://schemas.microsoft.com/office/drawing/2014/main" id="{867FF887-E837-8252-A70D-AA029A5420A4}"/>
+              </a:ext>
+            </a:extLst>
+          </p:cNvPr>
+          <p:cNvSpPr txBox="1"/>
+          <p:nvPr/>
+        </p:nvSpPr>
+        <p:spPr>
+          <a:xfrm>
+            <a:off x="1161081" y="745552"/>
+            <a:ext cx="4368862" cy="1477328"/>
+          </a:xfrm>
+          <a:prstGeom prst="rect">
+            <a:avLst/>
+          </a:prstGeom>
+          <a:noFill/>
+        </p:spPr>
+        <p:txBody>
+          <a:bodyPr wrap="square">
+            <a:spAutoFit/>
+          </a:bodyPr>
+          <a:lstStyle/>
+          <a:p>
+            <a:r>
+              <a:rPr lang="en-AU" dirty="0" err="1">
+                <a:solidFill>
+                  <a:srgbClr val="FF0000"/>
+                </a:solidFill>
+              </a:rPr>
+              <a:t>Daily_total</a:t>
+            </a:r>
+            <a:r>
+              <a:rPr lang="en-AU" dirty="0">
+                <a:solidFill>
+                  <a:srgbClr val="FF0000"/>
+                </a:solidFill>
+              </a:rPr>
+              <a:t> feature statistics:</a:t>
+            </a:r>
+          </a:p>
+          <a:p>
+            <a:pPr marL="285750" indent="-285750">
+              <a:buFontTx/>
+              <a:buChar char="-"/>
+            </a:pPr>
+            <a:r>
+              <a:rPr lang="en-AU" dirty="0">
+                <a:solidFill>
+                  <a:srgbClr val="FF0000"/>
+                </a:solidFill>
+              </a:rPr>
+              <a:t>mean: 11523.46</a:t>
+            </a:r>
+          </a:p>
+          <a:p>
+            <a:pPr marL="285750" indent="-285750">
+              <a:buFontTx/>
+              <a:buChar char="-"/>
+            </a:pPr>
+            <a:r>
+              <a:rPr lang="en-AU" dirty="0">
+                <a:solidFill>
+                  <a:srgbClr val="FF0000"/>
+                </a:solidFill>
+              </a:rPr>
+              <a:t>Sd: 12780.47</a:t>
+            </a:r>
+          </a:p>
+          <a:p>
+            <a:pPr marL="285750" indent="-285750">
+              <a:buFontTx/>
+              <a:buChar char="-"/>
+            </a:pPr>
+            <a:r>
+              <a:rPr lang="en-AU" dirty="0">
+                <a:solidFill>
+                  <a:srgbClr val="FF0000"/>
+                </a:solidFill>
+              </a:rPr>
+              <a:t>Min: 0</a:t>
+            </a:r>
+          </a:p>
+          <a:p>
+            <a:pPr marL="285750" indent="-285750">
+              <a:buFontTx/>
+              <a:buChar char="-"/>
+            </a:pPr>
+            <a:r>
+              <a:rPr lang="en-AU" dirty="0">
+                <a:solidFill>
+                  <a:srgbClr val="FF0000"/>
+                </a:solidFill>
+              </a:rPr>
+              <a:t>Max: 146723</a:t>
+            </a:r>
           </a:p>
         </p:txBody>
       </p:sp>
@@ -4496,6 +5818,953 @@
 </file>
 
 <file path=ppt/slides/slide5.xml><?xml version="1.0" encoding="utf-8"?>
+<p:sld xmlns:a="http://schemas.openxmlformats.org/drawingml/2006/main" xmlns:r="http://schemas.openxmlformats.org/officeDocument/2006/relationships" xmlns:p="http://schemas.openxmlformats.org/presentationml/2006/main">
+  <p:cSld>
+    <p:spTree>
+      <p:nvGrpSpPr>
+        <p:cNvPr id="1" name=""/>
+        <p:cNvGrpSpPr/>
+        <p:nvPr/>
+      </p:nvGrpSpPr>
+      <p:grpSpPr>
+        <a:xfrm>
+          <a:off x="0" y="0"/>
+          <a:ext cx="0" cy="0"/>
+          <a:chOff x="0" y="0"/>
+          <a:chExt cx="0" cy="0"/>
+        </a:xfrm>
+      </p:grpSpPr>
+      <p:pic>
+        <p:nvPicPr>
+          <p:cNvPr id="3" name="Picture 2" descr="A graph with numbers and a number of people&#10;&#10;AI-generated content may be incorrect.">
+            <a:extLst>
+              <a:ext uri="{FF2B5EF4-FFF2-40B4-BE49-F238E27FC236}">
+                <a16:creationId xmlns:a16="http://schemas.microsoft.com/office/drawing/2014/main" id="{687F6AD2-C271-D8D2-F376-F1449183B5E7}"/>
+              </a:ext>
+            </a:extLst>
+          </p:cNvPr>
+          <p:cNvPicPr>
+            <a:picLocks noChangeAspect="1"/>
+          </p:cNvPicPr>
+          <p:nvPr/>
+        </p:nvPicPr>
+        <p:blipFill>
+          <a:blip r:embed="rId2"/>
+          <a:stretch>
+            <a:fillRect/>
+          </a:stretch>
+        </p:blipFill>
+        <p:spPr>
+          <a:xfrm>
+            <a:off x="726940" y="583470"/>
+            <a:ext cx="7774802" cy="5288216"/>
+          </a:xfrm>
+          <a:prstGeom prst="rect">
+            <a:avLst/>
+          </a:prstGeom>
+        </p:spPr>
+      </p:pic>
+      <p:sp>
+        <p:nvSpPr>
+          <p:cNvPr id="4" name="TextBox 3">
+            <a:extLst>
+              <a:ext uri="{FF2B5EF4-FFF2-40B4-BE49-F238E27FC236}">
+                <a16:creationId xmlns:a16="http://schemas.microsoft.com/office/drawing/2014/main" id="{3B9E4CB6-5511-1D58-015A-680F7033B35B}"/>
+              </a:ext>
+            </a:extLst>
+          </p:cNvPr>
+          <p:cNvSpPr txBox="1"/>
+          <p:nvPr/>
+        </p:nvSpPr>
+        <p:spPr>
+          <a:xfrm>
+            <a:off x="8812384" y="862270"/>
+            <a:ext cx="5450026" cy="923330"/>
+          </a:xfrm>
+          <a:prstGeom prst="rect">
+            <a:avLst/>
+          </a:prstGeom>
+          <a:noFill/>
+        </p:spPr>
+        <p:txBody>
+          <a:bodyPr wrap="square" rtlCol="0">
+            <a:spAutoFit/>
+          </a:bodyPr>
+          <a:lstStyle/>
+          <a:p>
+            <a:r>
+              <a:rPr lang="en-AU" dirty="0">
+                <a:solidFill>
+                  <a:srgbClr val="FF0000"/>
+                </a:solidFill>
+              </a:rPr>
+              <a:t>Since the median value is heavily </a:t>
+            </a:r>
+            <a:r>
+              <a:rPr lang="en-AU" dirty="0" err="1">
+                <a:solidFill>
+                  <a:srgbClr val="FF0000"/>
+                </a:solidFill>
+              </a:rPr>
+              <a:t>impaced</a:t>
+            </a:r>
+            <a:r>
+              <a:rPr lang="en-AU" dirty="0">
+                <a:solidFill>
+                  <a:srgbClr val="FF0000"/>
+                </a:solidFill>
+              </a:rPr>
+              <a:t> by the </a:t>
+            </a:r>
+          </a:p>
+          <a:p>
+            <a:r>
+              <a:rPr lang="en-AU" dirty="0">
+                <a:solidFill>
+                  <a:srgbClr val="FF0000"/>
+                </a:solidFill>
+              </a:rPr>
+              <a:t>Large amount of zero counts, the mean is a better indicator of congestion</a:t>
+            </a:r>
+          </a:p>
+        </p:txBody>
+      </p:sp>
+      <p:sp>
+        <p:nvSpPr>
+          <p:cNvPr id="5" name="TextBox 4">
+            <a:extLst>
+              <a:ext uri="{FF2B5EF4-FFF2-40B4-BE49-F238E27FC236}">
+                <a16:creationId xmlns:a16="http://schemas.microsoft.com/office/drawing/2014/main" id="{035E1815-6C00-1830-8096-49AC34919A6A}"/>
+              </a:ext>
+            </a:extLst>
+          </p:cNvPr>
+          <p:cNvSpPr txBox="1"/>
+          <p:nvPr/>
+        </p:nvSpPr>
+        <p:spPr>
+          <a:xfrm>
+            <a:off x="8812384" y="2118641"/>
+            <a:ext cx="5450026" cy="923330"/>
+          </a:xfrm>
+          <a:prstGeom prst="rect">
+            <a:avLst/>
+          </a:prstGeom>
+          <a:noFill/>
+        </p:spPr>
+        <p:txBody>
+          <a:bodyPr wrap="square" rtlCol="0">
+            <a:spAutoFit/>
+          </a:bodyPr>
+          <a:lstStyle/>
+          <a:p>
+            <a:r>
+              <a:rPr lang="en-AU" dirty="0">
+                <a:solidFill>
+                  <a:srgbClr val="FF0000"/>
+                </a:solidFill>
+              </a:rPr>
+              <a:t>We will classify into two classes: “congested” and “not congested”, with the data belonging to the congested class if </a:t>
+            </a:r>
+            <a:r>
+              <a:rPr lang="en-AU" dirty="0" err="1">
+                <a:solidFill>
+                  <a:srgbClr val="FF0000"/>
+                </a:solidFill>
+              </a:rPr>
+              <a:t>daily_total</a:t>
+            </a:r>
+            <a:r>
+              <a:rPr lang="en-AU" dirty="0">
+                <a:solidFill>
+                  <a:srgbClr val="FF0000"/>
+                </a:solidFill>
+              </a:rPr>
+              <a:t> is more than the mean (11523.56)</a:t>
+            </a:r>
+          </a:p>
+        </p:txBody>
+      </p:sp>
+      <p:sp>
+        <p:nvSpPr>
+          <p:cNvPr id="7" name="TextBox 6">
+            <a:extLst>
+              <a:ext uri="{FF2B5EF4-FFF2-40B4-BE49-F238E27FC236}">
+                <a16:creationId xmlns:a16="http://schemas.microsoft.com/office/drawing/2014/main" id="{BB4747AE-C125-FD7F-71CC-4FBC2FE04CBF}"/>
+              </a:ext>
+            </a:extLst>
+          </p:cNvPr>
+          <p:cNvSpPr txBox="1"/>
+          <p:nvPr/>
+        </p:nvSpPr>
+        <p:spPr>
+          <a:xfrm>
+            <a:off x="8812384" y="3522507"/>
+            <a:ext cx="5654730" cy="646331"/>
+          </a:xfrm>
+          <a:prstGeom prst="rect">
+            <a:avLst/>
+          </a:prstGeom>
+          <a:noFill/>
+        </p:spPr>
+        <p:txBody>
+          <a:bodyPr wrap="square">
+            <a:spAutoFit/>
+          </a:bodyPr>
+          <a:lstStyle/>
+          <a:p>
+            <a:r>
+              <a:rPr lang="en-GB" dirty="0">
+                <a:solidFill>
+                  <a:srgbClr val="FF0000"/>
+                </a:solidFill>
+              </a:rPr>
+              <a:t>Categorical features will also  be one-hot encoded before training the model </a:t>
+            </a:r>
+          </a:p>
+        </p:txBody>
+      </p:sp>
+    </p:spTree>
+    <p:extLst>
+      <p:ext uri="{BB962C8B-B14F-4D97-AF65-F5344CB8AC3E}">
+        <p14:creationId xmlns:p14="http://schemas.microsoft.com/office/powerpoint/2010/main" val="2631835932"/>
+      </p:ext>
+    </p:extLst>
+  </p:cSld>
+  <p:clrMapOvr>
+    <a:masterClrMapping/>
+  </p:clrMapOvr>
+</p:sld>
+</file>
+
+<file path=ppt/slides/slide6.xml><?xml version="1.0" encoding="utf-8"?>
+<p:sld xmlns:a="http://schemas.openxmlformats.org/drawingml/2006/main" xmlns:r="http://schemas.openxmlformats.org/officeDocument/2006/relationships" xmlns:p="http://schemas.openxmlformats.org/presentationml/2006/main">
+  <p:cSld>
+    <p:spTree>
+      <p:nvGrpSpPr>
+        <p:cNvPr id="1" name=""/>
+        <p:cNvGrpSpPr/>
+        <p:nvPr/>
+      </p:nvGrpSpPr>
+      <p:grpSpPr>
+        <a:xfrm>
+          <a:off x="0" y="0"/>
+          <a:ext cx="0" cy="0"/>
+          <a:chOff x="0" y="0"/>
+          <a:chExt cx="0" cy="0"/>
+        </a:xfrm>
+      </p:grpSpPr>
+      <p:sp>
+        <p:nvSpPr>
+          <p:cNvPr id="2" name="TextBox 1">
+            <a:extLst>
+              <a:ext uri="{FF2B5EF4-FFF2-40B4-BE49-F238E27FC236}">
+                <a16:creationId xmlns:a16="http://schemas.microsoft.com/office/drawing/2014/main" id="{4309D10D-FBF0-DD77-C854-9EED8685081E}"/>
+              </a:ext>
+            </a:extLst>
+          </p:cNvPr>
+          <p:cNvSpPr txBox="1"/>
+          <p:nvPr/>
+        </p:nvSpPr>
+        <p:spPr>
+          <a:xfrm>
+            <a:off x="370115" y="424543"/>
+            <a:ext cx="6361550" cy="461665"/>
+          </a:xfrm>
+          <a:prstGeom prst="rect">
+            <a:avLst/>
+          </a:prstGeom>
+          <a:noFill/>
+        </p:spPr>
+        <p:txBody>
+          <a:bodyPr wrap="none" rtlCol="0">
+            <a:spAutoFit/>
+          </a:bodyPr>
+          <a:lstStyle/>
+          <a:p>
+            <a:r>
+              <a:rPr lang="en-AU" sz="2400" b="1" dirty="0">
+                <a:solidFill>
+                  <a:srgbClr val="FF0000"/>
+                </a:solidFill>
+              </a:rPr>
+              <a:t>Gradient Boosting Model (subproblem A) results</a:t>
+            </a:r>
+          </a:p>
+        </p:txBody>
+      </p:sp>
+      <p:sp>
+        <p:nvSpPr>
+          <p:cNvPr id="3" name="TextBox 2">
+            <a:extLst>
+              <a:ext uri="{FF2B5EF4-FFF2-40B4-BE49-F238E27FC236}">
+                <a16:creationId xmlns:a16="http://schemas.microsoft.com/office/drawing/2014/main" id="{E509E046-0FCE-25C7-E5BC-9B5710D40C0D}"/>
+              </a:ext>
+            </a:extLst>
+          </p:cNvPr>
+          <p:cNvSpPr txBox="1"/>
+          <p:nvPr/>
+        </p:nvSpPr>
+        <p:spPr>
+          <a:xfrm>
+            <a:off x="513775" y="1295400"/>
+            <a:ext cx="3872150" cy="5078313"/>
+          </a:xfrm>
+          <a:prstGeom prst="rect">
+            <a:avLst/>
+          </a:prstGeom>
+          <a:noFill/>
+        </p:spPr>
+        <p:txBody>
+          <a:bodyPr wrap="none" rtlCol="0">
+            <a:spAutoFit/>
+          </a:bodyPr>
+          <a:lstStyle/>
+          <a:p>
+            <a:r>
+              <a:rPr lang="en-AU" dirty="0">
+                <a:solidFill>
+                  <a:srgbClr val="FF0000"/>
+                </a:solidFill>
+              </a:rPr>
+              <a:t>We trained it on the following features:</a:t>
+            </a:r>
+          </a:p>
+          <a:p>
+            <a:r>
+              <a:rPr lang="en-GB" b="0" dirty="0">
+                <a:solidFill>
+                  <a:srgbClr val="CE9178"/>
+                </a:solidFill>
+                <a:effectLst/>
+                <a:latin typeface="Consolas" panose="020B0609020204030204" pitchFamily="49" charset="0"/>
+              </a:rPr>
+              <a:t>- '</a:t>
+            </a:r>
+            <a:r>
+              <a:rPr lang="en-GB" b="0" dirty="0" err="1">
+                <a:solidFill>
+                  <a:srgbClr val="CE9178"/>
+                </a:solidFill>
+                <a:effectLst/>
+                <a:latin typeface="Consolas" panose="020B0609020204030204" pitchFamily="49" charset="0"/>
+              </a:rPr>
+              <a:t>road_functional_hierarchy</a:t>
+            </a:r>
+            <a:r>
+              <a:rPr lang="en-GB" b="0" dirty="0">
+                <a:solidFill>
+                  <a:srgbClr val="CE9178"/>
+                </a:solidFill>
+                <a:effectLst/>
+                <a:latin typeface="Consolas" panose="020B0609020204030204" pitchFamily="49" charset="0"/>
+              </a:rPr>
+              <a:t>’</a:t>
+            </a:r>
+            <a:endParaRPr lang="en-GB" dirty="0">
+              <a:solidFill>
+                <a:srgbClr val="CCCCCC"/>
+              </a:solidFill>
+              <a:latin typeface="Consolas" panose="020B0609020204030204" pitchFamily="49" charset="0"/>
+            </a:endParaRPr>
+          </a:p>
+          <a:p>
+            <a:r>
+              <a:rPr lang="en-GB" b="0" dirty="0">
+                <a:solidFill>
+                  <a:srgbClr val="CE9178"/>
+                </a:solidFill>
+                <a:effectLst/>
+                <a:latin typeface="Consolas" panose="020B0609020204030204" pitchFamily="49" charset="0"/>
+              </a:rPr>
+              <a:t>- '</a:t>
+            </a:r>
+            <a:r>
+              <a:rPr lang="en-GB" b="0" dirty="0" err="1">
+                <a:solidFill>
+                  <a:srgbClr val="CE9178"/>
+                </a:solidFill>
+                <a:effectLst/>
+                <a:latin typeface="Consolas" panose="020B0609020204030204" pitchFamily="49" charset="0"/>
+              </a:rPr>
+              <a:t>road_classification_type</a:t>
+            </a:r>
+            <a:r>
+              <a:rPr lang="en-GB" b="0" dirty="0">
+                <a:solidFill>
+                  <a:srgbClr val="CE9178"/>
+                </a:solidFill>
+                <a:effectLst/>
+                <a:latin typeface="Consolas" panose="020B0609020204030204" pitchFamily="49" charset="0"/>
+              </a:rPr>
+              <a:t>’</a:t>
+            </a:r>
+            <a:endParaRPr lang="en-GB" dirty="0">
+              <a:solidFill>
+                <a:srgbClr val="CCCCCC"/>
+              </a:solidFill>
+              <a:latin typeface="Consolas" panose="020B0609020204030204" pitchFamily="49" charset="0"/>
+            </a:endParaRPr>
+          </a:p>
+          <a:p>
+            <a:pPr marL="285750" indent="-285750">
+              <a:buFontTx/>
+              <a:buChar char="-"/>
+            </a:pPr>
+            <a:r>
+              <a:rPr lang="en-GB" b="0" dirty="0">
+                <a:solidFill>
+                  <a:srgbClr val="CE9178"/>
+                </a:solidFill>
+                <a:effectLst/>
+                <a:latin typeface="Consolas" panose="020B0609020204030204" pitchFamily="49" charset="0"/>
+              </a:rPr>
+              <a:t>'suburb’</a:t>
+            </a:r>
+          </a:p>
+          <a:p>
+            <a:pPr marL="285750" indent="-285750">
+              <a:buFontTx/>
+              <a:buChar char="-"/>
+            </a:pPr>
+            <a:r>
+              <a:rPr lang="en-AU" b="0" dirty="0">
+                <a:solidFill>
+                  <a:srgbClr val="CE9178"/>
+                </a:solidFill>
+                <a:effectLst/>
+                <a:latin typeface="Consolas" panose="020B0609020204030204" pitchFamily="49" charset="0"/>
+              </a:rPr>
+              <a:t>'</a:t>
+            </a:r>
+            <a:r>
+              <a:rPr lang="en-AU" b="0" dirty="0" err="1">
+                <a:solidFill>
+                  <a:srgbClr val="CE9178"/>
+                </a:solidFill>
+                <a:effectLst/>
+                <a:latin typeface="Consolas" panose="020B0609020204030204" pitchFamily="49" charset="0"/>
+              </a:rPr>
+              <a:t>traffic_direction_seq</a:t>
+            </a:r>
+            <a:r>
+              <a:rPr lang="en-AU" b="0" dirty="0">
+                <a:solidFill>
+                  <a:srgbClr val="CE9178"/>
+                </a:solidFill>
+                <a:effectLst/>
+                <a:latin typeface="Consolas" panose="020B0609020204030204" pitchFamily="49" charset="0"/>
+              </a:rPr>
+              <a:t>’</a:t>
+            </a:r>
+            <a:endParaRPr lang="en-AU" dirty="0">
+              <a:solidFill>
+                <a:srgbClr val="CCCCCC"/>
+              </a:solidFill>
+              <a:latin typeface="Consolas" panose="020B0609020204030204" pitchFamily="49" charset="0"/>
+            </a:endParaRPr>
+          </a:p>
+          <a:p>
+            <a:pPr marL="285750" indent="-285750">
+              <a:buFontTx/>
+              <a:buChar char="-"/>
+            </a:pPr>
+            <a:r>
+              <a:rPr lang="en-AU" b="0" dirty="0">
+                <a:solidFill>
+                  <a:srgbClr val="CE9178"/>
+                </a:solidFill>
+                <a:effectLst/>
+                <a:latin typeface="Consolas" panose="020B0609020204030204" pitchFamily="49" charset="0"/>
+              </a:rPr>
+              <a:t>'</a:t>
+            </a:r>
+            <a:r>
+              <a:rPr lang="en-AU" b="0" dirty="0" err="1">
+                <a:solidFill>
+                  <a:srgbClr val="CE9178"/>
+                </a:solidFill>
+                <a:effectLst/>
+                <a:latin typeface="Consolas" panose="020B0609020204030204" pitchFamily="49" charset="0"/>
+              </a:rPr>
+              <a:t>cardinal_direction_seq</a:t>
+            </a:r>
+            <a:r>
+              <a:rPr lang="en-AU" b="0" dirty="0">
+                <a:solidFill>
+                  <a:srgbClr val="CE9178"/>
+                </a:solidFill>
+                <a:effectLst/>
+                <a:latin typeface="Consolas" panose="020B0609020204030204" pitchFamily="49" charset="0"/>
+              </a:rPr>
+              <a:t>’</a:t>
+            </a:r>
+            <a:endParaRPr lang="en-AU" dirty="0">
+              <a:solidFill>
+                <a:srgbClr val="CCCCCC"/>
+              </a:solidFill>
+              <a:latin typeface="Consolas" panose="020B0609020204030204" pitchFamily="49" charset="0"/>
+            </a:endParaRPr>
+          </a:p>
+          <a:p>
+            <a:pPr marL="285750" indent="-285750">
+              <a:buFontTx/>
+              <a:buChar char="-"/>
+            </a:pPr>
+            <a:r>
+              <a:rPr lang="en-AU" b="0" dirty="0">
+                <a:solidFill>
+                  <a:srgbClr val="CE9178"/>
+                </a:solidFill>
+                <a:effectLst/>
+                <a:latin typeface="Consolas" panose="020B0609020204030204" pitchFamily="49" charset="0"/>
+              </a:rPr>
+              <a:t>'</a:t>
+            </a:r>
+            <a:r>
+              <a:rPr lang="en-AU" b="0" dirty="0" err="1">
+                <a:solidFill>
+                  <a:srgbClr val="CE9178"/>
+                </a:solidFill>
+                <a:effectLst/>
+                <a:latin typeface="Consolas" panose="020B0609020204030204" pitchFamily="49" charset="0"/>
+              </a:rPr>
+              <a:t>classification_seq</a:t>
+            </a:r>
+            <a:r>
+              <a:rPr lang="en-AU" b="0" dirty="0">
+                <a:solidFill>
+                  <a:srgbClr val="CE9178"/>
+                </a:solidFill>
+                <a:effectLst/>
+                <a:latin typeface="Consolas" panose="020B0609020204030204" pitchFamily="49" charset="0"/>
+              </a:rPr>
+              <a:t>’</a:t>
+            </a:r>
+            <a:r>
+              <a:rPr lang="en-AU" b="0" dirty="0">
+                <a:solidFill>
+                  <a:srgbClr val="CCCCCC"/>
+                </a:solidFill>
+                <a:effectLst/>
+                <a:latin typeface="Consolas" panose="020B0609020204030204" pitchFamily="49" charset="0"/>
+              </a:rPr>
+              <a:t>,</a:t>
+            </a:r>
+          </a:p>
+          <a:p>
+            <a:pPr marL="285750" indent="-285750">
+              <a:buFontTx/>
+              <a:buChar char="-"/>
+            </a:pPr>
+            <a:r>
+              <a:rPr lang="en-AU" b="0" dirty="0">
+                <a:solidFill>
+                  <a:srgbClr val="CE9178"/>
+                </a:solidFill>
+                <a:effectLst/>
+                <a:latin typeface="Consolas" panose="020B0609020204030204" pitchFamily="49" charset="0"/>
+              </a:rPr>
+              <a:t>'year’</a:t>
+            </a:r>
+            <a:endParaRPr lang="en-AU" dirty="0">
+              <a:solidFill>
+                <a:srgbClr val="CCCCCC"/>
+              </a:solidFill>
+              <a:latin typeface="Consolas" panose="020B0609020204030204" pitchFamily="49" charset="0"/>
+            </a:endParaRPr>
+          </a:p>
+          <a:p>
+            <a:pPr marL="285750" indent="-285750">
+              <a:buFontTx/>
+              <a:buChar char="-"/>
+            </a:pPr>
+            <a:r>
+              <a:rPr lang="en-AU" b="0" dirty="0">
+                <a:solidFill>
+                  <a:srgbClr val="CE9178"/>
+                </a:solidFill>
+                <a:effectLst/>
+                <a:latin typeface="Consolas" panose="020B0609020204030204" pitchFamily="49" charset="0"/>
+              </a:rPr>
+              <a:t>'month’</a:t>
+            </a:r>
+            <a:endParaRPr lang="en-AU" dirty="0">
+              <a:solidFill>
+                <a:srgbClr val="CCCCCC"/>
+              </a:solidFill>
+              <a:latin typeface="Consolas" panose="020B0609020204030204" pitchFamily="49" charset="0"/>
+            </a:endParaRPr>
+          </a:p>
+          <a:p>
+            <a:pPr marL="285750" indent="-285750">
+              <a:buFontTx/>
+              <a:buChar char="-"/>
+            </a:pPr>
+            <a:r>
+              <a:rPr lang="en-AU" b="0" dirty="0">
+                <a:solidFill>
+                  <a:srgbClr val="CE9178"/>
+                </a:solidFill>
+                <a:effectLst/>
+                <a:latin typeface="Consolas" panose="020B0609020204030204" pitchFamily="49" charset="0"/>
+              </a:rPr>
+              <a:t>'day’</a:t>
+            </a:r>
+            <a:endParaRPr lang="en-AU" dirty="0">
+              <a:solidFill>
+                <a:srgbClr val="CCCCCC"/>
+              </a:solidFill>
+              <a:latin typeface="Consolas" panose="020B0609020204030204" pitchFamily="49" charset="0"/>
+            </a:endParaRPr>
+          </a:p>
+          <a:p>
+            <a:pPr marL="285750" indent="-285750">
+              <a:buFontTx/>
+              <a:buChar char="-"/>
+            </a:pPr>
+            <a:r>
+              <a:rPr lang="en-AU" b="0" dirty="0">
+                <a:solidFill>
+                  <a:srgbClr val="CE9178"/>
+                </a:solidFill>
+                <a:effectLst/>
+                <a:latin typeface="Consolas" panose="020B0609020204030204" pitchFamily="49" charset="0"/>
+              </a:rPr>
+              <a:t>'</a:t>
+            </a:r>
+            <a:r>
+              <a:rPr lang="en-AU" b="0" dirty="0" err="1">
+                <a:solidFill>
+                  <a:srgbClr val="CE9178"/>
+                </a:solidFill>
+                <a:effectLst/>
+                <a:latin typeface="Consolas" panose="020B0609020204030204" pitchFamily="49" charset="0"/>
+              </a:rPr>
+              <a:t>day_of_week</a:t>
+            </a:r>
+            <a:r>
+              <a:rPr lang="en-AU" b="0" dirty="0">
+                <a:solidFill>
+                  <a:srgbClr val="CE9178"/>
+                </a:solidFill>
+                <a:effectLst/>
+                <a:latin typeface="Consolas" panose="020B0609020204030204" pitchFamily="49" charset="0"/>
+              </a:rPr>
+              <a:t>’</a:t>
+            </a:r>
+            <a:endParaRPr lang="en-AU" dirty="0">
+              <a:solidFill>
+                <a:srgbClr val="CCCCCC"/>
+              </a:solidFill>
+              <a:latin typeface="Consolas" panose="020B0609020204030204" pitchFamily="49" charset="0"/>
+            </a:endParaRPr>
+          </a:p>
+          <a:p>
+            <a:pPr marL="285750" indent="-285750">
+              <a:buFontTx/>
+              <a:buChar char="-"/>
+            </a:pPr>
+            <a:r>
+              <a:rPr lang="en-AU" b="0" dirty="0">
+                <a:solidFill>
+                  <a:srgbClr val="CE9178"/>
+                </a:solidFill>
+                <a:effectLst/>
+                <a:latin typeface="Consolas" panose="020B0609020204030204" pitchFamily="49" charset="0"/>
+              </a:rPr>
+              <a:t>'</a:t>
+            </a:r>
+            <a:r>
+              <a:rPr lang="en-AU" b="0" dirty="0" err="1">
+                <a:solidFill>
+                  <a:srgbClr val="CE9178"/>
+                </a:solidFill>
+                <a:effectLst/>
+                <a:latin typeface="Consolas" panose="020B0609020204030204" pitchFamily="49" charset="0"/>
+              </a:rPr>
+              <a:t>public_holiday</a:t>
+            </a:r>
+            <a:r>
+              <a:rPr lang="en-AU" b="0" dirty="0">
+                <a:solidFill>
+                  <a:srgbClr val="CE9178"/>
+                </a:solidFill>
+                <a:effectLst/>
+                <a:latin typeface="Consolas" panose="020B0609020204030204" pitchFamily="49" charset="0"/>
+              </a:rPr>
+              <a:t>’</a:t>
+            </a:r>
+            <a:endParaRPr lang="en-AU" dirty="0">
+              <a:solidFill>
+                <a:srgbClr val="CCCCCC"/>
+              </a:solidFill>
+              <a:latin typeface="Consolas" panose="020B0609020204030204" pitchFamily="49" charset="0"/>
+            </a:endParaRPr>
+          </a:p>
+          <a:p>
+            <a:pPr marL="285750" indent="-285750">
+              <a:buFontTx/>
+              <a:buChar char="-"/>
+            </a:pPr>
+            <a:r>
+              <a:rPr lang="en-AU" b="0" dirty="0">
+                <a:solidFill>
+                  <a:srgbClr val="CE9178"/>
+                </a:solidFill>
+                <a:effectLst/>
+                <a:latin typeface="Consolas" panose="020B0609020204030204" pitchFamily="49" charset="0"/>
+              </a:rPr>
+              <a:t>'</a:t>
+            </a:r>
+            <a:r>
+              <a:rPr lang="en-AU" b="0" dirty="0" err="1">
+                <a:solidFill>
+                  <a:srgbClr val="CE9178"/>
+                </a:solidFill>
+                <a:effectLst/>
+                <a:latin typeface="Consolas" panose="020B0609020204030204" pitchFamily="49" charset="0"/>
+              </a:rPr>
+              <a:t>school_holiday</a:t>
+            </a:r>
+            <a:r>
+              <a:rPr lang="en-AU" b="0" dirty="0">
+                <a:solidFill>
+                  <a:srgbClr val="CE9178"/>
+                </a:solidFill>
+                <a:effectLst/>
+                <a:latin typeface="Consolas" panose="020B0609020204030204" pitchFamily="49" charset="0"/>
+              </a:rPr>
+              <a:t>’</a:t>
+            </a:r>
+            <a:endParaRPr lang="en-AU" dirty="0">
+              <a:solidFill>
+                <a:srgbClr val="CCCCCC"/>
+              </a:solidFill>
+              <a:latin typeface="Consolas" panose="020B0609020204030204" pitchFamily="49" charset="0"/>
+            </a:endParaRPr>
+          </a:p>
+          <a:p>
+            <a:pPr marL="285750" indent="-285750">
+              <a:buFontTx/>
+              <a:buChar char="-"/>
+            </a:pPr>
+            <a:r>
+              <a:rPr lang="en-AU" b="0" dirty="0">
+                <a:solidFill>
+                  <a:srgbClr val="CE9178"/>
+                </a:solidFill>
+                <a:effectLst/>
+                <a:latin typeface="Consolas" panose="020B0609020204030204" pitchFamily="49" charset="0"/>
+              </a:rPr>
+              <a:t>'</a:t>
+            </a:r>
+            <a:r>
+              <a:rPr lang="en-AU" b="0" dirty="0" err="1">
+                <a:solidFill>
+                  <a:srgbClr val="CE9178"/>
+                </a:solidFill>
+                <a:effectLst/>
+                <a:latin typeface="Consolas" panose="020B0609020204030204" pitchFamily="49" charset="0"/>
+              </a:rPr>
+              <a:t>lane_count</a:t>
+            </a:r>
+            <a:r>
+              <a:rPr lang="en-AU" b="0" dirty="0">
+                <a:solidFill>
+                  <a:srgbClr val="CE9178"/>
+                </a:solidFill>
+                <a:effectLst/>
+                <a:latin typeface="Consolas" panose="020B0609020204030204" pitchFamily="49" charset="0"/>
+              </a:rPr>
+              <a:t>’</a:t>
+            </a:r>
+            <a:endParaRPr lang="en-AU" dirty="0">
+              <a:solidFill>
+                <a:srgbClr val="CCCCCC"/>
+              </a:solidFill>
+              <a:latin typeface="Consolas" panose="020B0609020204030204" pitchFamily="49" charset="0"/>
+            </a:endParaRPr>
+          </a:p>
+          <a:p>
+            <a:pPr marL="285750" indent="-285750">
+              <a:buFontTx/>
+              <a:buChar char="-"/>
+            </a:pPr>
+            <a:r>
+              <a:rPr lang="en-AU" b="0" dirty="0">
+                <a:solidFill>
+                  <a:srgbClr val="CE9178"/>
+                </a:solidFill>
+                <a:effectLst/>
+                <a:latin typeface="Consolas" panose="020B0609020204030204" pitchFamily="49" charset="0"/>
+              </a:rPr>
+              <a:t>'wgs84_latitude’</a:t>
+            </a:r>
+            <a:endParaRPr lang="en-AU" dirty="0">
+              <a:solidFill>
+                <a:srgbClr val="CCCCCC"/>
+              </a:solidFill>
+              <a:latin typeface="Consolas" panose="020B0609020204030204" pitchFamily="49" charset="0"/>
+            </a:endParaRPr>
+          </a:p>
+          <a:p>
+            <a:pPr marL="285750" indent="-285750">
+              <a:buFontTx/>
+              <a:buChar char="-"/>
+            </a:pPr>
+            <a:r>
+              <a:rPr lang="en-AU" b="0" dirty="0">
+                <a:solidFill>
+                  <a:srgbClr val="CE9178"/>
+                </a:solidFill>
+                <a:effectLst/>
+                <a:latin typeface="Consolas" panose="020B0609020204030204" pitchFamily="49" charset="0"/>
+              </a:rPr>
+              <a:t>'wgs84_longitude'</a:t>
+            </a:r>
+            <a:endParaRPr lang="en-AU" b="0" dirty="0">
+              <a:solidFill>
+                <a:srgbClr val="CCCCCC"/>
+              </a:solidFill>
+              <a:effectLst/>
+              <a:latin typeface="Consolas" panose="020B0609020204030204" pitchFamily="49" charset="0"/>
+            </a:endParaRPr>
+          </a:p>
+          <a:p>
+            <a:pPr marL="285750" indent="-285750">
+              <a:buFontTx/>
+              <a:buChar char="-"/>
+            </a:pPr>
+            <a:endParaRPr lang="en-GB" b="0" dirty="0">
+              <a:solidFill>
+                <a:srgbClr val="CCCCCC"/>
+              </a:solidFill>
+              <a:effectLst/>
+              <a:latin typeface="Consolas" panose="020B0609020204030204" pitchFamily="49" charset="0"/>
+            </a:endParaRPr>
+          </a:p>
+          <a:p>
+            <a:endParaRPr lang="en-AU" dirty="0">
+              <a:solidFill>
+                <a:srgbClr val="FF0000"/>
+              </a:solidFill>
+            </a:endParaRPr>
+          </a:p>
+        </p:txBody>
+      </p:sp>
+      <p:sp>
+        <p:nvSpPr>
+          <p:cNvPr id="4" name="TextBox 3">
+            <a:extLst>
+              <a:ext uri="{FF2B5EF4-FFF2-40B4-BE49-F238E27FC236}">
+                <a16:creationId xmlns:a16="http://schemas.microsoft.com/office/drawing/2014/main" id="{6901CDC6-A997-495F-C7CF-4981D94EAE0C}"/>
+              </a:ext>
+            </a:extLst>
+          </p:cNvPr>
+          <p:cNvSpPr txBox="1"/>
+          <p:nvPr/>
+        </p:nvSpPr>
+        <p:spPr>
+          <a:xfrm>
+            <a:off x="5083629" y="1295400"/>
+            <a:ext cx="6043449" cy="369332"/>
+          </a:xfrm>
+          <a:prstGeom prst="rect">
+            <a:avLst/>
+          </a:prstGeom>
+          <a:noFill/>
+        </p:spPr>
+        <p:txBody>
+          <a:bodyPr wrap="none" rtlCol="0">
+            <a:spAutoFit/>
+          </a:bodyPr>
+          <a:lstStyle/>
+          <a:p>
+            <a:r>
+              <a:rPr lang="en-AU" dirty="0">
+                <a:solidFill>
+                  <a:srgbClr val="FF0000"/>
+                </a:solidFill>
+              </a:rPr>
+              <a:t>With the goal of classifying into congested and non congested</a:t>
+            </a:r>
+          </a:p>
+        </p:txBody>
+      </p:sp>
+      <p:pic>
+        <p:nvPicPr>
+          <p:cNvPr id="6" name="Picture 5" descr="A blue squares with white text&#10;&#10;AI-generated content may be incorrect.">
+            <a:extLst>
+              <a:ext uri="{FF2B5EF4-FFF2-40B4-BE49-F238E27FC236}">
+                <a16:creationId xmlns:a16="http://schemas.microsoft.com/office/drawing/2014/main" id="{649163F2-94BE-A957-1B70-89C62DA90590}"/>
+              </a:ext>
+            </a:extLst>
+          </p:cNvPr>
+          <p:cNvPicPr>
+            <a:picLocks noChangeAspect="1"/>
+          </p:cNvPicPr>
+          <p:nvPr/>
+        </p:nvPicPr>
+        <p:blipFill>
+          <a:blip r:embed="rId2"/>
+          <a:stretch>
+            <a:fillRect/>
+          </a:stretch>
+        </p:blipFill>
+        <p:spPr>
+          <a:xfrm>
+            <a:off x="5221437" y="2073924"/>
+            <a:ext cx="5276098" cy="3511303"/>
+          </a:xfrm>
+          <a:prstGeom prst="rect">
+            <a:avLst/>
+          </a:prstGeom>
+        </p:spPr>
+      </p:pic>
+      <p:pic>
+        <p:nvPicPr>
+          <p:cNvPr id="8" name="Picture 7">
+            <a:extLst>
+              <a:ext uri="{FF2B5EF4-FFF2-40B4-BE49-F238E27FC236}">
+                <a16:creationId xmlns:a16="http://schemas.microsoft.com/office/drawing/2014/main" id="{31670FD1-283F-3343-7305-28E5F5C3CF02}"/>
+              </a:ext>
+            </a:extLst>
+          </p:cNvPr>
+          <p:cNvPicPr>
+            <a:picLocks noChangeAspect="1"/>
+          </p:cNvPicPr>
+          <p:nvPr/>
+        </p:nvPicPr>
+        <p:blipFill>
+          <a:blip r:embed="rId3"/>
+          <a:stretch>
+            <a:fillRect/>
+          </a:stretch>
+        </p:blipFill>
+        <p:spPr>
+          <a:xfrm>
+            <a:off x="5148635" y="5994419"/>
+            <a:ext cx="2210108" cy="1914792"/>
+          </a:xfrm>
+          <a:prstGeom prst="rect">
+            <a:avLst/>
+          </a:prstGeom>
+        </p:spPr>
+      </p:pic>
+    </p:spTree>
+    <p:extLst>
+      <p:ext uri="{BB962C8B-B14F-4D97-AF65-F5344CB8AC3E}">
+        <p14:creationId xmlns:p14="http://schemas.microsoft.com/office/powerpoint/2010/main" val="2892629037"/>
+      </p:ext>
+    </p:extLst>
+  </p:cSld>
+  <p:clrMapOvr>
+    <a:masterClrMapping/>
+  </p:clrMapOvr>
+</p:sld>
+</file>
+
+<file path=ppt/slides/slide7.xml><?xml version="1.0" encoding="utf-8"?>
 <p:sld xmlns:a="http://schemas.openxmlformats.org/drawingml/2006/main" xmlns:r="http://schemas.openxmlformats.org/officeDocument/2006/relationships" xmlns:p="http://schemas.openxmlformats.org/presentationml/2006/main">
   <p:cSld name="Slide 5">
     <p:spTree>
@@ -4514,14 +6783,14 @@
       </p:grpSpPr>
       <p:pic>
         <p:nvPicPr>
-          <p:cNvPr id="2" name="Image 0" descr="preencoded.png">    </p:cNvPr>
+          <p:cNvPr id="2" name="Image 0" descr="preencoded.png"/>
           <p:cNvPicPr>
             <a:picLocks noChangeAspect="1"/>
           </p:cNvPicPr>
           <p:nvPr/>
         </p:nvPicPr>
         <p:blipFill>
-          <a:blip r:embed="rId1"/>
+          <a:blip r:embed="rId3"/>
           <a:stretch>
             <a:fillRect/>
           </a:stretch>
@@ -4557,7 +6826,7 @@
           <a:bodyPr wrap="none" lIns="0" tIns="0" rIns="0" bIns="0" rtlCol="0" anchor="t"/>
           <a:lstStyle/>
           <a:p>
-            <a:pPr algn="l" indent="0" marL="0">
+            <a:pPr marL="0" indent="0" algn="l">
               <a:lnSpc>
                 <a:spcPts val="5600"/>
               </a:lnSpc>
@@ -4599,13 +6868,20 @@
           </a:solidFill>
           <a:ln/>
           <a:effectLst>
-            <a:outerShdw sx="100000" sy="100000" kx="0" ky="0" algn="bl" rotWithShape="0" blurRad="53340" dist="26670" dir="13500000">
-              <a:srgbClr val="ffffff">
+            <a:outerShdw blurRad="53340" dist="26670" dir="13500000" algn="bl" rotWithShape="0">
+              <a:srgbClr val="FFFFFF">
                 <a:alpha val="10000"/>
               </a:srgbClr>
             </a:outerShdw>
           </a:effectLst>
         </p:spPr>
+        <p:txBody>
+          <a:bodyPr/>
+          <a:lstStyle/>
+          <a:p>
+            <a:endParaRPr lang="en-AU"/>
+          </a:p>
+        </p:txBody>
       </p:sp>
       <p:sp>
         <p:nvSpPr>
@@ -4628,7 +6904,7 @@
           <a:bodyPr wrap="none" lIns="0" tIns="0" rIns="0" bIns="0" rtlCol="0" anchor="t"/>
           <a:lstStyle/>
           <a:p>
-            <a:pPr algn="l" indent="0" marL="0">
+            <a:pPr marL="0" indent="0" algn="l">
               <a:lnSpc>
                 <a:spcPts val="2800"/>
               </a:lnSpc>
@@ -4670,7 +6946,7 @@
           <a:bodyPr wrap="none" lIns="0" tIns="0" rIns="0" bIns="0" rtlCol="0" anchor="t"/>
           <a:lstStyle/>
           <a:p>
-            <a:pPr algn="l" indent="0" marL="0">
+            <a:pPr marL="0" indent="0" algn="l">
               <a:lnSpc>
                 <a:spcPts val="2700"/>
               </a:lnSpc>
@@ -4712,13 +6988,20 @@
           </a:solidFill>
           <a:ln/>
           <a:effectLst>
-            <a:outerShdw sx="100000" sy="100000" kx="0" ky="0" algn="bl" rotWithShape="0" blurRad="53340" dist="26670" dir="13500000">
-              <a:srgbClr val="ffffff">
+            <a:outerShdw blurRad="53340" dist="26670" dir="13500000" algn="bl" rotWithShape="0">
+              <a:srgbClr val="FFFFFF">
                 <a:alpha val="10000"/>
               </a:srgbClr>
             </a:outerShdw>
           </a:effectLst>
         </p:spPr>
+        <p:txBody>
+          <a:bodyPr/>
+          <a:lstStyle/>
+          <a:p>
+            <a:endParaRPr lang="en-AU"/>
+          </a:p>
+        </p:txBody>
       </p:sp>
       <p:sp>
         <p:nvSpPr>
@@ -4741,7 +7024,7 @@
           <a:bodyPr wrap="none" lIns="0" tIns="0" rIns="0" bIns="0" rtlCol="0" anchor="t"/>
           <a:lstStyle/>
           <a:p>
-            <a:pPr algn="l" indent="0" marL="0">
+            <a:pPr marL="0" indent="0" algn="l">
               <a:lnSpc>
                 <a:spcPts val="2800"/>
               </a:lnSpc>
@@ -4783,7 +7066,7 @@
           <a:bodyPr wrap="square" lIns="0" tIns="0" rIns="0" bIns="0" rtlCol="0" anchor="t"/>
           <a:lstStyle/>
           <a:p>
-            <a:pPr algn="l" indent="0" marL="0">
+            <a:pPr marL="0" indent="0" algn="l">
               <a:lnSpc>
                 <a:spcPts val="2700"/>
               </a:lnSpc>
@@ -4825,13 +7108,20 @@
           </a:solidFill>
           <a:ln/>
           <a:effectLst>
-            <a:outerShdw sx="100000" sy="100000" kx="0" ky="0" algn="bl" rotWithShape="0" blurRad="53340" dist="26670" dir="13500000">
-              <a:srgbClr val="ffffff">
+            <a:outerShdw blurRad="53340" dist="26670" dir="13500000" algn="bl" rotWithShape="0">
+              <a:srgbClr val="FFFFFF">
                 <a:alpha val="10000"/>
               </a:srgbClr>
             </a:outerShdw>
           </a:effectLst>
         </p:spPr>
+        <p:txBody>
+          <a:bodyPr/>
+          <a:lstStyle/>
+          <a:p>
+            <a:endParaRPr lang="en-AU"/>
+          </a:p>
+        </p:txBody>
       </p:sp>
       <p:sp>
         <p:nvSpPr>
@@ -4854,7 +7144,7 @@
           <a:bodyPr wrap="none" lIns="0" tIns="0" rIns="0" bIns="0" rtlCol="0" anchor="t"/>
           <a:lstStyle/>
           <a:p>
-            <a:pPr algn="l" indent="0" marL="0">
+            <a:pPr marL="0" indent="0" algn="l">
               <a:lnSpc>
                 <a:spcPts val="2800"/>
               </a:lnSpc>
@@ -4896,7 +7186,7 @@
           <a:bodyPr wrap="none" lIns="0" tIns="0" rIns="0" bIns="0" rtlCol="0" anchor="t"/>
           <a:lstStyle/>
           <a:p>
-            <a:pPr algn="l" indent="0" marL="0">
+            <a:pPr marL="0" indent="0" algn="l">
               <a:lnSpc>
                 <a:spcPts val="2700"/>
               </a:lnSpc>
@@ -4914,6 +7204,45 @@
               <a:t>Categorical encoding, standardization</a:t>
             </a:r>
             <a:endParaRPr lang="en-US" sz="1700" dirty="0"/>
+          </a:p>
+        </p:txBody>
+      </p:sp>
+      <p:sp>
+        <p:nvSpPr>
+          <p:cNvPr id="13" name="TextBox 12">
+            <a:extLst>
+              <a:ext uri="{FF2B5EF4-FFF2-40B4-BE49-F238E27FC236}">
+                <a16:creationId xmlns:a16="http://schemas.microsoft.com/office/drawing/2014/main" id="{E5E52057-5942-A2BF-364C-1C0FFC248C88}"/>
+              </a:ext>
+            </a:extLst>
+          </p:cNvPr>
+          <p:cNvSpPr txBox="1"/>
+          <p:nvPr/>
+        </p:nvSpPr>
+        <p:spPr>
+          <a:xfrm>
+            <a:off x="1404257" y="642257"/>
+            <a:ext cx="10916899" cy="523220"/>
+          </a:xfrm>
+          <a:prstGeom prst="rect">
+            <a:avLst/>
+          </a:prstGeom>
+          <a:noFill/>
+        </p:spPr>
+        <p:txBody>
+          <a:bodyPr wrap="none" rtlCol="0">
+            <a:spAutoFit/>
+          </a:bodyPr>
+          <a:lstStyle/>
+          <a:p>
+            <a:r>
+              <a:rPr lang="en-AU" sz="2800" i="1" dirty="0">
+                <a:solidFill>
+                  <a:srgbClr val="FF0000"/>
+                </a:solidFill>
+              </a:rPr>
+              <a:t>**Not sure what the points of this slide is. What information does it give? </a:t>
+            </a:r>
           </a:p>
         </p:txBody>
       </p:sp>
@@ -4925,7 +7254,7 @@
 </p:sld>
 </file>
 
-<file path=ppt/slides/slide6.xml><?xml version="1.0" encoding="utf-8"?>
+<file path=ppt/slides/slide8.xml><?xml version="1.0" encoding="utf-8"?>
 <p:sld xmlns:a="http://schemas.openxmlformats.org/drawingml/2006/main" xmlns:r="http://schemas.openxmlformats.org/officeDocument/2006/relationships" xmlns:p="http://schemas.openxmlformats.org/presentationml/2006/main">
   <p:cSld name="Slide 6">
     <p:spTree>
@@ -4944,14 +7273,14 @@
       </p:grpSpPr>
       <p:pic>
         <p:nvPicPr>
-          <p:cNvPr id="2" name="Image 0" descr="preencoded.png">    </p:cNvPr>
+          <p:cNvPr id="2" name="Image 0" descr="preencoded.png"/>
           <p:cNvPicPr>
             <a:picLocks noChangeAspect="1"/>
           </p:cNvPicPr>
           <p:nvPr/>
         </p:nvPicPr>
         <p:blipFill>
-          <a:blip r:embed="rId1"/>
+          <a:blip r:embed="rId3"/>
           <a:stretch>
             <a:fillRect/>
           </a:stretch>
@@ -4987,7 +7316,7 @@
           <a:bodyPr wrap="none" lIns="0" tIns="0" rIns="0" bIns="0" rtlCol="0" anchor="t"/>
           <a:lstStyle/>
           <a:p>
-            <a:pPr algn="l" indent="0" marL="0">
+            <a:pPr marL="0" indent="0" algn="l">
               <a:lnSpc>
                 <a:spcPts val="5600"/>
               </a:lnSpc>
@@ -5034,6 +7363,13 @@
             <a:prstDash val="solid"/>
           </a:ln>
         </p:spPr>
+        <p:txBody>
+          <a:bodyPr/>
+          <a:lstStyle/>
+          <a:p>
+            <a:endParaRPr lang="en-AU"/>
+          </a:p>
+        </p:txBody>
       </p:sp>
       <p:sp>
         <p:nvSpPr>
@@ -5056,6 +7392,13 @@
           </a:solidFill>
           <a:ln/>
         </p:spPr>
+        <p:txBody>
+          <a:bodyPr/>
+          <a:lstStyle/>
+          <a:p>
+            <a:endParaRPr lang="en-AU"/>
+          </a:p>
+        </p:txBody>
       </p:sp>
       <p:sp>
         <p:nvSpPr>
@@ -5078,7 +7421,7 @@
           <a:bodyPr wrap="none" lIns="0" tIns="0" rIns="0" bIns="0" rtlCol="0" anchor="t"/>
           <a:lstStyle/>
           <a:p>
-            <a:pPr algn="l" indent="0" marL="0">
+            <a:pPr marL="0" indent="0" algn="l">
               <a:lnSpc>
                 <a:spcPts val="2700"/>
               </a:lnSpc>
@@ -5120,7 +7463,7 @@
           <a:bodyPr wrap="none" lIns="0" tIns="0" rIns="0" bIns="0" rtlCol="0" anchor="t"/>
           <a:lstStyle/>
           <a:p>
-            <a:pPr algn="l" indent="0" marL="0">
+            <a:pPr marL="0" indent="0" algn="l">
               <a:lnSpc>
                 <a:spcPts val="2700"/>
               </a:lnSpc>
@@ -5162,7 +7505,7 @@
           <a:bodyPr wrap="none" lIns="0" tIns="0" rIns="0" bIns="0" rtlCol="0" anchor="t"/>
           <a:lstStyle/>
           <a:p>
-            <a:pPr algn="l" indent="0" marL="0">
+            <a:pPr marL="0" indent="0" algn="l">
               <a:lnSpc>
                 <a:spcPts val="2700"/>
               </a:lnSpc>
@@ -5204,6 +7547,13 @@
           </a:solidFill>
           <a:ln/>
         </p:spPr>
+        <p:txBody>
+          <a:bodyPr/>
+          <a:lstStyle/>
+          <a:p>
+            <a:endParaRPr lang="en-AU"/>
+          </a:p>
+        </p:txBody>
       </p:sp>
       <p:sp>
         <p:nvSpPr>
@@ -5226,7 +7576,7 @@
           <a:bodyPr wrap="none" lIns="0" tIns="0" rIns="0" bIns="0" rtlCol="0" anchor="t"/>
           <a:lstStyle/>
           <a:p>
-            <a:pPr algn="l" indent="0" marL="0">
+            <a:pPr marL="0" indent="0" algn="l">
               <a:lnSpc>
                 <a:spcPts val="2700"/>
               </a:lnSpc>
@@ -5268,7 +7618,7 @@
           <a:bodyPr wrap="square" lIns="0" tIns="0" rIns="0" bIns="0" rtlCol="0" anchor="t"/>
           <a:lstStyle/>
           <a:p>
-            <a:pPr algn="l" indent="0" marL="0">
+            <a:pPr marL="0" indent="0" algn="l">
               <a:lnSpc>
                 <a:spcPts val="2700"/>
               </a:lnSpc>
@@ -5310,7 +7660,7 @@
           <a:bodyPr wrap="square" lIns="0" tIns="0" rIns="0" bIns="0" rtlCol="0" anchor="t"/>
           <a:lstStyle/>
           <a:p>
-            <a:pPr algn="l" indent="0" marL="0">
+            <a:pPr marL="0" indent="0" algn="l">
               <a:lnSpc>
                 <a:spcPts val="2700"/>
               </a:lnSpc>
@@ -5352,6 +7702,13 @@
           </a:solidFill>
           <a:ln/>
         </p:spPr>
+        <p:txBody>
+          <a:bodyPr/>
+          <a:lstStyle/>
+          <a:p>
+            <a:endParaRPr lang="en-AU"/>
+          </a:p>
+        </p:txBody>
       </p:sp>
       <p:sp>
         <p:nvSpPr>
@@ -5374,7 +7731,7 @@
           <a:bodyPr wrap="none" lIns="0" tIns="0" rIns="0" bIns="0" rtlCol="0" anchor="t"/>
           <a:lstStyle/>
           <a:p>
-            <a:pPr algn="l" indent="0" marL="0">
+            <a:pPr marL="0" indent="0" algn="l">
               <a:lnSpc>
                 <a:spcPts val="2700"/>
               </a:lnSpc>
@@ -5389,7 +7746,7 @@
                 <a:ea typeface="Montserrat" pitchFamily="34" charset="-122"/>
                 <a:cs typeface="Montserrat" pitchFamily="34" charset="-120"/>
               </a:rPr>
-              <a:t>XGBoost</a:t>
+              <a:t>Gradient Boost</a:t>
             </a:r>
             <a:endParaRPr lang="en-US" sz="1700" dirty="0"/>
           </a:p>
@@ -5416,7 +7773,7 @@
           <a:bodyPr wrap="square" lIns="0" tIns="0" rIns="0" bIns="0" rtlCol="0" anchor="t"/>
           <a:lstStyle/>
           <a:p>
-            <a:pPr algn="l" indent="0" marL="0">
+            <a:pPr marL="0" indent="0" algn="l">
               <a:lnSpc>
                 <a:spcPts val="2700"/>
               </a:lnSpc>
@@ -5458,7 +7815,7 @@
           <a:bodyPr wrap="square" lIns="0" tIns="0" rIns="0" bIns="0" rtlCol="0" anchor="t"/>
           <a:lstStyle/>
           <a:p>
-            <a:pPr algn="l" indent="0" marL="0">
+            <a:pPr marL="0" indent="0" algn="l">
               <a:lnSpc>
                 <a:spcPts val="2700"/>
               </a:lnSpc>
@@ -5500,6 +7857,13 @@
           </a:solidFill>
           <a:ln/>
         </p:spPr>
+        <p:txBody>
+          <a:bodyPr/>
+          <a:lstStyle/>
+          <a:p>
+            <a:endParaRPr lang="en-AU"/>
+          </a:p>
+        </p:txBody>
       </p:sp>
       <p:sp>
         <p:nvSpPr>
@@ -5522,7 +7886,7 @@
           <a:bodyPr wrap="none" lIns="0" tIns="0" rIns="0" bIns="0" rtlCol="0" anchor="t"/>
           <a:lstStyle/>
           <a:p>
-            <a:pPr algn="l" indent="0" marL="0">
+            <a:pPr marL="0" indent="0" algn="l">
               <a:lnSpc>
                 <a:spcPts val="2700"/>
               </a:lnSpc>
@@ -5537,7 +7901,7 @@
                 <a:ea typeface="Montserrat" pitchFamily="34" charset="-122"/>
                 <a:cs typeface="Montserrat" pitchFamily="34" charset="-120"/>
               </a:rPr>
-              <a:t>Neural Networks</a:t>
+              <a:t>MLP</a:t>
             </a:r>
             <a:endParaRPr lang="en-US" sz="1700" dirty="0"/>
           </a:p>
@@ -5564,7 +7928,7 @@
           <a:bodyPr wrap="square" lIns="0" tIns="0" rIns="0" bIns="0" rtlCol="0" anchor="t"/>
           <a:lstStyle/>
           <a:p>
-            <a:pPr algn="l" indent="0" marL="0">
+            <a:pPr marL="0" indent="0" algn="l">
               <a:lnSpc>
                 <a:spcPts val="2700"/>
               </a:lnSpc>
@@ -5606,7 +7970,7 @@
           <a:bodyPr wrap="square" lIns="0" tIns="0" rIns="0" bIns="0" rtlCol="0" anchor="t"/>
           <a:lstStyle/>
           <a:p>
-            <a:pPr algn="l" indent="0" marL="0">
+            <a:pPr marL="0" indent="0" algn="l">
               <a:lnSpc>
                 <a:spcPts val="2700"/>
               </a:lnSpc>
@@ -5635,7 +7999,7 @@
 </p:sld>
 </file>
 
-<file path=ppt/slides/slide7.xml><?xml version="1.0" encoding="utf-8"?>
+<file path=ppt/slides/slide9.xml><?xml version="1.0" encoding="utf-8"?>
 <p:sld xmlns:a="http://schemas.openxmlformats.org/drawingml/2006/main" xmlns:r="http://schemas.openxmlformats.org/officeDocument/2006/relationships" xmlns:p="http://schemas.openxmlformats.org/presentationml/2006/main">
   <p:cSld name="Slide 7">
     <p:spTree>
@@ -5673,7 +8037,7 @@
           <a:bodyPr wrap="none" lIns="0" tIns="0" rIns="0" bIns="0" rtlCol="0" anchor="t"/>
           <a:lstStyle/>
           <a:p>
-            <a:pPr algn="l" indent="0" marL="0">
+            <a:pPr marL="0" indent="0" algn="l">
               <a:lnSpc>
                 <a:spcPts val="5600"/>
               </a:lnSpc>
@@ -5715,7 +8079,7 @@
           <a:bodyPr wrap="none" lIns="0" tIns="0" rIns="0" bIns="0" rtlCol="0" anchor="t"/>
           <a:lstStyle/>
           <a:p>
-            <a:pPr algn="r" indent="0" marL="0">
+            <a:pPr marL="0" indent="0" algn="r">
               <a:lnSpc>
                 <a:spcPts val="2800"/>
               </a:lnSpc>
@@ -5757,7 +8121,7 @@
           <a:bodyPr wrap="square" lIns="0" tIns="0" rIns="0" bIns="0" rtlCol="0" anchor="t"/>
           <a:lstStyle/>
           <a:p>
-            <a:pPr algn="r" indent="0" marL="0">
+            <a:pPr marL="0" indent="0" algn="r">
               <a:lnSpc>
                 <a:spcPts val="2700"/>
               </a:lnSpc>
@@ -5780,139 +8144,7 @@
       </p:sp>
       <p:pic>
         <p:nvPicPr>
-          <p:cNvPr id="5" name="Image 0" descr="preencoded.png">    </p:cNvPr>
-          <p:cNvPicPr>
-            <a:picLocks noChangeAspect="1"/>
-          </p:cNvPicPr>
-          <p:nvPr/>
-        </p:nvPicPr>
-        <p:blipFill>
-          <a:blip r:embed="rId1"/>
-          <a:stretch>
-            <a:fillRect/>
-          </a:stretch>
-        </p:blipFill>
-        <p:spPr>
-          <a:xfrm>
-            <a:off x="5020270" y="2392918"/>
-            <a:ext cx="4589740" cy="4589740"/>
-          </a:xfrm>
-          <a:prstGeom prst="rect">
-            <a:avLst/>
-          </a:prstGeom>
-        </p:spPr>
-      </p:pic>
-      <p:pic>
-        <p:nvPicPr>
-          <p:cNvPr id="6" name="Image 1" descr="preencoded.png">    </p:cNvPr>
-          <p:cNvPicPr>
-            <a:picLocks noChangeAspect="1"/>
-          </p:cNvPicPr>
-          <p:nvPr/>
-        </p:nvPicPr>
-        <p:blipFill>
-          <a:blip r:embed="rId2"/>
-          <a:stretch>
-            <a:fillRect/>
-          </a:stretch>
-        </p:blipFill>
-        <p:spPr>
-          <a:xfrm>
-            <a:off x="6229290" y="3170813"/>
-            <a:ext cx="324088" cy="405170"/>
-          </a:xfrm>
-          <a:prstGeom prst="rect">
-            <a:avLst/>
-          </a:prstGeom>
-        </p:spPr>
-      </p:pic>
-      <p:sp>
-        <p:nvSpPr>
-          <p:cNvPr id="7" name="Text 3"/>
-          <p:cNvSpPr/>
-          <p:nvPr/>
-        </p:nvSpPr>
-        <p:spPr>
-          <a:xfrm>
-            <a:off x="9934932" y="3042642"/>
-            <a:ext cx="2901434" cy="356235"/>
-          </a:xfrm>
-          <a:prstGeom prst="rect">
-            <a:avLst/>
-          </a:prstGeom>
-          <a:noFill/>
-          <a:ln/>
-        </p:spPr>
-        <p:txBody>
-          <a:bodyPr wrap="none" lIns="0" tIns="0" rIns="0" bIns="0" rtlCol="0" anchor="t"/>
-          <a:lstStyle/>
-          <a:p>
-            <a:pPr algn="l" indent="0" marL="0">
-              <a:lnSpc>
-                <a:spcPts val="2800"/>
-              </a:lnSpc>
-              <a:buNone/>
-            </a:pPr>
-            <a:r>
-              <a:rPr lang="en-US" sz="2200" b="1" dirty="0">
-                <a:solidFill>
-                  <a:srgbClr val="EEEFF5"/>
-                </a:solidFill>
-                <a:latin typeface="Barlow Bold" pitchFamily="34" charset="0"/>
-                <a:ea typeface="Barlow Bold" pitchFamily="34" charset="-122"/>
-                <a:cs typeface="Barlow Bold" pitchFamily="34" charset="-120"/>
-              </a:rPr>
-              <a:t>Maximum Temperature</a:t>
-            </a:r>
-            <a:endParaRPr lang="en-US" sz="2200" dirty="0"/>
-          </a:p>
-        </p:txBody>
-      </p:sp>
-      <p:sp>
-        <p:nvSpPr>
-          <p:cNvPr id="8" name="Text 4"/>
-          <p:cNvSpPr/>
-          <p:nvPr/>
-        </p:nvSpPr>
-        <p:spPr>
-          <a:xfrm>
-            <a:off x="9934932" y="3528774"/>
-            <a:ext cx="3937159" cy="346710"/>
-          </a:xfrm>
-          <a:prstGeom prst="rect">
-            <a:avLst/>
-          </a:prstGeom>
-          <a:noFill/>
-          <a:ln/>
-        </p:spPr>
-        <p:txBody>
-          <a:bodyPr wrap="none" lIns="0" tIns="0" rIns="0" bIns="0" rtlCol="0" anchor="t"/>
-          <a:lstStyle/>
-          <a:p>
-            <a:pPr algn="l" indent="0" marL="0">
-              <a:lnSpc>
-                <a:spcPts val="2700"/>
-              </a:lnSpc>
-              <a:buNone/>
-            </a:pPr>
-            <a:r>
-              <a:rPr lang="en-US" sz="1700" dirty="0">
-                <a:solidFill>
-                  <a:srgbClr val="EEEFF5"/>
-                </a:solidFill>
-                <a:latin typeface="Montserrat" pitchFamily="34" charset="0"/>
-                <a:ea typeface="Montserrat" pitchFamily="34" charset="-122"/>
-                <a:cs typeface="Montserrat" pitchFamily="34" charset="-120"/>
-              </a:rPr>
-              <a:t>Affects comfort and travel patterns</a:t>
-            </a:r>
-            <a:endParaRPr lang="en-US" sz="1700" dirty="0"/>
-          </a:p>
-        </p:txBody>
-      </p:sp>
-      <p:pic>
-        <p:nvPicPr>
-          <p:cNvPr id="9" name="Image 2" descr="preencoded.png">    </p:cNvPr>
+          <p:cNvPr id="5" name="Image 0" descr="preencoded.png"/>
           <p:cNvPicPr>
             <a:picLocks noChangeAspect="1"/>
           </p:cNvPicPr>
@@ -5936,7 +8168,7 @@
       </p:pic>
       <p:pic>
         <p:nvPicPr>
-          <p:cNvPr id="10" name="Image 3" descr="preencoded.png">    </p:cNvPr>
+          <p:cNvPr id="6" name="Image 1" descr="preencoded.png"/>
           <p:cNvPicPr>
             <a:picLocks noChangeAspect="1"/>
           </p:cNvPicPr>
@@ -5950,7 +8182,7 @@
         </p:blipFill>
         <p:spPr>
           <a:xfrm>
-            <a:off x="8467308" y="3561457"/>
+            <a:off x="6229290" y="3170813"/>
             <a:ext cx="324088" cy="405170"/>
           </a:xfrm>
           <a:prstGeom prst="rect">
@@ -5960,14 +8192,14 @@
       </p:pic>
       <p:sp>
         <p:nvSpPr>
-          <p:cNvPr id="11" name="Text 5"/>
-          <p:cNvSpPr/>
-          <p:nvPr/>
-        </p:nvSpPr>
-        <p:spPr>
-          <a:xfrm>
-            <a:off x="9934932" y="5326618"/>
-            <a:ext cx="2850713" cy="356235"/>
+          <p:cNvPr id="7" name="Text 3"/>
+          <p:cNvSpPr/>
+          <p:nvPr/>
+        </p:nvSpPr>
+        <p:spPr>
+          <a:xfrm>
+            <a:off x="9934932" y="3042642"/>
+            <a:ext cx="2901434" cy="356235"/>
           </a:xfrm>
           <a:prstGeom prst="rect">
             <a:avLst/>
@@ -5979,7 +8211,7 @@
           <a:bodyPr wrap="none" lIns="0" tIns="0" rIns="0" bIns="0" rtlCol="0" anchor="t"/>
           <a:lstStyle/>
           <a:p>
-            <a:pPr algn="l" indent="0" marL="0">
+            <a:pPr marL="0" indent="0" algn="l">
               <a:lnSpc>
                 <a:spcPts val="2800"/>
               </a:lnSpc>
@@ -5994,7 +8226,7 @@
                 <a:ea typeface="Barlow Bold" pitchFamily="34" charset="-122"/>
                 <a:cs typeface="Barlow Bold" pitchFamily="34" charset="-120"/>
               </a:rPr>
-              <a:t>Minimum Temperature</a:t>
+              <a:t>Maximum Temperature</a:t>
             </a:r>
             <a:endParaRPr lang="en-US" sz="2200" dirty="0"/>
           </a:p>
@@ -6002,26 +8234,26 @@
       </p:sp>
       <p:sp>
         <p:nvSpPr>
-          <p:cNvPr id="12" name="Text 6"/>
-          <p:cNvSpPr/>
-          <p:nvPr/>
-        </p:nvSpPr>
-        <p:spPr>
-          <a:xfrm>
-            <a:off x="9934932" y="5812750"/>
-            <a:ext cx="3937159" cy="693420"/>
-          </a:xfrm>
-          <a:prstGeom prst="rect">
-            <a:avLst/>
-          </a:prstGeom>
-          <a:noFill/>
-          <a:ln/>
-        </p:spPr>
-        <p:txBody>
-          <a:bodyPr wrap="square" lIns="0" tIns="0" rIns="0" bIns="0" rtlCol="0" anchor="t"/>
-          <a:lstStyle/>
-          <a:p>
-            <a:pPr algn="l" indent="0" marL="0">
+          <p:cNvPr id="8" name="Text 4"/>
+          <p:cNvSpPr/>
+          <p:nvPr/>
+        </p:nvSpPr>
+        <p:spPr>
+          <a:xfrm>
+            <a:off x="9934932" y="3528774"/>
+            <a:ext cx="3937159" cy="346710"/>
+          </a:xfrm>
+          <a:prstGeom prst="rect">
+            <a:avLst/>
+          </a:prstGeom>
+          <a:noFill/>
+          <a:ln/>
+        </p:spPr>
+        <p:txBody>
+          <a:bodyPr wrap="none" lIns="0" tIns="0" rIns="0" bIns="0" rtlCol="0" anchor="t"/>
+          <a:lstStyle/>
+          <a:p>
+            <a:pPr marL="0" indent="0" algn="l">
               <a:lnSpc>
                 <a:spcPts val="2700"/>
               </a:lnSpc>
@@ -6036,7 +8268,7 @@
                 <a:ea typeface="Montserrat" pitchFamily="34" charset="-122"/>
                 <a:cs typeface="Montserrat" pitchFamily="34" charset="-120"/>
               </a:rPr>
-              <a:t>Impacts morning commute conditions</a:t>
+              <a:t>Affects comfort and travel patterns</a:t>
             </a:r>
             <a:endParaRPr lang="en-US" sz="1700" dirty="0"/>
           </a:p>
@@ -6044,7 +8276,7 @@
       </p:sp>
       <p:pic>
         <p:nvPicPr>
-          <p:cNvPr id="13" name="Image 4" descr="preencoded.png">    </p:cNvPr>
+          <p:cNvPr id="9" name="Image 2" descr="preencoded.png"/>
           <p:cNvPicPr>
             <a:picLocks noChangeAspect="1"/>
           </p:cNvPicPr>
@@ -6068,7 +8300,7 @@
       </p:pic>
       <p:pic>
         <p:nvPicPr>
-          <p:cNvPr id="14" name="Image 5" descr="preencoded.png">    </p:cNvPr>
+          <p:cNvPr id="10" name="Image 3" descr="preencoded.png"/>
           <p:cNvPicPr>
             <a:picLocks noChangeAspect="1"/>
           </p:cNvPicPr>
@@ -6082,7 +8314,7 @@
         </p:blipFill>
         <p:spPr>
           <a:xfrm>
-            <a:off x="8076664" y="5799475"/>
+            <a:off x="8467308" y="3561457"/>
             <a:ext cx="324088" cy="405170"/>
           </a:xfrm>
           <a:prstGeom prst="rect">
@@ -6092,13 +8324,13 @@
       </p:pic>
       <p:sp>
         <p:nvSpPr>
-          <p:cNvPr id="15" name="Text 7"/>
-          <p:cNvSpPr/>
-          <p:nvPr/>
-        </p:nvSpPr>
-        <p:spPr>
-          <a:xfrm>
-            <a:off x="1844635" y="5499973"/>
+          <p:cNvPr id="11" name="Text 5"/>
+          <p:cNvSpPr/>
+          <p:nvPr/>
+        </p:nvSpPr>
+        <p:spPr>
+          <a:xfrm>
+            <a:off x="9934932" y="5326618"/>
             <a:ext cx="2850713" cy="356235"/>
           </a:xfrm>
           <a:prstGeom prst="rect">
@@ -6111,7 +8343,7 @@
           <a:bodyPr wrap="none" lIns="0" tIns="0" rIns="0" bIns="0" rtlCol="0" anchor="t"/>
           <a:lstStyle/>
           <a:p>
-            <a:pPr algn="r" indent="0" marL="0">
+            <a:pPr marL="0" indent="0" algn="l">
               <a:lnSpc>
                 <a:spcPts val="2800"/>
               </a:lnSpc>
@@ -6126,7 +8358,7 @@
                 <a:ea typeface="Barlow Bold" pitchFamily="34" charset="-122"/>
                 <a:cs typeface="Barlow Bold" pitchFamily="34" charset="-120"/>
               </a:rPr>
-              <a:t>Traffic Adjustment</a:t>
+              <a:t>Minimum Temperature</a:t>
             </a:r>
             <a:endParaRPr lang="en-US" sz="2200" dirty="0"/>
           </a:p>
@@ -6134,26 +8366,26 @@
       </p:sp>
       <p:sp>
         <p:nvSpPr>
-          <p:cNvPr id="16" name="Text 8"/>
-          <p:cNvSpPr/>
-          <p:nvPr/>
-        </p:nvSpPr>
-        <p:spPr>
-          <a:xfrm>
-            <a:off x="758309" y="5986105"/>
-            <a:ext cx="3937040" cy="346710"/>
-          </a:xfrm>
-          <a:prstGeom prst="rect">
-            <a:avLst/>
-          </a:prstGeom>
-          <a:noFill/>
-          <a:ln/>
-        </p:spPr>
-        <p:txBody>
-          <a:bodyPr wrap="none" lIns="0" tIns="0" rIns="0" bIns="0" rtlCol="0" anchor="t"/>
-          <a:lstStyle/>
-          <a:p>
-            <a:pPr algn="r" indent="0" marL="0">
+          <p:cNvPr id="12" name="Text 6"/>
+          <p:cNvSpPr/>
+          <p:nvPr/>
+        </p:nvSpPr>
+        <p:spPr>
+          <a:xfrm>
+            <a:off x="9934932" y="5812750"/>
+            <a:ext cx="3937159" cy="693420"/>
+          </a:xfrm>
+          <a:prstGeom prst="rect">
+            <a:avLst/>
+          </a:prstGeom>
+          <a:noFill/>
+          <a:ln/>
+        </p:spPr>
+        <p:txBody>
+          <a:bodyPr wrap="square" lIns="0" tIns="0" rIns="0" bIns="0" rtlCol="0" anchor="t"/>
+          <a:lstStyle/>
+          <a:p>
+            <a:pPr marL="0" indent="0" algn="l">
               <a:lnSpc>
                 <a:spcPts val="2700"/>
               </a:lnSpc>
@@ -6168,7 +8400,7 @@
                 <a:ea typeface="Montserrat" pitchFamily="34" charset="-122"/>
                 <a:cs typeface="Montserrat" pitchFamily="34" charset="-120"/>
               </a:rPr>
-              <a:t>Weather-aware volume prediction</a:t>
+              <a:t>Impacts morning commute conditions</a:t>
             </a:r>
             <a:endParaRPr lang="en-US" sz="1700" dirty="0"/>
           </a:p>
@@ -6176,7 +8408,7 @@
       </p:sp>
       <p:pic>
         <p:nvPicPr>
-          <p:cNvPr id="17" name="Image 6" descr="preencoded.png">    </p:cNvPr>
+          <p:cNvPr id="13" name="Image 4" descr="preencoded.png"/>
           <p:cNvPicPr>
             <a:picLocks noChangeAspect="1"/>
           </p:cNvPicPr>
@@ -6200,7 +8432,7 @@
       </p:pic>
       <p:pic>
         <p:nvPicPr>
-          <p:cNvPr id="18" name="Image 7" descr="preencoded.png">    </p:cNvPr>
+          <p:cNvPr id="14" name="Image 5" descr="preencoded.png"/>
           <p:cNvPicPr>
             <a:picLocks noChangeAspect="1"/>
           </p:cNvPicPr>
@@ -6214,7 +8446,7 @@
         </p:blipFill>
         <p:spPr>
           <a:xfrm>
-            <a:off x="5838646" y="5408831"/>
+            <a:off x="8076664" y="5799475"/>
             <a:ext cx="324088" cy="405170"/>
           </a:xfrm>
           <a:prstGeom prst="rect">
@@ -6222,41 +8454,16 @@
           </a:prstGeom>
         </p:spPr>
       </p:pic>
-    </p:spTree>
-  </p:cSld>
-  <p:clrMapOvr>
-    <a:masterClrMapping/>
-  </p:clrMapOvr>
-</p:sld>
-</file>
-
-<file path=ppt/slides/slide8.xml><?xml version="1.0" encoding="utf-8"?>
-<p:sld xmlns:a="http://schemas.openxmlformats.org/drawingml/2006/main" xmlns:r="http://schemas.openxmlformats.org/officeDocument/2006/relationships" xmlns:p="http://schemas.openxmlformats.org/presentationml/2006/main">
-  <p:cSld name="Slide 8">
-    <p:spTree>
-      <p:nvGrpSpPr>
-        <p:cNvPr id="1" name=""/>
-        <p:cNvGrpSpPr/>
-        <p:nvPr/>
-      </p:nvGrpSpPr>
-      <p:grpSpPr>
-        <a:xfrm>
-          <a:off x="0" y="0"/>
-          <a:ext cx="0" cy="0"/>
-          <a:chOff x="0" y="0"/>
-          <a:chExt cx="0" cy="0"/>
-        </a:xfrm>
-      </p:grpSpPr>
-      <p:sp>
-        <p:nvSpPr>
-          <p:cNvPr id="2" name="Text 0"/>
-          <p:cNvSpPr/>
-          <p:nvPr/>
-        </p:nvSpPr>
-        <p:spPr>
-          <a:xfrm>
-            <a:off x="758309" y="1588770"/>
-            <a:ext cx="5701546" cy="712708"/>
+      <p:sp>
+        <p:nvSpPr>
+          <p:cNvPr id="15" name="Text 7"/>
+          <p:cNvSpPr/>
+          <p:nvPr/>
+        </p:nvSpPr>
+        <p:spPr>
+          <a:xfrm>
+            <a:off x="1844635" y="5499973"/>
+            <a:ext cx="2850713" cy="356235"/>
           </a:xfrm>
           <a:prstGeom prst="rect">
             <a:avLst/>
@@ -6268,45 +8475,87 @@
           <a:bodyPr wrap="none" lIns="0" tIns="0" rIns="0" bIns="0" rtlCol="0" anchor="t"/>
           <a:lstStyle/>
           <a:p>
-            <a:pPr algn="l" indent="0" marL="0">
+            <a:pPr marL="0" indent="0" algn="r">
               <a:lnSpc>
-                <a:spcPts val="5600"/>
+                <a:spcPts val="2800"/>
               </a:lnSpc>
               <a:buNone/>
             </a:pPr>
             <a:r>
-              <a:rPr lang="en-US" sz="4450" b="1" dirty="0">
-                <a:solidFill>
-                  <a:srgbClr val="9998FF"/>
+              <a:rPr lang="en-US" sz="2200" b="1" dirty="0">
+                <a:solidFill>
+                  <a:srgbClr val="EEEFF5"/>
                 </a:solidFill>
                 <a:latin typeface="Barlow Bold" pitchFamily="34" charset="0"/>
                 <a:ea typeface="Barlow Bold" pitchFamily="34" charset="-122"/>
                 <a:cs typeface="Barlow Bold" pitchFamily="34" charset="-120"/>
               </a:rPr>
-              <a:t>Business Applications</a:t>
-            </a:r>
-            <a:endParaRPr lang="en-US" sz="4450" dirty="0"/>
+              <a:t>Traffic Adjustment</a:t>
+            </a:r>
+            <a:endParaRPr lang="en-US" sz="2200" dirty="0"/>
+          </a:p>
+        </p:txBody>
+      </p:sp>
+      <p:sp>
+        <p:nvSpPr>
+          <p:cNvPr id="16" name="Text 8"/>
+          <p:cNvSpPr/>
+          <p:nvPr/>
+        </p:nvSpPr>
+        <p:spPr>
+          <a:xfrm>
+            <a:off x="758309" y="5986105"/>
+            <a:ext cx="3937040" cy="346710"/>
+          </a:xfrm>
+          <a:prstGeom prst="rect">
+            <a:avLst/>
+          </a:prstGeom>
+          <a:noFill/>
+          <a:ln/>
+        </p:spPr>
+        <p:txBody>
+          <a:bodyPr wrap="none" lIns="0" tIns="0" rIns="0" bIns="0" rtlCol="0" anchor="t"/>
+          <a:lstStyle/>
+          <a:p>
+            <a:pPr marL="0" indent="0" algn="r">
+              <a:lnSpc>
+                <a:spcPts val="2700"/>
+              </a:lnSpc>
+              <a:buNone/>
+            </a:pPr>
+            <a:r>
+              <a:rPr lang="en-US" sz="1700" dirty="0">
+                <a:solidFill>
+                  <a:srgbClr val="EEEFF5"/>
+                </a:solidFill>
+                <a:latin typeface="Montserrat" pitchFamily="34" charset="0"/>
+                <a:ea typeface="Montserrat" pitchFamily="34" charset="-122"/>
+                <a:cs typeface="Montserrat" pitchFamily="34" charset="-120"/>
+              </a:rPr>
+              <a:t>Weather-aware volume prediction</a:t>
+            </a:r>
+            <a:endParaRPr lang="en-US" sz="1700" dirty="0"/>
           </a:p>
         </p:txBody>
       </p:sp>
       <p:pic>
         <p:nvPicPr>
-          <p:cNvPr id="3" name="Image 0" descr="preencoded.png">    </p:cNvPr>
+          <p:cNvPr id="17" name="Image 6" descr="preencoded.png"/>
           <p:cNvPicPr>
             <a:picLocks noChangeAspect="1"/>
           </p:cNvPicPr>
           <p:nvPr/>
         </p:nvPicPr>
         <p:blipFill>
-          <a:blip r:embed="rId1"/>
+          <a:blip r:embed="rId9"/>
           <a:stretch>
             <a:fillRect/>
           </a:stretch>
         </p:blipFill>
         <p:spPr>
           <a:xfrm>
-            <a:off x="2954774" y="2734747"/>
-            <a:ext cx="2163723" cy="1265992"/>
+            <a:off x="5020270" y="2392918"/>
+            <a:ext cx="4589740" cy="4589740"/>
           </a:xfrm>
           <a:prstGeom prst="rect">
             <a:avLst/>
@@ -6315,889 +8564,28 @@
       </p:pic>
       <p:pic>
         <p:nvPicPr>
-          <p:cNvPr id="4" name="Image 1" descr="preencoded.png">    </p:cNvPr>
+          <p:cNvPr id="18" name="Image 7" descr="preencoded.png"/>
           <p:cNvPicPr>
             <a:picLocks noChangeAspect="1"/>
           </p:cNvPicPr>
           <p:nvPr/>
         </p:nvPicPr>
         <p:blipFill>
-          <a:blip r:embed="rId2"/>
+          <a:blip r:embed="rId10"/>
           <a:stretch>
             <a:fillRect/>
           </a:stretch>
         </p:blipFill>
         <p:spPr>
           <a:xfrm>
-            <a:off x="3884176" y="3334703"/>
-            <a:ext cx="304681" cy="380762"/>
+            <a:off x="5838646" y="5408831"/>
+            <a:ext cx="324088" cy="405170"/>
           </a:xfrm>
           <a:prstGeom prst="rect">
             <a:avLst/>
           </a:prstGeom>
         </p:spPr>
       </p:pic>
-      <p:sp>
-        <p:nvSpPr>
-          <p:cNvPr id="5" name="Text 1"/>
-          <p:cNvSpPr/>
-          <p:nvPr/>
-        </p:nvSpPr>
-        <p:spPr>
-          <a:xfrm>
-            <a:off x="5335072" y="2951321"/>
-            <a:ext cx="2850713" cy="356235"/>
-          </a:xfrm>
-          <a:prstGeom prst="rect">
-            <a:avLst/>
-          </a:prstGeom>
-          <a:noFill/>
-          <a:ln/>
-        </p:spPr>
-        <p:txBody>
-          <a:bodyPr wrap="none" lIns="0" tIns="0" rIns="0" bIns="0" rtlCol="0" anchor="t"/>
-          <a:lstStyle/>
-          <a:p>
-            <a:pPr algn="l" indent="0" marL="0">
-              <a:lnSpc>
-                <a:spcPts val="2800"/>
-              </a:lnSpc>
-              <a:buNone/>
-            </a:pPr>
-            <a:r>
-              <a:rPr lang="en-US" sz="2200" b="1" dirty="0">
-                <a:solidFill>
-                  <a:srgbClr val="EEEFF5"/>
-                </a:solidFill>
-                <a:latin typeface="Barlow Bold" pitchFamily="34" charset="0"/>
-                <a:ea typeface="Barlow Bold" pitchFamily="34" charset="-122"/>
-                <a:cs typeface="Barlow Bold" pitchFamily="34" charset="-120"/>
-              </a:rPr>
-              <a:t>Smart City Integration</a:t>
-            </a:r>
-            <a:endParaRPr lang="en-US" sz="2200" dirty="0"/>
-          </a:p>
-        </p:txBody>
-      </p:sp>
-      <p:sp>
-        <p:nvSpPr>
-          <p:cNvPr id="6" name="Text 2"/>
-          <p:cNvSpPr/>
-          <p:nvPr/>
-        </p:nvSpPr>
-        <p:spPr>
-          <a:xfrm>
-            <a:off x="5335072" y="3437453"/>
-            <a:ext cx="3131106" cy="346710"/>
-          </a:xfrm>
-          <a:prstGeom prst="rect">
-            <a:avLst/>
-          </a:prstGeom>
-          <a:noFill/>
-          <a:ln/>
-        </p:spPr>
-        <p:txBody>
-          <a:bodyPr wrap="none" lIns="0" tIns="0" rIns="0" bIns="0" rtlCol="0" anchor="t"/>
-          <a:lstStyle/>
-          <a:p>
-            <a:pPr algn="l" indent="0" marL="0">
-              <a:lnSpc>
-                <a:spcPts val="2700"/>
-              </a:lnSpc>
-              <a:buNone/>
-            </a:pPr>
-            <a:r>
-              <a:rPr lang="en-US" sz="1700" dirty="0">
-                <a:solidFill>
-                  <a:srgbClr val="EEEFF5"/>
-                </a:solidFill>
-                <a:latin typeface="Montserrat" pitchFamily="34" charset="0"/>
-                <a:ea typeface="Montserrat" pitchFamily="34" charset="-122"/>
-                <a:cs typeface="Montserrat" pitchFamily="34" charset="-120"/>
-              </a:rPr>
-              <a:t>Future-proof urban planning</a:t>
-            </a:r>
-            <a:endParaRPr lang="en-US" sz="1700" dirty="0"/>
-          </a:p>
-        </p:txBody>
-      </p:sp>
-      <p:sp>
-        <p:nvSpPr>
-          <p:cNvPr id="7" name="Shape 3"/>
-          <p:cNvSpPr/>
-          <p:nvPr/>
-        </p:nvSpPr>
-        <p:spPr>
-          <a:xfrm>
-            <a:off x="5172551" y="4012525"/>
-            <a:ext cx="8645485" cy="15240"/>
-          </a:xfrm>
-          <a:prstGeom prst="roundRect">
-            <a:avLst>
-              <a:gd name="adj" fmla="val 1279500"/>
-            </a:avLst>
-          </a:prstGeom>
-          <a:solidFill>
-            <a:srgbClr val="60646A"/>
-          </a:solidFill>
-          <a:ln/>
-        </p:spPr>
-      </p:sp>
-      <p:pic>
-        <p:nvPicPr>
-          <p:cNvPr id="8" name="Image 2" descr="preencoded.png">    </p:cNvPr>
-          <p:cNvPicPr>
-            <a:picLocks noChangeAspect="1"/>
-          </p:cNvPicPr>
-          <p:nvPr/>
-        </p:nvPicPr>
-        <p:blipFill>
-          <a:blip r:embed="rId3"/>
-          <a:stretch>
-            <a:fillRect/>
-          </a:stretch>
-        </p:blipFill>
-        <p:spPr>
-          <a:xfrm>
-            <a:off x="1872972" y="4054793"/>
-            <a:ext cx="4327446" cy="1265992"/>
-          </a:xfrm>
-          <a:prstGeom prst="rect">
-            <a:avLst/>
-          </a:prstGeom>
-        </p:spPr>
-      </p:pic>
-      <p:pic>
-        <p:nvPicPr>
-          <p:cNvPr id="9" name="Image 3" descr="preencoded.png">    </p:cNvPr>
-          <p:cNvPicPr>
-            <a:picLocks noChangeAspect="1"/>
-          </p:cNvPicPr>
-          <p:nvPr/>
-        </p:nvPicPr>
-        <p:blipFill>
-          <a:blip r:embed="rId4"/>
-          <a:stretch>
-            <a:fillRect/>
-          </a:stretch>
-        </p:blipFill>
-        <p:spPr>
-          <a:xfrm>
-            <a:off x="3884295" y="4497348"/>
-            <a:ext cx="304681" cy="380762"/>
-          </a:xfrm>
-          <a:prstGeom prst="rect">
-            <a:avLst/>
-          </a:prstGeom>
-        </p:spPr>
-      </p:pic>
-      <p:sp>
-        <p:nvSpPr>
-          <p:cNvPr id="10" name="Text 4"/>
-          <p:cNvSpPr/>
-          <p:nvPr/>
-        </p:nvSpPr>
-        <p:spPr>
-          <a:xfrm>
-            <a:off x="6416993" y="4271367"/>
-            <a:ext cx="3190161" cy="356235"/>
-          </a:xfrm>
-          <a:prstGeom prst="rect">
-            <a:avLst/>
-          </a:prstGeom>
-          <a:noFill/>
-          <a:ln/>
-        </p:spPr>
-        <p:txBody>
-          <a:bodyPr wrap="none" lIns="0" tIns="0" rIns="0" bIns="0" rtlCol="0" anchor="t"/>
-          <a:lstStyle/>
-          <a:p>
-            <a:pPr algn="l" indent="0" marL="0">
-              <a:lnSpc>
-                <a:spcPts val="2800"/>
-              </a:lnSpc>
-              <a:buNone/>
-            </a:pPr>
-            <a:r>
-              <a:rPr lang="en-US" sz="2200" b="1" dirty="0">
-                <a:solidFill>
-                  <a:srgbClr val="EEEFF5"/>
-                </a:solidFill>
-                <a:latin typeface="Barlow Bold" pitchFamily="34" charset="0"/>
-                <a:ea typeface="Barlow Bold" pitchFamily="34" charset="-122"/>
-                <a:cs typeface="Barlow Bold" pitchFamily="34" charset="-120"/>
-              </a:rPr>
-              <a:t>Adaptive Traffic Systems</a:t>
-            </a:r>
-            <a:endParaRPr lang="en-US" sz="2200" dirty="0"/>
-          </a:p>
-        </p:txBody>
-      </p:sp>
-      <p:sp>
-        <p:nvSpPr>
-          <p:cNvPr id="11" name="Text 5"/>
-          <p:cNvSpPr/>
-          <p:nvPr/>
-        </p:nvSpPr>
-        <p:spPr>
-          <a:xfrm>
-            <a:off x="6416993" y="4757499"/>
-            <a:ext cx="3203853" cy="346710"/>
-          </a:xfrm>
-          <a:prstGeom prst="rect">
-            <a:avLst/>
-          </a:prstGeom>
-          <a:noFill/>
-          <a:ln/>
-        </p:spPr>
-        <p:txBody>
-          <a:bodyPr wrap="none" lIns="0" tIns="0" rIns="0" bIns="0" rtlCol="0" anchor="t"/>
-          <a:lstStyle/>
-          <a:p>
-            <a:pPr algn="l" indent="0" marL="0">
-              <a:lnSpc>
-                <a:spcPts val="2700"/>
-              </a:lnSpc>
-              <a:buNone/>
-            </a:pPr>
-            <a:r>
-              <a:rPr lang="en-US" sz="1700" dirty="0">
-                <a:solidFill>
-                  <a:srgbClr val="EEEFF5"/>
-                </a:solidFill>
-                <a:latin typeface="Montserrat" pitchFamily="34" charset="0"/>
-                <a:ea typeface="Montserrat" pitchFamily="34" charset="-122"/>
-                <a:cs typeface="Montserrat" pitchFamily="34" charset="-120"/>
-              </a:rPr>
-              <a:t>Real-time signal optimization</a:t>
-            </a:r>
-            <a:endParaRPr lang="en-US" sz="1700" dirty="0"/>
-          </a:p>
-        </p:txBody>
-      </p:sp>
-      <p:sp>
-        <p:nvSpPr>
-          <p:cNvPr id="12" name="Shape 6"/>
-          <p:cNvSpPr/>
-          <p:nvPr/>
-        </p:nvSpPr>
-        <p:spPr>
-          <a:xfrm>
-            <a:off x="6254472" y="5332571"/>
-            <a:ext cx="7563564" cy="15240"/>
-          </a:xfrm>
-          <a:prstGeom prst="roundRect">
-            <a:avLst>
-              <a:gd name="adj" fmla="val 1279500"/>
-            </a:avLst>
-          </a:prstGeom>
-          <a:solidFill>
-            <a:srgbClr val="60646A"/>
-          </a:solidFill>
-          <a:ln/>
-        </p:spPr>
-      </p:sp>
-      <p:pic>
-        <p:nvPicPr>
-          <p:cNvPr id="13" name="Image 4" descr="preencoded.png">    </p:cNvPr>
-          <p:cNvPicPr>
-            <a:picLocks noChangeAspect="1"/>
-          </p:cNvPicPr>
-          <p:nvPr/>
-        </p:nvPicPr>
-        <p:blipFill>
-          <a:blip r:embed="rId5"/>
-          <a:stretch>
-            <a:fillRect/>
-          </a:stretch>
-        </p:blipFill>
-        <p:spPr>
-          <a:xfrm>
-            <a:off x="791051" y="5374838"/>
-            <a:ext cx="6491288" cy="1265992"/>
-          </a:xfrm>
-          <a:prstGeom prst="rect">
-            <a:avLst/>
-          </a:prstGeom>
-        </p:spPr>
-      </p:pic>
-      <p:pic>
-        <p:nvPicPr>
-          <p:cNvPr id="14" name="Image 5" descr="preencoded.png">    </p:cNvPr>
-          <p:cNvPicPr>
-            <a:picLocks noChangeAspect="1"/>
-          </p:cNvPicPr>
-          <p:nvPr/>
-        </p:nvPicPr>
-        <p:blipFill>
-          <a:blip r:embed="rId6"/>
-          <a:stretch>
-            <a:fillRect/>
-          </a:stretch>
-        </p:blipFill>
-        <p:spPr>
-          <a:xfrm>
-            <a:off x="3884295" y="5817394"/>
-            <a:ext cx="304681" cy="380762"/>
-          </a:xfrm>
-          <a:prstGeom prst="rect">
-            <a:avLst/>
-          </a:prstGeom>
-        </p:spPr>
-      </p:pic>
-      <p:sp>
-        <p:nvSpPr>
-          <p:cNvPr id="15" name="Text 7"/>
-          <p:cNvSpPr/>
-          <p:nvPr/>
-        </p:nvSpPr>
-        <p:spPr>
-          <a:xfrm>
-            <a:off x="7498913" y="5591413"/>
-            <a:ext cx="2850713" cy="356235"/>
-          </a:xfrm>
-          <a:prstGeom prst="rect">
-            <a:avLst/>
-          </a:prstGeom>
-          <a:noFill/>
-          <a:ln/>
-        </p:spPr>
-        <p:txBody>
-          <a:bodyPr wrap="none" lIns="0" tIns="0" rIns="0" bIns="0" rtlCol="0" anchor="t"/>
-          <a:lstStyle/>
-          <a:p>
-            <a:pPr algn="l" indent="0" marL="0">
-              <a:lnSpc>
-                <a:spcPts val="2800"/>
-              </a:lnSpc>
-              <a:buNone/>
-            </a:pPr>
-            <a:r>
-              <a:rPr lang="en-US" sz="2200" b="1" dirty="0">
-                <a:solidFill>
-                  <a:srgbClr val="EEEFF5"/>
-                </a:solidFill>
-                <a:latin typeface="Barlow Bold" pitchFamily="34" charset="0"/>
-                <a:ea typeface="Barlow Bold" pitchFamily="34" charset="-122"/>
-                <a:cs typeface="Barlow Bold" pitchFamily="34" charset="-120"/>
-              </a:rPr>
-              <a:t>Navigation Platforms</a:t>
-            </a:r>
-            <a:endParaRPr lang="en-US" sz="2200" dirty="0"/>
-          </a:p>
-        </p:txBody>
-      </p:sp>
-      <p:sp>
-        <p:nvSpPr>
-          <p:cNvPr id="16" name="Text 8"/>
-          <p:cNvSpPr/>
-          <p:nvPr/>
-        </p:nvSpPr>
-        <p:spPr>
-          <a:xfrm>
-            <a:off x="7498913" y="6077545"/>
-            <a:ext cx="3819168" cy="346710"/>
-          </a:xfrm>
-          <a:prstGeom prst="rect">
-            <a:avLst/>
-          </a:prstGeom>
-          <a:noFill/>
-          <a:ln/>
-        </p:spPr>
-        <p:txBody>
-          <a:bodyPr wrap="none" lIns="0" tIns="0" rIns="0" bIns="0" rtlCol="0" anchor="t"/>
-          <a:lstStyle/>
-          <a:p>
-            <a:pPr algn="l" indent="0" marL="0">
-              <a:lnSpc>
-                <a:spcPts val="2700"/>
-              </a:lnSpc>
-              <a:buNone/>
-            </a:pPr>
-            <a:r>
-              <a:rPr lang="en-US" sz="1700" dirty="0">
-                <a:solidFill>
-                  <a:srgbClr val="EEEFF5"/>
-                </a:solidFill>
-                <a:latin typeface="Montserrat" pitchFamily="34" charset="0"/>
-                <a:ea typeface="Montserrat" pitchFamily="34" charset="-122"/>
-                <a:cs typeface="Montserrat" pitchFamily="34" charset="-120"/>
-              </a:rPr>
-              <a:t>Enhanced route recommendations</a:t>
-            </a:r>
-            <a:endParaRPr lang="en-US" sz="1700" dirty="0"/>
-          </a:p>
-        </p:txBody>
-      </p:sp>
-    </p:spTree>
-  </p:cSld>
-  <p:clrMapOvr>
-    <a:masterClrMapping/>
-  </p:clrMapOvr>
-</p:sld>
-</file>
-
-<file path=ppt/slides/slide9.xml><?xml version="1.0" encoding="utf-8"?>
-<p:sld xmlns:a="http://schemas.openxmlformats.org/drawingml/2006/main" xmlns:r="http://schemas.openxmlformats.org/officeDocument/2006/relationships" xmlns:p="http://schemas.openxmlformats.org/presentationml/2006/main">
-  <p:cSld name="Slide 9">
-    <p:spTree>
-      <p:nvGrpSpPr>
-        <p:cNvPr id="1" name=""/>
-        <p:cNvGrpSpPr/>
-        <p:nvPr/>
-      </p:nvGrpSpPr>
-      <p:grpSpPr>
-        <a:xfrm>
-          <a:off x="0" y="0"/>
-          <a:ext cx="0" cy="0"/>
-          <a:chOff x="0" y="0"/>
-          <a:chExt cx="0" cy="0"/>
-        </a:xfrm>
-      </p:grpSpPr>
-      <p:pic>
-        <p:nvPicPr>
-          <p:cNvPr id="2" name="Image 0" descr="preencoded.png">    </p:cNvPr>
-          <p:cNvPicPr>
-            <a:picLocks noChangeAspect="1"/>
-          </p:cNvPicPr>
-          <p:nvPr/>
-        </p:nvPicPr>
-        <p:blipFill>
-          <a:blip r:embed="rId1"/>
-          <a:stretch>
-            <a:fillRect/>
-          </a:stretch>
-        </p:blipFill>
-        <p:spPr>
-          <a:xfrm>
-            <a:off x="9144000" y="0"/>
-            <a:ext cx="5486400" cy="8229600"/>
-          </a:xfrm>
-          <a:prstGeom prst="rect">
-            <a:avLst/>
-          </a:prstGeom>
-        </p:spPr>
-      </p:pic>
-      <p:sp>
-        <p:nvSpPr>
-          <p:cNvPr id="3" name="Text 0"/>
-          <p:cNvSpPr/>
-          <p:nvPr/>
-        </p:nvSpPr>
-        <p:spPr>
-          <a:xfrm>
-            <a:off x="758309" y="1344335"/>
-            <a:ext cx="5701546" cy="712708"/>
-          </a:xfrm>
-          <a:prstGeom prst="rect">
-            <a:avLst/>
-          </a:prstGeom>
-          <a:noFill/>
-          <a:ln/>
-        </p:spPr>
-        <p:txBody>
-          <a:bodyPr wrap="none" lIns="0" tIns="0" rIns="0" bIns="0" rtlCol="0" anchor="t"/>
-          <a:lstStyle/>
-          <a:p>
-            <a:pPr algn="l" indent="0" marL="0">
-              <a:lnSpc>
-                <a:spcPts val="5600"/>
-              </a:lnSpc>
-              <a:buNone/>
-            </a:pPr>
-            <a:r>
-              <a:rPr lang="en-US" sz="4450" b="1" dirty="0">
-                <a:solidFill>
-                  <a:srgbClr val="9998FF"/>
-                </a:solidFill>
-                <a:latin typeface="Barlow Bold" pitchFamily="34" charset="0"/>
-                <a:ea typeface="Barlow Bold" pitchFamily="34" charset="-122"/>
-                <a:cs typeface="Barlow Bold" pitchFamily="34" charset="-120"/>
-              </a:rPr>
-              <a:t>Revenue Potential</a:t>
-            </a:r>
-            <a:endParaRPr lang="en-US" sz="4450" dirty="0"/>
-          </a:p>
-        </p:txBody>
-      </p:sp>
-      <p:sp>
-        <p:nvSpPr>
-          <p:cNvPr id="4" name="Text 1"/>
-          <p:cNvSpPr/>
-          <p:nvPr/>
-        </p:nvSpPr>
-        <p:spPr>
-          <a:xfrm>
-            <a:off x="758309" y="2490192"/>
-            <a:ext cx="3651171" cy="714970"/>
-          </a:xfrm>
-          <a:prstGeom prst="rect">
-            <a:avLst/>
-          </a:prstGeom>
-          <a:noFill/>
-          <a:ln/>
-        </p:spPr>
-        <p:txBody>
-          <a:bodyPr wrap="none" lIns="0" tIns="0" rIns="0" bIns="0" rtlCol="0" anchor="t"/>
-          <a:lstStyle/>
-          <a:p>
-            <a:pPr algn="ctr" indent="0" marL="0">
-              <a:lnSpc>
-                <a:spcPts val="5600"/>
-              </a:lnSpc>
-              <a:buNone/>
-            </a:pPr>
-            <a:r>
-              <a:rPr lang="en-US" sz="5600" b="1" dirty="0">
-                <a:solidFill>
-                  <a:srgbClr val="EEEFF5"/>
-                </a:solidFill>
-                <a:latin typeface="Barlow Bold" pitchFamily="34" charset="0"/>
-                <a:ea typeface="Barlow Bold" pitchFamily="34" charset="-122"/>
-                <a:cs typeface="Barlow Bold" pitchFamily="34" charset="-120"/>
-              </a:rPr>
-              <a:t>$2.5M</a:t>
-            </a:r>
-            <a:endParaRPr lang="en-US" sz="5600" dirty="0"/>
-          </a:p>
-        </p:txBody>
-      </p:sp>
-      <p:sp>
-        <p:nvSpPr>
-          <p:cNvPr id="5" name="Text 2"/>
-          <p:cNvSpPr/>
-          <p:nvPr/>
-        </p:nvSpPr>
-        <p:spPr>
-          <a:xfrm>
-            <a:off x="1158478" y="3475792"/>
-            <a:ext cx="2850713" cy="356235"/>
-          </a:xfrm>
-          <a:prstGeom prst="rect">
-            <a:avLst/>
-          </a:prstGeom>
-          <a:noFill/>
-          <a:ln/>
-        </p:spPr>
-        <p:txBody>
-          <a:bodyPr wrap="none" lIns="0" tIns="0" rIns="0" bIns="0" rtlCol="0" anchor="t"/>
-          <a:lstStyle/>
-          <a:p>
-            <a:pPr algn="ctr" indent="0" marL="0">
-              <a:lnSpc>
-                <a:spcPts val="2800"/>
-              </a:lnSpc>
-              <a:buNone/>
-            </a:pPr>
-            <a:r>
-              <a:rPr lang="en-US" sz="2200" b="1" dirty="0">
-                <a:solidFill>
-                  <a:srgbClr val="EEEFF5"/>
-                </a:solidFill>
-                <a:latin typeface="Barlow Bold" pitchFamily="34" charset="0"/>
-                <a:ea typeface="Barlow Bold" pitchFamily="34" charset="-122"/>
-                <a:cs typeface="Barlow Bold" pitchFamily="34" charset="-120"/>
-              </a:rPr>
-              <a:t>Infrastructure Savings</a:t>
-            </a:r>
-            <a:endParaRPr lang="en-US" sz="2200" dirty="0"/>
-          </a:p>
-        </p:txBody>
-      </p:sp>
-      <p:sp>
-        <p:nvSpPr>
-          <p:cNvPr id="6" name="Text 3"/>
-          <p:cNvSpPr/>
-          <p:nvPr/>
-        </p:nvSpPr>
-        <p:spPr>
-          <a:xfrm>
-            <a:off x="758309" y="3961924"/>
-            <a:ext cx="3651171" cy="346710"/>
-          </a:xfrm>
-          <a:prstGeom prst="rect">
-            <a:avLst/>
-          </a:prstGeom>
-          <a:noFill/>
-          <a:ln/>
-        </p:spPr>
-        <p:txBody>
-          <a:bodyPr wrap="none" lIns="0" tIns="0" rIns="0" bIns="0" rtlCol="0" anchor="t"/>
-          <a:lstStyle/>
-          <a:p>
-            <a:pPr algn="ctr" indent="0" marL="0">
-              <a:lnSpc>
-                <a:spcPts val="2700"/>
-              </a:lnSpc>
-              <a:buNone/>
-            </a:pPr>
-            <a:r>
-              <a:rPr lang="en-US" sz="1700" dirty="0">
-                <a:solidFill>
-                  <a:srgbClr val="EEEFF5"/>
-                </a:solidFill>
-                <a:latin typeface="Montserrat" pitchFamily="34" charset="0"/>
-                <a:ea typeface="Montserrat" pitchFamily="34" charset="-122"/>
-                <a:cs typeface="Montserrat" pitchFamily="34" charset="-120"/>
-              </a:rPr>
-              <a:t>Reduced congestion costs</a:t>
-            </a:r>
-            <a:endParaRPr lang="en-US" sz="1700" dirty="0"/>
-          </a:p>
-        </p:txBody>
-      </p:sp>
-      <p:sp>
-        <p:nvSpPr>
-          <p:cNvPr id="7" name="Text 4"/>
-          <p:cNvSpPr/>
-          <p:nvPr/>
-        </p:nvSpPr>
-        <p:spPr>
-          <a:xfrm>
-            <a:off x="4734401" y="2490192"/>
-            <a:ext cx="3651290" cy="714970"/>
-          </a:xfrm>
-          <a:prstGeom prst="rect">
-            <a:avLst/>
-          </a:prstGeom>
-          <a:noFill/>
-          <a:ln/>
-        </p:spPr>
-        <p:txBody>
-          <a:bodyPr wrap="none" lIns="0" tIns="0" rIns="0" bIns="0" rtlCol="0" anchor="t"/>
-          <a:lstStyle/>
-          <a:p>
-            <a:pPr algn="ctr" indent="0" marL="0">
-              <a:lnSpc>
-                <a:spcPts val="5600"/>
-              </a:lnSpc>
-              <a:buNone/>
-            </a:pPr>
-            <a:r>
-              <a:rPr lang="en-US" sz="5600" b="1" dirty="0">
-                <a:solidFill>
-                  <a:srgbClr val="EEEFF5"/>
-                </a:solidFill>
-                <a:latin typeface="Barlow Bold" pitchFamily="34" charset="0"/>
-                <a:ea typeface="Barlow Bold" pitchFamily="34" charset="-122"/>
-                <a:cs typeface="Barlow Bold" pitchFamily="34" charset="-120"/>
-              </a:rPr>
-              <a:t>15%</a:t>
-            </a:r>
-            <a:endParaRPr lang="en-US" sz="5600" dirty="0"/>
-          </a:p>
-        </p:txBody>
-      </p:sp>
-      <p:sp>
-        <p:nvSpPr>
-          <p:cNvPr id="8" name="Text 5"/>
-          <p:cNvSpPr/>
-          <p:nvPr/>
-        </p:nvSpPr>
-        <p:spPr>
-          <a:xfrm>
-            <a:off x="5134689" y="3475792"/>
-            <a:ext cx="2850713" cy="356235"/>
-          </a:xfrm>
-          <a:prstGeom prst="rect">
-            <a:avLst/>
-          </a:prstGeom>
-          <a:noFill/>
-          <a:ln/>
-        </p:spPr>
-        <p:txBody>
-          <a:bodyPr wrap="none" lIns="0" tIns="0" rIns="0" bIns="0" rtlCol="0" anchor="t"/>
-          <a:lstStyle/>
-          <a:p>
-            <a:pPr algn="ctr" indent="0" marL="0">
-              <a:lnSpc>
-                <a:spcPts val="2800"/>
-              </a:lnSpc>
-              <a:buNone/>
-            </a:pPr>
-            <a:r>
-              <a:rPr lang="en-US" sz="2200" b="1" dirty="0">
-                <a:solidFill>
-                  <a:srgbClr val="EEEFF5"/>
-                </a:solidFill>
-                <a:latin typeface="Barlow Bold" pitchFamily="34" charset="0"/>
-                <a:ea typeface="Barlow Bold" pitchFamily="34" charset="-122"/>
-                <a:cs typeface="Barlow Bold" pitchFamily="34" charset="-120"/>
-              </a:rPr>
-              <a:t>Efficiency Gain</a:t>
-            </a:r>
-            <a:endParaRPr lang="en-US" sz="2200" dirty="0"/>
-          </a:p>
-        </p:txBody>
-      </p:sp>
-      <p:sp>
-        <p:nvSpPr>
-          <p:cNvPr id="9" name="Text 6"/>
-          <p:cNvSpPr/>
-          <p:nvPr/>
-        </p:nvSpPr>
-        <p:spPr>
-          <a:xfrm>
-            <a:off x="4734401" y="3961924"/>
-            <a:ext cx="3651290" cy="346710"/>
-          </a:xfrm>
-          <a:prstGeom prst="rect">
-            <a:avLst/>
-          </a:prstGeom>
-          <a:noFill/>
-          <a:ln/>
-        </p:spPr>
-        <p:txBody>
-          <a:bodyPr wrap="none" lIns="0" tIns="0" rIns="0" bIns="0" rtlCol="0" anchor="t"/>
-          <a:lstStyle/>
-          <a:p>
-            <a:pPr algn="ctr" indent="0" marL="0">
-              <a:lnSpc>
-                <a:spcPts val="2700"/>
-              </a:lnSpc>
-              <a:buNone/>
-            </a:pPr>
-            <a:r>
-              <a:rPr lang="en-US" sz="1700" dirty="0">
-                <a:solidFill>
-                  <a:srgbClr val="EEEFF5"/>
-                </a:solidFill>
-                <a:latin typeface="Montserrat" pitchFamily="34" charset="0"/>
-                <a:ea typeface="Montserrat" pitchFamily="34" charset="-122"/>
-                <a:cs typeface="Montserrat" pitchFamily="34" charset="-120"/>
-              </a:rPr>
-              <a:t>Improved traffic flow</a:t>
-            </a:r>
-            <a:endParaRPr lang="en-US" sz="1700" dirty="0"/>
-          </a:p>
-        </p:txBody>
-      </p:sp>
-      <p:sp>
-        <p:nvSpPr>
-          <p:cNvPr id="10" name="Text 7"/>
-          <p:cNvSpPr/>
-          <p:nvPr/>
-        </p:nvSpPr>
-        <p:spPr>
-          <a:xfrm>
-            <a:off x="2746296" y="5066824"/>
-            <a:ext cx="3651290" cy="714970"/>
-          </a:xfrm>
-          <a:prstGeom prst="rect">
-            <a:avLst/>
-          </a:prstGeom>
-          <a:noFill/>
-          <a:ln/>
-        </p:spPr>
-        <p:txBody>
-          <a:bodyPr wrap="none" lIns="0" tIns="0" rIns="0" bIns="0" rtlCol="0" anchor="t"/>
-          <a:lstStyle/>
-          <a:p>
-            <a:pPr algn="ctr" indent="0" marL="0">
-              <a:lnSpc>
-                <a:spcPts val="5600"/>
-              </a:lnSpc>
-              <a:buNone/>
-            </a:pPr>
-            <a:r>
-              <a:rPr lang="en-US" sz="5600" b="1" dirty="0">
-                <a:solidFill>
-                  <a:srgbClr val="EEEFF5"/>
-                </a:solidFill>
-                <a:latin typeface="Barlow Bold" pitchFamily="34" charset="0"/>
-                <a:ea typeface="Barlow Bold" pitchFamily="34" charset="-122"/>
-                <a:cs typeface="Barlow Bold" pitchFamily="34" charset="-120"/>
-              </a:rPr>
-              <a:t>$1.2M</a:t>
-            </a:r>
-            <a:endParaRPr lang="en-US" sz="5600" dirty="0"/>
-          </a:p>
-        </p:txBody>
-      </p:sp>
-      <p:sp>
-        <p:nvSpPr>
-          <p:cNvPr id="11" name="Text 8"/>
-          <p:cNvSpPr/>
-          <p:nvPr/>
-        </p:nvSpPr>
-        <p:spPr>
-          <a:xfrm>
-            <a:off x="3146584" y="6052423"/>
-            <a:ext cx="2850713" cy="356235"/>
-          </a:xfrm>
-          <a:prstGeom prst="rect">
-            <a:avLst/>
-          </a:prstGeom>
-          <a:noFill/>
-          <a:ln/>
-        </p:spPr>
-        <p:txBody>
-          <a:bodyPr wrap="none" lIns="0" tIns="0" rIns="0" bIns="0" rtlCol="0" anchor="t"/>
-          <a:lstStyle/>
-          <a:p>
-            <a:pPr algn="ctr" indent="0" marL="0">
-              <a:lnSpc>
-                <a:spcPts val="2800"/>
-              </a:lnSpc>
-              <a:buNone/>
-            </a:pPr>
-            <a:r>
-              <a:rPr lang="en-US" sz="2200" b="1" dirty="0">
-                <a:solidFill>
-                  <a:srgbClr val="EEEFF5"/>
-                </a:solidFill>
-                <a:latin typeface="Barlow Bold" pitchFamily="34" charset="0"/>
-                <a:ea typeface="Barlow Bold" pitchFamily="34" charset="-122"/>
-                <a:cs typeface="Barlow Bold" pitchFamily="34" charset="-120"/>
-              </a:rPr>
-              <a:t>Licensing Revenue</a:t>
-            </a:r>
-            <a:endParaRPr lang="en-US" sz="2200" dirty="0"/>
-          </a:p>
-        </p:txBody>
-      </p:sp>
-      <p:sp>
-        <p:nvSpPr>
-          <p:cNvPr id="12" name="Text 9"/>
-          <p:cNvSpPr/>
-          <p:nvPr/>
-        </p:nvSpPr>
-        <p:spPr>
-          <a:xfrm>
-            <a:off x="2746296" y="6538555"/>
-            <a:ext cx="3651290" cy="346710"/>
-          </a:xfrm>
-          <a:prstGeom prst="rect">
-            <a:avLst/>
-          </a:prstGeom>
-          <a:noFill/>
-          <a:ln/>
-        </p:spPr>
-        <p:txBody>
-          <a:bodyPr wrap="none" lIns="0" tIns="0" rIns="0" bIns="0" rtlCol="0" anchor="t"/>
-          <a:lstStyle/>
-          <a:p>
-            <a:pPr algn="ctr" indent="0" marL="0">
-              <a:lnSpc>
-                <a:spcPts val="2700"/>
-              </a:lnSpc>
-              <a:buNone/>
-            </a:pPr>
-            <a:r>
-              <a:rPr lang="en-US" sz="1700" dirty="0">
-                <a:solidFill>
-                  <a:srgbClr val="EEEFF5"/>
-                </a:solidFill>
-                <a:latin typeface="Montserrat" pitchFamily="34" charset="0"/>
-                <a:ea typeface="Montserrat" pitchFamily="34" charset="-122"/>
-                <a:cs typeface="Montserrat" pitchFamily="34" charset="-120"/>
-              </a:rPr>
-              <a:t>API access for developers</a:t>
-            </a:r>
-            <a:endParaRPr lang="en-US" sz="1700" dirty="0"/>
-          </a:p>
-        </p:txBody>
-      </p:sp>
     </p:spTree>
   </p:cSld>
   <p:clrMapOvr>
@@ -7499,4 +8887,319 @@
     </a:ext>
   </a:extLst>
 </a:theme>
+</file>
+
+<file path=ppt/theme/theme2.xml><?xml version="1.0" encoding="utf-8"?>
+<a:theme xmlns:a="http://schemas.openxmlformats.org/drawingml/2006/main" name="Office Theme">
+  <a:themeElements>
+    <a:clrScheme name="Office">
+      <a:dk1>
+        <a:sysClr val="windowText" lastClr="000000"/>
+      </a:dk1>
+      <a:lt1>
+        <a:sysClr val="window" lastClr="FFFFFF"/>
+      </a:lt1>
+      <a:dk2>
+        <a:srgbClr val="0E2841"/>
+      </a:dk2>
+      <a:lt2>
+        <a:srgbClr val="E8E8E8"/>
+      </a:lt2>
+      <a:accent1>
+        <a:srgbClr val="156082"/>
+      </a:accent1>
+      <a:accent2>
+        <a:srgbClr val="E97132"/>
+      </a:accent2>
+      <a:accent3>
+        <a:srgbClr val="196B24"/>
+      </a:accent3>
+      <a:accent4>
+        <a:srgbClr val="0F9ED5"/>
+      </a:accent4>
+      <a:accent5>
+        <a:srgbClr val="A02B93"/>
+      </a:accent5>
+      <a:accent6>
+        <a:srgbClr val="4EA72E"/>
+      </a:accent6>
+      <a:hlink>
+        <a:srgbClr val="467886"/>
+      </a:hlink>
+      <a:folHlink>
+        <a:srgbClr val="96607D"/>
+      </a:folHlink>
+    </a:clrScheme>
+    <a:fontScheme name="Office">
+      <a:majorFont>
+        <a:latin typeface="Aptos Display" panose="02110004020202020204"/>
+        <a:ea typeface=""/>
+        <a:cs typeface=""/>
+        <a:font script="Jpan" typeface="游ゴシック Light"/>
+        <a:font script="Hang" typeface="맑은 고딕"/>
+        <a:font script="Hans" typeface="等线 Light"/>
+        <a:font script="Hant" typeface="新細明體"/>
+        <a:font script="Arab" typeface="Times New Roman"/>
+        <a:font script="Hebr" typeface="Times New Roman"/>
+        <a:font script="Thai" typeface="Angsana New"/>
+        <a:font script="Ethi" typeface="Nyala"/>
+        <a:font script="Beng" typeface="Vrinda"/>
+        <a:font script="Gujr" typeface="Shruti"/>
+        <a:font script="Khmr" typeface="MoolBoran"/>
+        <a:font script="Knda" typeface="Tunga"/>
+        <a:font script="Guru" typeface="Raavi"/>
+        <a:font script="Cans" typeface="Euphemia"/>
+        <a:font script="Cher" typeface="Plantagenet Cherokee"/>
+        <a:font script="Yiii" typeface="Microsoft Yi Baiti"/>
+        <a:font script="Tibt" typeface="Microsoft Himalaya"/>
+        <a:font script="Thaa" typeface="MV Boli"/>
+        <a:font script="Deva" typeface="Mangal"/>
+        <a:font script="Telu" typeface="Gautami"/>
+        <a:font script="Taml" typeface="Latha"/>
+        <a:font script="Syrc" typeface="Estrangelo Edessa"/>
+        <a:font script="Orya" typeface="Kalinga"/>
+        <a:font script="Mlym" typeface="Kartika"/>
+        <a:font script="Laoo" typeface="DokChampa"/>
+        <a:font script="Sinh" typeface="Iskoola Pota"/>
+        <a:font script="Mong" typeface="Mongolian Baiti"/>
+        <a:font script="Viet" typeface="Times New Roman"/>
+        <a:font script="Uigh" typeface="Microsoft Uighur"/>
+        <a:font script="Geor" typeface="Sylfaen"/>
+        <a:font script="Armn" typeface="Arial"/>
+        <a:font script="Bugi" typeface="Leelawadee UI"/>
+        <a:font script="Bopo" typeface="Microsoft JhengHei"/>
+        <a:font script="Java" typeface="Javanese Text"/>
+        <a:font script="Lisu" typeface="Segoe UI"/>
+        <a:font script="Mymr" typeface="Myanmar Text"/>
+        <a:font script="Nkoo" typeface="Ebrima"/>
+        <a:font script="Olck" typeface="Nirmala UI"/>
+        <a:font script="Osma" typeface="Ebrima"/>
+        <a:font script="Phag" typeface="Phagspa"/>
+        <a:font script="Syrn" typeface="Estrangelo Edessa"/>
+        <a:font script="Syrj" typeface="Estrangelo Edessa"/>
+        <a:font script="Syre" typeface="Estrangelo Edessa"/>
+        <a:font script="Sora" typeface="Nirmala UI"/>
+        <a:font script="Tale" typeface="Microsoft Tai Le"/>
+        <a:font script="Talu" typeface="Microsoft New Tai Lue"/>
+        <a:font script="Tfng" typeface="Ebrima"/>
+      </a:majorFont>
+      <a:minorFont>
+        <a:latin typeface="Aptos" panose="02110004020202020204"/>
+        <a:ea typeface=""/>
+        <a:cs typeface=""/>
+        <a:font script="Jpan" typeface="游ゴシック"/>
+        <a:font script="Hang" typeface="맑은 고딕"/>
+        <a:font script="Hans" typeface="等线"/>
+        <a:font script="Hant" typeface="新細明體"/>
+        <a:font script="Arab" typeface="Arial"/>
+        <a:font script="Hebr" typeface="Arial"/>
+        <a:font script="Thai" typeface="Cordia New"/>
+        <a:font script="Ethi" typeface="Nyala"/>
+        <a:font script="Beng" typeface="Vrinda"/>
+        <a:font script="Gujr" typeface="Shruti"/>
+        <a:font script="Khmr" typeface="DaunPenh"/>
+        <a:font script="Knda" typeface="Tunga"/>
+        <a:font script="Guru" typeface="Raavi"/>
+        <a:font script="Cans" typeface="Euphemia"/>
+        <a:font script="Cher" typeface="Plantagenet Cherokee"/>
+        <a:font script="Yiii" typeface="Microsoft Yi Baiti"/>
+        <a:font script="Tibt" typeface="Microsoft Himalaya"/>
+        <a:font script="Thaa" typeface="MV Boli"/>
+        <a:font script="Deva" typeface="Mangal"/>
+        <a:font script="Telu" typeface="Gautami"/>
+        <a:font script="Taml" typeface="Latha"/>
+        <a:font script="Syrc" typeface="Estrangelo Edessa"/>
+        <a:font script="Orya" typeface="Kalinga"/>
+        <a:font script="Mlym" typeface="Kartika"/>
+        <a:font script="Laoo" typeface="DokChampa"/>
+        <a:font script="Sinh" typeface="Iskoola Pota"/>
+        <a:font script="Mong" typeface="Mongolian Baiti"/>
+        <a:font script="Viet" typeface="Arial"/>
+        <a:font script="Uigh" typeface="Microsoft Uighur"/>
+        <a:font script="Geor" typeface="Sylfaen"/>
+        <a:font script="Armn" typeface="Arial"/>
+        <a:font script="Bugi" typeface="Leelawadee UI"/>
+        <a:font script="Bopo" typeface="Microsoft JhengHei"/>
+        <a:font script="Java" typeface="Javanese Text"/>
+        <a:font script="Lisu" typeface="Segoe UI"/>
+        <a:font script="Mymr" typeface="Myanmar Text"/>
+        <a:font script="Nkoo" typeface="Ebrima"/>
+        <a:font script="Olck" typeface="Nirmala UI"/>
+        <a:font script="Osma" typeface="Ebrima"/>
+        <a:font script="Phag" typeface="Phagspa"/>
+        <a:font script="Syrn" typeface="Estrangelo Edessa"/>
+        <a:font script="Syrj" typeface="Estrangelo Edessa"/>
+        <a:font script="Syre" typeface="Estrangelo Edessa"/>
+        <a:font script="Sora" typeface="Nirmala UI"/>
+        <a:font script="Tale" typeface="Microsoft Tai Le"/>
+        <a:font script="Talu" typeface="Microsoft New Tai Lue"/>
+        <a:font script="Tfng" typeface="Ebrima"/>
+      </a:minorFont>
+    </a:fontScheme>
+    <a:fmtScheme name="Office">
+      <a:fillStyleLst>
+        <a:solidFill>
+          <a:schemeClr val="phClr"/>
+        </a:solidFill>
+        <a:gradFill rotWithShape="1">
+          <a:gsLst>
+            <a:gs pos="0">
+              <a:schemeClr val="phClr">
+                <a:lumMod val="110000"/>
+                <a:satMod val="105000"/>
+                <a:tint val="67000"/>
+              </a:schemeClr>
+            </a:gs>
+            <a:gs pos="50000">
+              <a:schemeClr val="phClr">
+                <a:lumMod val="105000"/>
+                <a:satMod val="103000"/>
+                <a:tint val="73000"/>
+              </a:schemeClr>
+            </a:gs>
+            <a:gs pos="100000">
+              <a:schemeClr val="phClr">
+                <a:lumMod val="105000"/>
+                <a:satMod val="109000"/>
+                <a:tint val="81000"/>
+              </a:schemeClr>
+            </a:gs>
+          </a:gsLst>
+          <a:lin ang="5400000" scaled="0"/>
+        </a:gradFill>
+        <a:gradFill rotWithShape="1">
+          <a:gsLst>
+            <a:gs pos="0">
+              <a:schemeClr val="phClr">
+                <a:satMod val="103000"/>
+                <a:lumMod val="102000"/>
+                <a:tint val="94000"/>
+              </a:schemeClr>
+            </a:gs>
+            <a:gs pos="50000">
+              <a:schemeClr val="phClr">
+                <a:satMod val="110000"/>
+                <a:lumMod val="100000"/>
+                <a:shade val="100000"/>
+              </a:schemeClr>
+            </a:gs>
+            <a:gs pos="100000">
+              <a:schemeClr val="phClr">
+                <a:lumMod val="99000"/>
+                <a:satMod val="120000"/>
+                <a:shade val="78000"/>
+              </a:schemeClr>
+            </a:gs>
+          </a:gsLst>
+          <a:lin ang="5400000" scaled="0"/>
+        </a:gradFill>
+      </a:fillStyleLst>
+      <a:lnStyleLst>
+        <a:ln w="12700" cap="flat" cmpd="sng" algn="ctr">
+          <a:solidFill>
+            <a:schemeClr val="phClr"/>
+          </a:solidFill>
+          <a:prstDash val="solid"/>
+          <a:miter lim="800000"/>
+        </a:ln>
+        <a:ln w="19050" cap="flat" cmpd="sng" algn="ctr">
+          <a:solidFill>
+            <a:schemeClr val="phClr"/>
+          </a:solidFill>
+          <a:prstDash val="solid"/>
+          <a:miter lim="800000"/>
+        </a:ln>
+        <a:ln w="25400" cap="flat" cmpd="sng" algn="ctr">
+          <a:solidFill>
+            <a:schemeClr val="phClr"/>
+          </a:solidFill>
+          <a:prstDash val="solid"/>
+          <a:miter lim="800000"/>
+        </a:ln>
+      </a:lnStyleLst>
+      <a:effectStyleLst>
+        <a:effectStyle>
+          <a:effectLst/>
+        </a:effectStyle>
+        <a:effectStyle>
+          <a:effectLst/>
+        </a:effectStyle>
+        <a:effectStyle>
+          <a:effectLst>
+            <a:outerShdw blurRad="57150" dist="19050" dir="5400000" algn="ctr" rotWithShape="0">
+              <a:srgbClr val="000000">
+                <a:alpha val="63000"/>
+              </a:srgbClr>
+            </a:outerShdw>
+          </a:effectLst>
+        </a:effectStyle>
+      </a:effectStyleLst>
+      <a:bgFillStyleLst>
+        <a:solidFill>
+          <a:schemeClr val="phClr"/>
+        </a:solidFill>
+        <a:solidFill>
+          <a:schemeClr val="phClr">
+            <a:tint val="95000"/>
+            <a:satMod val="170000"/>
+          </a:schemeClr>
+        </a:solidFill>
+        <a:gradFill rotWithShape="1">
+          <a:gsLst>
+            <a:gs pos="0">
+              <a:schemeClr val="phClr">
+                <a:tint val="93000"/>
+                <a:satMod val="150000"/>
+                <a:shade val="98000"/>
+                <a:lumMod val="102000"/>
+              </a:schemeClr>
+            </a:gs>
+            <a:gs pos="50000">
+              <a:schemeClr val="phClr">
+                <a:tint val="98000"/>
+                <a:satMod val="130000"/>
+                <a:shade val="90000"/>
+                <a:lumMod val="103000"/>
+              </a:schemeClr>
+            </a:gs>
+            <a:gs pos="100000">
+              <a:schemeClr val="phClr">
+                <a:shade val="63000"/>
+                <a:satMod val="120000"/>
+              </a:schemeClr>
+            </a:gs>
+          </a:gsLst>
+          <a:lin ang="5400000" scaled="0"/>
+        </a:gradFill>
+      </a:bgFillStyleLst>
+    </a:fmtScheme>
+  </a:themeElements>
+  <a:objectDefaults>
+    <a:lnDef>
+      <a:spPr/>
+      <a:bodyPr/>
+      <a:lstStyle/>
+      <a:style>
+        <a:lnRef idx="2">
+          <a:schemeClr val="accent1"/>
+        </a:lnRef>
+        <a:fillRef idx="0">
+          <a:schemeClr val="accent1"/>
+        </a:fillRef>
+        <a:effectRef idx="1">
+          <a:schemeClr val="accent1"/>
+        </a:effectRef>
+        <a:fontRef idx="minor">
+          <a:schemeClr val="tx1"/>
+        </a:fontRef>
+      </a:style>
+    </a:lnDef>
+  </a:objectDefaults>
+  <a:extraClrSchemeLst/>
+  <a:extLst>
+    <a:ext uri="{05A4C25C-085E-4340-85A3-A5531E510DB2}">
+      <thm15:themeFamily xmlns:thm15="http://schemas.microsoft.com/office/thememl/2012/main" name="Office Theme" id="{2E142A2C-CD16-42D6-873A-C26D2A0506FA}" vid="{1BDDFF52-6CD6-40A5-AB3C-68EB2F1E4D0A}"/>
+    </a:ext>
+  </a:extLst>
+</a:theme>
 </file>